--- a/その他/新入生ガイダンス/00_はじめに.pptx
+++ b/その他/新入生ガイダンス/00_はじめに.pptx
@@ -284,7 +284,7 @@
           <a:p>
             <a:fld id="{E9CC885B-4903-4D54-9A93-00025F12DED9}" type="datetimeFigureOut">
               <a:rPr kumimoji="1" lang="ja-JP" altLang="en-US" smtClean="0"/>
-              <a:t>2026/3/17</a:t>
+              <a:t>2026/3/22</a:t>
             </a:fld>
             <a:endParaRPr kumimoji="1" lang="ja-JP" altLang="en-US"/>
           </a:p>
@@ -514,7 +514,7 @@
           <a:p>
             <a:fld id="{E9CC885B-4903-4D54-9A93-00025F12DED9}" type="datetimeFigureOut">
               <a:rPr kumimoji="1" lang="ja-JP" altLang="en-US" smtClean="0"/>
-              <a:t>2026/3/17</a:t>
+              <a:t>2026/3/22</a:t>
             </a:fld>
             <a:endParaRPr kumimoji="1" lang="ja-JP" altLang="en-US"/>
           </a:p>
@@ -754,7 +754,7 @@
           <a:p>
             <a:fld id="{E9CC885B-4903-4D54-9A93-00025F12DED9}" type="datetimeFigureOut">
               <a:rPr kumimoji="1" lang="ja-JP" altLang="en-US" smtClean="0"/>
-              <a:t>2026/3/17</a:t>
+              <a:t>2026/3/22</a:t>
             </a:fld>
             <a:endParaRPr kumimoji="1" lang="ja-JP" altLang="en-US"/>
           </a:p>
@@ -984,7 +984,7 @@
           <a:p>
             <a:fld id="{E9CC885B-4903-4D54-9A93-00025F12DED9}" type="datetimeFigureOut">
               <a:rPr kumimoji="1" lang="ja-JP" altLang="en-US" smtClean="0"/>
-              <a:t>2026/3/17</a:t>
+              <a:t>2026/3/22</a:t>
             </a:fld>
             <a:endParaRPr kumimoji="1" lang="ja-JP" altLang="en-US"/>
           </a:p>
@@ -1259,7 +1259,7 @@
           <a:p>
             <a:fld id="{E9CC885B-4903-4D54-9A93-00025F12DED9}" type="datetimeFigureOut">
               <a:rPr kumimoji="1" lang="ja-JP" altLang="en-US" smtClean="0"/>
-              <a:t>2026/3/17</a:t>
+              <a:t>2026/3/22</a:t>
             </a:fld>
             <a:endParaRPr kumimoji="1" lang="ja-JP" altLang="en-US"/>
           </a:p>
@@ -1588,7 +1588,7 @@
           <a:p>
             <a:fld id="{E9CC885B-4903-4D54-9A93-00025F12DED9}" type="datetimeFigureOut">
               <a:rPr kumimoji="1" lang="ja-JP" altLang="en-US" smtClean="0"/>
-              <a:t>2026/3/17</a:t>
+              <a:t>2026/3/22</a:t>
             </a:fld>
             <a:endParaRPr kumimoji="1" lang="ja-JP" altLang="en-US"/>
           </a:p>
@@ -2064,7 +2064,7 @@
           <a:p>
             <a:fld id="{E9CC885B-4903-4D54-9A93-00025F12DED9}" type="datetimeFigureOut">
               <a:rPr kumimoji="1" lang="ja-JP" altLang="en-US" smtClean="0"/>
-              <a:t>2026/3/17</a:t>
+              <a:t>2026/3/22</a:t>
             </a:fld>
             <a:endParaRPr kumimoji="1" lang="ja-JP" altLang="en-US"/>
           </a:p>
@@ -2205,7 +2205,7 @@
           <a:p>
             <a:fld id="{E9CC885B-4903-4D54-9A93-00025F12DED9}" type="datetimeFigureOut">
               <a:rPr kumimoji="1" lang="ja-JP" altLang="en-US" smtClean="0"/>
-              <a:t>2026/3/17</a:t>
+              <a:t>2026/3/22</a:t>
             </a:fld>
             <a:endParaRPr kumimoji="1" lang="ja-JP" altLang="en-US"/>
           </a:p>
@@ -2318,7 +2318,7 @@
           <a:p>
             <a:fld id="{E9CC885B-4903-4D54-9A93-00025F12DED9}" type="datetimeFigureOut">
               <a:rPr kumimoji="1" lang="ja-JP" altLang="en-US" smtClean="0"/>
-              <a:t>2026/3/17</a:t>
+              <a:t>2026/3/22</a:t>
             </a:fld>
             <a:endParaRPr kumimoji="1" lang="ja-JP" altLang="en-US"/>
           </a:p>
@@ -2661,7 +2661,7 @@
           <a:p>
             <a:fld id="{E9CC885B-4903-4D54-9A93-00025F12DED9}" type="datetimeFigureOut">
               <a:rPr kumimoji="1" lang="ja-JP" altLang="en-US" smtClean="0"/>
-              <a:t>2026/3/17</a:t>
+              <a:t>2026/3/22</a:t>
             </a:fld>
             <a:endParaRPr kumimoji="1" lang="ja-JP" altLang="en-US"/>
           </a:p>
@@ -2949,7 +2949,7 @@
           <a:p>
             <a:fld id="{E9CC885B-4903-4D54-9A93-00025F12DED9}" type="datetimeFigureOut">
               <a:rPr kumimoji="1" lang="ja-JP" altLang="en-US" smtClean="0"/>
-              <a:t>2026/3/17</a:t>
+              <a:t>2026/3/22</a:t>
             </a:fld>
             <a:endParaRPr kumimoji="1" lang="ja-JP" altLang="en-US"/>
           </a:p>
@@ -3222,7 +3222,7 @@
           <a:p>
             <a:fld id="{E9CC885B-4903-4D54-9A93-00025F12DED9}" type="datetimeFigureOut">
               <a:rPr kumimoji="1" lang="ja-JP" altLang="en-US" smtClean="0"/>
-              <a:t>2026/3/17</a:t>
+              <a:t>2026/3/22</a:t>
             </a:fld>
             <a:endParaRPr kumimoji="1" lang="ja-JP" altLang="en-US"/>
           </a:p>
@@ -9950,6 +9950,61 @@
           </a:p>
         </p:txBody>
       </p:sp>
+      <p:sp>
+        <p:nvSpPr>
+          <p:cNvPr id="7" name="テキスト ボックス 6">
+            <a:extLst>
+              <a:ext uri="{FF2B5EF4-FFF2-40B4-BE49-F238E27FC236}">
+                <a16:creationId xmlns:a16="http://schemas.microsoft.com/office/drawing/2014/main" id="{44E5C59F-9E4E-4C82-A12E-335DD1A451F7}"/>
+              </a:ext>
+            </a:extLst>
+          </p:cNvPr>
+          <p:cNvSpPr txBox="1"/>
+          <p:nvPr/>
+        </p:nvSpPr>
+        <p:spPr>
+          <a:xfrm>
+            <a:off x="7590446" y="6200281"/>
+            <a:ext cx="4185761" cy="461665"/>
+          </a:xfrm>
+          <a:prstGeom prst="rect">
+            <a:avLst/>
+          </a:prstGeom>
+          <a:noFill/>
+        </p:spPr>
+        <p:txBody>
+          <a:bodyPr wrap="none" rtlCol="0">
+            <a:spAutoFit/>
+          </a:bodyPr>
+          <a:lstStyle/>
+          <a:p>
+            <a:r>
+              <a:rPr lang="en-US" altLang="ja-JP" sz="2400" dirty="0">
+                <a:solidFill>
+                  <a:srgbClr val="FF0000"/>
+                </a:solidFill>
+                <a:latin typeface="HGS創英角ｺﾞｼｯｸUB" panose="020B0900000000000000" pitchFamily="50" charset="-128"/>
+                <a:ea typeface="HGS創英角ｺﾞｼｯｸUB" panose="020B0900000000000000" pitchFamily="50" charset="-128"/>
+              </a:rPr>
+              <a:t>※</a:t>
+            </a:r>
+            <a:r>
+              <a:rPr lang="ja-JP" altLang="en-US" sz="2400" dirty="0">
+                <a:solidFill>
+                  <a:srgbClr val="FF0000"/>
+                </a:solidFill>
+                <a:latin typeface="HGS創英角ｺﾞｼｯｸUB" panose="020B0900000000000000" pitchFamily="50" charset="-128"/>
+                <a:ea typeface="HGS創英角ｺﾞｼｯｸUB" panose="020B0900000000000000" pitchFamily="50" charset="-128"/>
+              </a:rPr>
+              <a:t>授業は３年生になってから</a:t>
+            </a:r>
+            <a:endParaRPr lang="en-US" altLang="ja-JP" sz="2400" dirty="0">
+              <a:latin typeface="HGS創英角ｺﾞｼｯｸUB" panose="020B0900000000000000" pitchFamily="50" charset="-128"/>
+              <a:ea typeface="HGS創英角ｺﾞｼｯｸUB" panose="020B0900000000000000" pitchFamily="50" charset="-128"/>
+            </a:endParaRPr>
+          </a:p>
+        </p:txBody>
+      </p:sp>
     </p:spTree>
     <p:extLst>
       <p:ext uri="{BB962C8B-B14F-4D97-AF65-F5344CB8AC3E}">

--- a/その他/新入生ガイダンス/00_はじめに.pptx
+++ b/その他/新入生ガイダンス/00_はじめに.pptx
@@ -30,7 +30,13 @@
     <p:sldId id="279" r:id="rId24"/>
     <p:sldId id="280" r:id="rId25"/>
     <p:sldId id="281" r:id="rId26"/>
-    <p:sldId id="282" r:id="rId27"/>
+    <p:sldId id="284" r:id="rId27"/>
+    <p:sldId id="285" r:id="rId28"/>
+    <p:sldId id="286" r:id="rId29"/>
+    <p:sldId id="287" r:id="rId30"/>
+    <p:sldId id="288" r:id="rId31"/>
+    <p:sldId id="283" r:id="rId32"/>
+    <p:sldId id="282" r:id="rId33"/>
   </p:sldIdLst>
   <p:sldSz cx="12192000" cy="6858000"/>
   <p:notesSz cx="6858000" cy="9144000"/>
@@ -284,7 +290,7 @@
           <a:p>
             <a:fld id="{E9CC885B-4903-4D54-9A93-00025F12DED9}" type="datetimeFigureOut">
               <a:rPr kumimoji="1" lang="ja-JP" altLang="en-US" smtClean="0"/>
-              <a:t>2026/3/22</a:t>
+              <a:t>2026/3/25</a:t>
             </a:fld>
             <a:endParaRPr kumimoji="1" lang="ja-JP" altLang="en-US"/>
           </a:p>
@@ -514,7 +520,7 @@
           <a:p>
             <a:fld id="{E9CC885B-4903-4D54-9A93-00025F12DED9}" type="datetimeFigureOut">
               <a:rPr kumimoji="1" lang="ja-JP" altLang="en-US" smtClean="0"/>
-              <a:t>2026/3/22</a:t>
+              <a:t>2026/3/25</a:t>
             </a:fld>
             <a:endParaRPr kumimoji="1" lang="ja-JP" altLang="en-US"/>
           </a:p>
@@ -754,7 +760,7 @@
           <a:p>
             <a:fld id="{E9CC885B-4903-4D54-9A93-00025F12DED9}" type="datetimeFigureOut">
               <a:rPr kumimoji="1" lang="ja-JP" altLang="en-US" smtClean="0"/>
-              <a:t>2026/3/22</a:t>
+              <a:t>2026/3/25</a:t>
             </a:fld>
             <a:endParaRPr kumimoji="1" lang="ja-JP" altLang="en-US"/>
           </a:p>
@@ -984,7 +990,7 @@
           <a:p>
             <a:fld id="{E9CC885B-4903-4D54-9A93-00025F12DED9}" type="datetimeFigureOut">
               <a:rPr kumimoji="1" lang="ja-JP" altLang="en-US" smtClean="0"/>
-              <a:t>2026/3/22</a:t>
+              <a:t>2026/3/25</a:t>
             </a:fld>
             <a:endParaRPr kumimoji="1" lang="ja-JP" altLang="en-US"/>
           </a:p>
@@ -1259,7 +1265,7 @@
           <a:p>
             <a:fld id="{E9CC885B-4903-4D54-9A93-00025F12DED9}" type="datetimeFigureOut">
               <a:rPr kumimoji="1" lang="ja-JP" altLang="en-US" smtClean="0"/>
-              <a:t>2026/3/22</a:t>
+              <a:t>2026/3/25</a:t>
             </a:fld>
             <a:endParaRPr kumimoji="1" lang="ja-JP" altLang="en-US"/>
           </a:p>
@@ -1588,7 +1594,7 @@
           <a:p>
             <a:fld id="{E9CC885B-4903-4D54-9A93-00025F12DED9}" type="datetimeFigureOut">
               <a:rPr kumimoji="1" lang="ja-JP" altLang="en-US" smtClean="0"/>
-              <a:t>2026/3/22</a:t>
+              <a:t>2026/3/25</a:t>
             </a:fld>
             <a:endParaRPr kumimoji="1" lang="ja-JP" altLang="en-US"/>
           </a:p>
@@ -2064,7 +2070,7 @@
           <a:p>
             <a:fld id="{E9CC885B-4903-4D54-9A93-00025F12DED9}" type="datetimeFigureOut">
               <a:rPr kumimoji="1" lang="ja-JP" altLang="en-US" smtClean="0"/>
-              <a:t>2026/3/22</a:t>
+              <a:t>2026/3/25</a:t>
             </a:fld>
             <a:endParaRPr kumimoji="1" lang="ja-JP" altLang="en-US"/>
           </a:p>
@@ -2205,7 +2211,7 @@
           <a:p>
             <a:fld id="{E9CC885B-4903-4D54-9A93-00025F12DED9}" type="datetimeFigureOut">
               <a:rPr kumimoji="1" lang="ja-JP" altLang="en-US" smtClean="0"/>
-              <a:t>2026/3/22</a:t>
+              <a:t>2026/3/25</a:t>
             </a:fld>
             <a:endParaRPr kumimoji="1" lang="ja-JP" altLang="en-US"/>
           </a:p>
@@ -2318,7 +2324,7 @@
           <a:p>
             <a:fld id="{E9CC885B-4903-4D54-9A93-00025F12DED9}" type="datetimeFigureOut">
               <a:rPr kumimoji="1" lang="ja-JP" altLang="en-US" smtClean="0"/>
-              <a:t>2026/3/22</a:t>
+              <a:t>2026/3/25</a:t>
             </a:fld>
             <a:endParaRPr kumimoji="1" lang="ja-JP" altLang="en-US"/>
           </a:p>
@@ -2661,7 +2667,7 @@
           <a:p>
             <a:fld id="{E9CC885B-4903-4D54-9A93-00025F12DED9}" type="datetimeFigureOut">
               <a:rPr kumimoji="1" lang="ja-JP" altLang="en-US" smtClean="0"/>
-              <a:t>2026/3/22</a:t>
+              <a:t>2026/3/25</a:t>
             </a:fld>
             <a:endParaRPr kumimoji="1" lang="ja-JP" altLang="en-US"/>
           </a:p>
@@ -2949,7 +2955,7 @@
           <a:p>
             <a:fld id="{E9CC885B-4903-4D54-9A93-00025F12DED9}" type="datetimeFigureOut">
               <a:rPr kumimoji="1" lang="ja-JP" altLang="en-US" smtClean="0"/>
-              <a:t>2026/3/22</a:t>
+              <a:t>2026/3/25</a:t>
             </a:fld>
             <a:endParaRPr kumimoji="1" lang="ja-JP" altLang="en-US"/>
           </a:p>
@@ -3222,7 +3228,7 @@
           <a:p>
             <a:fld id="{E9CC885B-4903-4D54-9A93-00025F12DED9}" type="datetimeFigureOut">
               <a:rPr kumimoji="1" lang="ja-JP" altLang="en-US" smtClean="0"/>
-              <a:t>2026/3/22</a:t>
+              <a:t>2026/3/25</a:t>
             </a:fld>
             <a:endParaRPr kumimoji="1" lang="ja-JP" altLang="en-US"/>
           </a:p>
@@ -8038,7 +8044,7 @@
         <p:spPr>
           <a:xfrm>
             <a:off x="567542" y="1216429"/>
-            <a:ext cx="6340197" cy="5632311"/>
+            <a:ext cx="9417963" cy="3416320"/>
           </a:xfrm>
           <a:prstGeom prst="rect">
             <a:avLst/>
@@ -8056,161 +8062,110 @@
                 <a:latin typeface="HGS創英角ｺﾞｼｯｸUB" panose="020B0900000000000000" pitchFamily="50" charset="-128"/>
                 <a:ea typeface="HGS創英角ｺﾞｼｯｸUB" panose="020B0900000000000000" pitchFamily="50" charset="-128"/>
               </a:rPr>
-              <a:t>明日の予定は以下の通りです。</a:t>
-            </a:r>
-            <a:endParaRPr lang="en-US" altLang="ja-JP" sz="2400" dirty="0">
-              <a:latin typeface="HGS創英角ｺﾞｼｯｸUB" panose="020B0900000000000000" pitchFamily="50" charset="-128"/>
-              <a:ea typeface="HGS創英角ｺﾞｼｯｸUB" panose="020B0900000000000000" pitchFamily="50" charset="-128"/>
-            </a:endParaRPr>
-          </a:p>
-          <a:p>
-            <a:endParaRPr lang="en-US" altLang="ja-JP" sz="2400" dirty="0">
-              <a:latin typeface="HGS創英角ｺﾞｼｯｸUB" panose="020B0900000000000000" pitchFamily="50" charset="-128"/>
-              <a:ea typeface="HGS創英角ｺﾞｼｯｸUB" panose="020B0900000000000000" pitchFamily="50" charset="-128"/>
-            </a:endParaRPr>
-          </a:p>
-          <a:p>
-            <a:r>
-              <a:rPr lang="ja-JP" altLang="en-US" sz="2400" dirty="0">
-                <a:latin typeface="HGS創英角ｺﾞｼｯｸUB" panose="020B0900000000000000" pitchFamily="50" charset="-128"/>
-                <a:ea typeface="HGS創英角ｺﾞｼｯｸUB" panose="020B0900000000000000" pitchFamily="50" charset="-128"/>
-              </a:rPr>
-              <a:t>１限目</a:t>
-            </a:r>
-            <a:endParaRPr lang="en-US" altLang="ja-JP" sz="2400" dirty="0">
-              <a:latin typeface="HGS創英角ｺﾞｼｯｸUB" panose="020B0900000000000000" pitchFamily="50" charset="-128"/>
-              <a:ea typeface="HGS創英角ｺﾞｼｯｸUB" panose="020B0900000000000000" pitchFamily="50" charset="-128"/>
-            </a:endParaRPr>
-          </a:p>
-          <a:p>
-            <a:r>
-              <a:rPr lang="ja-JP" altLang="en-US" sz="2400" dirty="0">
-                <a:latin typeface="HGS創英角ｺﾞｼｯｸUB" panose="020B0900000000000000" pitchFamily="50" charset="-128"/>
-                <a:ea typeface="HGS創英角ｺﾞｼｯｸUB" panose="020B0900000000000000" pitchFamily="50" charset="-128"/>
-              </a:rPr>
-              <a:t>　楽しい感じでグループワーク</a:t>
-            </a:r>
-            <a:endParaRPr lang="en-US" altLang="ja-JP" sz="2400" dirty="0">
-              <a:latin typeface="HGS創英角ｺﾞｼｯｸUB" panose="020B0900000000000000" pitchFamily="50" charset="-128"/>
-              <a:ea typeface="HGS創英角ｺﾞｼｯｸUB" panose="020B0900000000000000" pitchFamily="50" charset="-128"/>
-            </a:endParaRPr>
-          </a:p>
-          <a:p>
-            <a:r>
-              <a:rPr lang="ja-JP" altLang="en-US" sz="2400" dirty="0">
-                <a:latin typeface="HGS創英角ｺﾞｼｯｸUB" panose="020B0900000000000000" pitchFamily="50" charset="-128"/>
-                <a:ea typeface="HGS創英角ｺﾞｼｯｸUB" panose="020B0900000000000000" pitchFamily="50" charset="-128"/>
-              </a:rPr>
-              <a:t>　みんなで１つのテーマについて議論しよう</a:t>
-            </a:r>
-            <a:endParaRPr lang="en-US" altLang="ja-JP" sz="2400" dirty="0">
-              <a:latin typeface="HGS創英角ｺﾞｼｯｸUB" panose="020B0900000000000000" pitchFamily="50" charset="-128"/>
-              <a:ea typeface="HGS創英角ｺﾞｼｯｸUB" panose="020B0900000000000000" pitchFamily="50" charset="-128"/>
-            </a:endParaRPr>
-          </a:p>
-          <a:p>
-            <a:r>
-              <a:rPr lang="ja-JP" altLang="en-US" sz="2400" dirty="0">
-                <a:latin typeface="HGS創英角ｺﾞｼｯｸUB" panose="020B0900000000000000" pitchFamily="50" charset="-128"/>
-                <a:ea typeface="HGS創英角ｺﾞｼｯｸUB" panose="020B0900000000000000" pitchFamily="50" charset="-128"/>
-              </a:rPr>
-              <a:t>　</a:t>
-            </a:r>
-            <a:endParaRPr lang="en-US" altLang="ja-JP" sz="2400" dirty="0">
-              <a:latin typeface="HGS創英角ｺﾞｼｯｸUB" panose="020B0900000000000000" pitchFamily="50" charset="-128"/>
-              <a:ea typeface="HGS創英角ｺﾞｼｯｸUB" panose="020B0900000000000000" pitchFamily="50" charset="-128"/>
-            </a:endParaRPr>
-          </a:p>
-          <a:p>
-            <a:endParaRPr lang="en-US" altLang="ja-JP" sz="2400" dirty="0">
-              <a:latin typeface="HGS創英角ｺﾞｼｯｸUB" panose="020B0900000000000000" pitchFamily="50" charset="-128"/>
-              <a:ea typeface="HGS創英角ｺﾞｼｯｸUB" panose="020B0900000000000000" pitchFamily="50" charset="-128"/>
-            </a:endParaRPr>
-          </a:p>
-          <a:p>
-            <a:r>
-              <a:rPr lang="ja-JP" altLang="en-US" sz="2400" dirty="0">
-                <a:latin typeface="HGS創英角ｺﾞｼｯｸUB" panose="020B0900000000000000" pitchFamily="50" charset="-128"/>
-                <a:ea typeface="HGS創英角ｺﾞｼｯｸUB" panose="020B0900000000000000" pitchFamily="50" charset="-128"/>
-              </a:rPr>
-              <a:t>２限目</a:t>
-            </a:r>
-            <a:endParaRPr lang="en-US" altLang="ja-JP" sz="2400" dirty="0">
-              <a:latin typeface="HGS創英角ｺﾞｼｯｸUB" panose="020B0900000000000000" pitchFamily="50" charset="-128"/>
-              <a:ea typeface="HGS創英角ｺﾞｼｯｸUB" panose="020B0900000000000000" pitchFamily="50" charset="-128"/>
-            </a:endParaRPr>
-          </a:p>
-          <a:p>
-            <a:r>
-              <a:rPr lang="ja-JP" altLang="en-US" sz="2400" dirty="0">
-                <a:latin typeface="HGS創英角ｺﾞｼｯｸUB" panose="020B0900000000000000" pitchFamily="50" charset="-128"/>
-                <a:ea typeface="HGS創英角ｺﾞｼｯｸUB" panose="020B0900000000000000" pitchFamily="50" charset="-128"/>
-              </a:rPr>
-              <a:t>　大好きなものプレゼン選手権　資料作成</a:t>
-            </a:r>
-            <a:endParaRPr lang="en-US" altLang="ja-JP" sz="2400" dirty="0">
-              <a:latin typeface="HGS創英角ｺﾞｼｯｸUB" panose="020B0900000000000000" pitchFamily="50" charset="-128"/>
-              <a:ea typeface="HGS創英角ｺﾞｼｯｸUB" panose="020B0900000000000000" pitchFamily="50" charset="-128"/>
-            </a:endParaRPr>
-          </a:p>
-          <a:p>
-            <a:endParaRPr lang="en-US" altLang="ja-JP" sz="2400" dirty="0">
-              <a:latin typeface="HGS創英角ｺﾞｼｯｸUB" panose="020B0900000000000000" pitchFamily="50" charset="-128"/>
-              <a:ea typeface="HGS創英角ｺﾞｼｯｸUB" panose="020B0900000000000000" pitchFamily="50" charset="-128"/>
-            </a:endParaRPr>
-          </a:p>
-          <a:p>
-            <a:r>
-              <a:rPr lang="ja-JP" altLang="en-US" sz="2400" dirty="0">
-                <a:latin typeface="HGS創英角ｺﾞｼｯｸUB" panose="020B0900000000000000" pitchFamily="50" charset="-128"/>
-                <a:ea typeface="HGS創英角ｺﾞｼｯｸUB" panose="020B0900000000000000" pitchFamily="50" charset="-128"/>
-              </a:rPr>
-              <a:t>３限目</a:t>
-            </a:r>
-            <a:endParaRPr lang="en-US" altLang="ja-JP" sz="2400" dirty="0">
-              <a:latin typeface="HGS創英角ｺﾞｼｯｸUB" panose="020B0900000000000000" pitchFamily="50" charset="-128"/>
-              <a:ea typeface="HGS創英角ｺﾞｼｯｸUB" panose="020B0900000000000000" pitchFamily="50" charset="-128"/>
-            </a:endParaRPr>
-          </a:p>
-          <a:p>
-            <a:r>
-              <a:rPr lang="ja-JP" altLang="en-US" sz="2400" dirty="0">
-                <a:latin typeface="HGS創英角ｺﾞｼｯｸUB" panose="020B0900000000000000" pitchFamily="50" charset="-128"/>
-                <a:ea typeface="HGS創英角ｺﾞｼｯｸUB" panose="020B0900000000000000" pitchFamily="50" charset="-128"/>
-              </a:rPr>
-              <a:t>　大好きなものプレゼン選手権　発表会</a:t>
-            </a:r>
-            <a:endParaRPr lang="en-US" altLang="ja-JP" sz="2400" dirty="0">
-              <a:latin typeface="HGS創英角ｺﾞｼｯｸUB" panose="020B0900000000000000" pitchFamily="50" charset="-128"/>
-              <a:ea typeface="HGS創英角ｺﾞｼｯｸUB" panose="020B0900000000000000" pitchFamily="50" charset="-128"/>
-            </a:endParaRPr>
-          </a:p>
-          <a:p>
-            <a:endParaRPr lang="en-US" altLang="ja-JP" sz="2400" dirty="0">
-              <a:latin typeface="HGS創英角ｺﾞｼｯｸUB" panose="020B0900000000000000" pitchFamily="50" charset="-128"/>
-              <a:ea typeface="HGS創英角ｺﾞｼｯｸUB" panose="020B0900000000000000" pitchFamily="50" charset="-128"/>
-            </a:endParaRPr>
-          </a:p>
-          <a:p>
-            <a:r>
-              <a:rPr lang="ja-JP" altLang="en-US" sz="2400" dirty="0">
-                <a:latin typeface="HGS創英角ｺﾞｼｯｸUB" panose="020B0900000000000000" pitchFamily="50" charset="-128"/>
-                <a:ea typeface="HGS創英角ｺﾞｼｯｸUB" panose="020B0900000000000000" pitchFamily="50" charset="-128"/>
-              </a:rPr>
-              <a:t>４限目</a:t>
-            </a:r>
-            <a:endParaRPr lang="en-US" altLang="ja-JP" sz="2400" dirty="0">
-              <a:latin typeface="HGS創英角ｺﾞｼｯｸUB" panose="020B0900000000000000" pitchFamily="50" charset="-128"/>
-              <a:ea typeface="HGS創英角ｺﾞｼｯｸUB" panose="020B0900000000000000" pitchFamily="50" charset="-128"/>
-            </a:endParaRPr>
-          </a:p>
-          <a:p>
-            <a:r>
-              <a:rPr lang="ja-JP" altLang="en-US" sz="2400" dirty="0">
-                <a:latin typeface="HGS創英角ｺﾞｼｯｸUB" panose="020B0900000000000000" pitchFamily="50" charset="-128"/>
-                <a:ea typeface="HGS創英角ｺﾞｼｯｸUB" panose="020B0900000000000000" pitchFamily="50" charset="-128"/>
-              </a:rPr>
-              <a:t>　企業講演　㈱サイバーコネクトツー</a:t>
+              <a:t>３年間でゲーム会社に就職することは、非常に難易度が高いです。</a:t>
+            </a:r>
+            <a:endParaRPr lang="en-US" altLang="ja-JP" sz="2400" dirty="0">
+              <a:latin typeface="HGS創英角ｺﾞｼｯｸUB" panose="020B0900000000000000" pitchFamily="50" charset="-128"/>
+              <a:ea typeface="HGS創英角ｺﾞｼｯｸUB" panose="020B0900000000000000" pitchFamily="50" charset="-128"/>
+            </a:endParaRPr>
+          </a:p>
+          <a:p>
+            <a:r>
+              <a:rPr lang="ja-JP" altLang="en-US" sz="2400" dirty="0">
+                <a:latin typeface="HGS創英角ｺﾞｼｯｸUB" panose="020B0900000000000000" pitchFamily="50" charset="-128"/>
+                <a:ea typeface="HGS創英角ｺﾞｼｯｸUB" panose="020B0900000000000000" pitchFamily="50" charset="-128"/>
+              </a:rPr>
+              <a:t>これからのことを心がけて、３年間過ごしましょう。</a:t>
+            </a:r>
+            <a:endParaRPr lang="en-US" altLang="ja-JP" sz="2400" dirty="0">
+              <a:latin typeface="HGS創英角ｺﾞｼｯｸUB" panose="020B0900000000000000" pitchFamily="50" charset="-128"/>
+              <a:ea typeface="HGS創英角ｺﾞｼｯｸUB" panose="020B0900000000000000" pitchFamily="50" charset="-128"/>
+            </a:endParaRPr>
+          </a:p>
+          <a:p>
+            <a:endParaRPr lang="en-US" altLang="ja-JP" sz="2400" dirty="0">
+              <a:latin typeface="HGS創英角ｺﾞｼｯｸUB" panose="020B0900000000000000" pitchFamily="50" charset="-128"/>
+              <a:ea typeface="HGS創英角ｺﾞｼｯｸUB" panose="020B0900000000000000" pitchFamily="50" charset="-128"/>
+            </a:endParaRPr>
+          </a:p>
+          <a:p>
+            <a:r>
+              <a:rPr lang="ja-JP" altLang="en-US" sz="2400" dirty="0">
+                <a:solidFill>
+                  <a:srgbClr val="FF0000"/>
+                </a:solidFill>
+                <a:latin typeface="HGS創英角ｺﾞｼｯｸUB" panose="020B0900000000000000" pitchFamily="50" charset="-128"/>
+                <a:ea typeface="HGS創英角ｺﾞｼｯｸUB" panose="020B0900000000000000" pitchFamily="50" charset="-128"/>
+              </a:rPr>
+              <a:t>■心がけてほしいこと</a:t>
+            </a:r>
+            <a:endParaRPr lang="en-US" altLang="ja-JP" sz="2400" dirty="0">
+              <a:solidFill>
+                <a:srgbClr val="FF0000"/>
+              </a:solidFill>
+              <a:latin typeface="HGS創英角ｺﾞｼｯｸUB" panose="020B0900000000000000" pitchFamily="50" charset="-128"/>
+              <a:ea typeface="HGS創英角ｺﾞｼｯｸUB" panose="020B0900000000000000" pitchFamily="50" charset="-128"/>
+            </a:endParaRPr>
+          </a:p>
+          <a:p>
+            <a:r>
+              <a:rPr lang="ja-JP" altLang="en-US" sz="2400" dirty="0">
+                <a:latin typeface="HGS創英角ｺﾞｼｯｸUB" panose="020B0900000000000000" pitchFamily="50" charset="-128"/>
+                <a:ea typeface="HGS創英角ｺﾞｼｯｸUB" panose="020B0900000000000000" pitchFamily="50" charset="-128"/>
+              </a:rPr>
+              <a:t>・休まない</a:t>
+            </a:r>
+            <a:endParaRPr lang="en-US" altLang="ja-JP" sz="2400" dirty="0">
+              <a:latin typeface="HGS創英角ｺﾞｼｯｸUB" panose="020B0900000000000000" pitchFamily="50" charset="-128"/>
+              <a:ea typeface="HGS創英角ｺﾞｼｯｸUB" panose="020B0900000000000000" pitchFamily="50" charset="-128"/>
+            </a:endParaRPr>
+          </a:p>
+          <a:p>
+            <a:r>
+              <a:rPr lang="ja-JP" altLang="en-US" sz="2400" dirty="0">
+                <a:latin typeface="HGS創英角ｺﾞｼｯｸUB" panose="020B0900000000000000" pitchFamily="50" charset="-128"/>
+                <a:ea typeface="HGS創英角ｺﾞｼｯｸUB" panose="020B0900000000000000" pitchFamily="50" charset="-128"/>
+              </a:rPr>
+              <a:t>・友達を作る</a:t>
+            </a:r>
+            <a:endParaRPr lang="en-US" altLang="ja-JP" sz="2400" dirty="0">
+              <a:latin typeface="HGS創英角ｺﾞｼｯｸUB" panose="020B0900000000000000" pitchFamily="50" charset="-128"/>
+              <a:ea typeface="HGS創英角ｺﾞｼｯｸUB" panose="020B0900000000000000" pitchFamily="50" charset="-128"/>
+            </a:endParaRPr>
+          </a:p>
+          <a:p>
+            <a:r>
+              <a:rPr lang="ja-JP" altLang="en-US" sz="2400" dirty="0">
+                <a:latin typeface="HGS創英角ｺﾞｼｯｸUB" panose="020B0900000000000000" pitchFamily="50" charset="-128"/>
+                <a:ea typeface="HGS創英角ｺﾞｼｯｸUB" panose="020B0900000000000000" pitchFamily="50" charset="-128"/>
+              </a:rPr>
+              <a:t>・毎日残る</a:t>
+            </a:r>
+            <a:endParaRPr lang="en-US" altLang="ja-JP" sz="2400" dirty="0">
+              <a:latin typeface="HGS創英角ｺﾞｼｯｸUB" panose="020B0900000000000000" pitchFamily="50" charset="-128"/>
+              <a:ea typeface="HGS創英角ｺﾞｼｯｸUB" panose="020B0900000000000000" pitchFamily="50" charset="-128"/>
+            </a:endParaRPr>
+          </a:p>
+          <a:p>
+            <a:r>
+              <a:rPr lang="ja-JP" altLang="en-US" sz="2400" dirty="0">
+                <a:latin typeface="HGS創英角ｺﾞｼｯｸUB" panose="020B0900000000000000" pitchFamily="50" charset="-128"/>
+                <a:ea typeface="HGS創英角ｺﾞｼｯｸUB" panose="020B0900000000000000" pitchFamily="50" charset="-128"/>
+              </a:rPr>
+              <a:t>・イベントに参加する</a:t>
+            </a:r>
+            <a:endParaRPr lang="en-US" altLang="ja-JP" sz="2400" dirty="0">
+              <a:latin typeface="HGS創英角ｺﾞｼｯｸUB" panose="020B0900000000000000" pitchFamily="50" charset="-128"/>
+              <a:ea typeface="HGS創英角ｺﾞｼｯｸUB" panose="020B0900000000000000" pitchFamily="50" charset="-128"/>
+            </a:endParaRPr>
+          </a:p>
+          <a:p>
+            <a:r>
+              <a:rPr lang="ja-JP" altLang="en-US" sz="2400" dirty="0">
+                <a:latin typeface="HGS創英角ｺﾞｼｯｸUB" panose="020B0900000000000000" pitchFamily="50" charset="-128"/>
+                <a:ea typeface="HGS創英角ｺﾞｼｯｸUB" panose="020B0900000000000000" pitchFamily="50" charset="-128"/>
+              </a:rPr>
+              <a:t>・就職活動時期</a:t>
             </a:r>
             <a:endParaRPr lang="en-US" altLang="ja-JP" sz="2400" dirty="0">
               <a:latin typeface="HGS創英角ｺﾞｼｯｸUB" panose="020B0900000000000000" pitchFamily="50" charset="-128"/>
@@ -8264,7 +8219,7 @@
         <p:spPr>
           <a:xfrm>
             <a:off x="567542" y="491954"/>
-            <a:ext cx="1832553" cy="584775"/>
+            <a:ext cx="2656496" cy="584775"/>
           </a:xfrm>
           <a:prstGeom prst="rect">
             <a:avLst/>
@@ -8282,7 +8237,7 @@
                 <a:latin typeface="HGS創英角ｺﾞｼｯｸUB" panose="020B0900000000000000" pitchFamily="50" charset="-128"/>
                 <a:ea typeface="HGS創英角ｺﾞｼｯｸUB" panose="020B0900000000000000" pitchFamily="50" charset="-128"/>
               </a:rPr>
-              <a:t>さいごに</a:t>
+              <a:t>休まないこと</a:t>
             </a:r>
             <a:endParaRPr kumimoji="1" lang="en-US" altLang="ja-JP" sz="3200" b="1" u="sng" dirty="0">
               <a:latin typeface="HGS創英角ｺﾞｼｯｸUB" panose="020B0900000000000000" pitchFamily="50" charset="-128"/>
@@ -8306,7 +8261,7 @@
         <p:spPr>
           <a:xfrm>
             <a:off x="567542" y="1216429"/>
-            <a:ext cx="10649069" cy="3046988"/>
+            <a:ext cx="7879080" cy="4524315"/>
           </a:xfrm>
           <a:prstGeom prst="rect">
             <a:avLst/>
@@ -8324,119 +8279,135 @@
                 <a:latin typeface="HGS創英角ｺﾞｼｯｸUB" panose="020B0900000000000000" pitchFamily="50" charset="-128"/>
                 <a:ea typeface="HGS創英角ｺﾞｼｯｸUB" panose="020B0900000000000000" pitchFamily="50" charset="-128"/>
               </a:rPr>
-              <a:t>明日の</a:t>
-            </a:r>
-            <a:r>
-              <a:rPr lang="en-US" altLang="ja-JP" sz="2400" dirty="0">
-                <a:latin typeface="HGS創英角ｺﾞｼｯｸUB" panose="020B0900000000000000" pitchFamily="50" charset="-128"/>
-                <a:ea typeface="HGS創英角ｺﾞｼｯｸUB" panose="020B0900000000000000" pitchFamily="50" charset="-128"/>
-              </a:rPr>
-              <a:t>15</a:t>
-            </a:r>
-            <a:r>
-              <a:rPr lang="ja-JP" altLang="en-US" sz="2400" dirty="0">
-                <a:latin typeface="HGS創英角ｺﾞｼｯｸUB" panose="020B0900000000000000" pitchFamily="50" charset="-128"/>
-                <a:ea typeface="HGS創英角ｺﾞｼｯｸUB" panose="020B0900000000000000" pitchFamily="50" charset="-128"/>
-              </a:rPr>
-              <a:t>：</a:t>
-            </a:r>
-            <a:r>
-              <a:rPr lang="en-US" altLang="ja-JP" sz="2400" dirty="0">
-                <a:latin typeface="HGS創英角ｺﾞｼｯｸUB" panose="020B0900000000000000" pitchFamily="50" charset="-128"/>
-                <a:ea typeface="HGS創英角ｺﾞｼｯｸUB" panose="020B0900000000000000" pitchFamily="50" charset="-128"/>
-              </a:rPr>
-              <a:t>30</a:t>
-            </a:r>
-            <a:r>
-              <a:rPr lang="ja-JP" altLang="en-US" sz="2400" dirty="0">
-                <a:latin typeface="HGS創英角ｺﾞｼｯｸUB" panose="020B0900000000000000" pitchFamily="50" charset="-128"/>
-                <a:ea typeface="HGS創英角ｺﾞｼｯｸUB" panose="020B0900000000000000" pitchFamily="50" charset="-128"/>
-              </a:rPr>
-              <a:t>より、</a:t>
-            </a:r>
-            <a:endParaRPr lang="en-US" altLang="ja-JP" sz="2400" dirty="0">
-              <a:latin typeface="HGS創英角ｺﾞｼｯｸUB" panose="020B0900000000000000" pitchFamily="50" charset="-128"/>
-              <a:ea typeface="HGS創英角ｺﾞｼｯｸUB" panose="020B0900000000000000" pitchFamily="50" charset="-128"/>
-            </a:endParaRPr>
-          </a:p>
-          <a:p>
-            <a:r>
-              <a:rPr lang="ja-JP" altLang="en-US" sz="2400" dirty="0">
-                <a:latin typeface="HGS創英角ｺﾞｼｯｸUB" panose="020B0900000000000000" pitchFamily="50" charset="-128"/>
-                <a:ea typeface="HGS創英角ｺﾞｼｯｸUB" panose="020B0900000000000000" pitchFamily="50" charset="-128"/>
-              </a:rPr>
-              <a:t>福岡のゲーム会社である㈱サイバーコネクトツー様の企業講演があります。</a:t>
-            </a:r>
-            <a:endParaRPr lang="en-US" altLang="ja-JP" sz="2400" dirty="0">
-              <a:latin typeface="HGS創英角ｺﾞｼｯｸUB" panose="020B0900000000000000" pitchFamily="50" charset="-128"/>
-              <a:ea typeface="HGS創英角ｺﾞｼｯｸUB" panose="020B0900000000000000" pitchFamily="50" charset="-128"/>
-            </a:endParaRPr>
-          </a:p>
-          <a:p>
-            <a:r>
-              <a:rPr lang="ja-JP" altLang="en-US" sz="2400" dirty="0">
-                <a:latin typeface="HGS創英角ｺﾞｼｯｸUB" panose="020B0900000000000000" pitchFamily="50" charset="-128"/>
-                <a:ea typeface="HGS創英角ｺﾞｼｯｸUB" panose="020B0900000000000000" pitchFamily="50" charset="-128"/>
-              </a:rPr>
-              <a:t>このように企業から直接講演をすることが今後も多くありますので、</a:t>
-            </a:r>
-            <a:endParaRPr lang="en-US" altLang="ja-JP" sz="2400" dirty="0">
-              <a:latin typeface="HGS創英角ｺﾞｼｯｸUB" panose="020B0900000000000000" pitchFamily="50" charset="-128"/>
-              <a:ea typeface="HGS創英角ｺﾞｼｯｸUB" panose="020B0900000000000000" pitchFamily="50" charset="-128"/>
-            </a:endParaRPr>
-          </a:p>
-          <a:p>
-            <a:r>
-              <a:rPr lang="ja-JP" altLang="en-US" sz="2400" dirty="0">
-                <a:latin typeface="HGS創英角ｺﾞｼｯｸUB" panose="020B0900000000000000" pitchFamily="50" charset="-128"/>
-                <a:ea typeface="HGS創英角ｺﾞｼｯｸUB" panose="020B0900000000000000" pitchFamily="50" charset="-128"/>
-              </a:rPr>
-              <a:t>積極的に参加し、モチベーションとしましょう。</a:t>
-            </a:r>
-            <a:endParaRPr lang="en-US" altLang="ja-JP" sz="2400" dirty="0">
-              <a:latin typeface="HGS創英角ｺﾞｼｯｸUB" panose="020B0900000000000000" pitchFamily="50" charset="-128"/>
-              <a:ea typeface="HGS創英角ｺﾞｼｯｸUB" panose="020B0900000000000000" pitchFamily="50" charset="-128"/>
-            </a:endParaRPr>
-          </a:p>
-          <a:p>
-            <a:endParaRPr lang="en-US" altLang="ja-JP" sz="2400" dirty="0">
-              <a:latin typeface="HGS創英角ｺﾞｼｯｸUB" panose="020B0900000000000000" pitchFamily="50" charset="-128"/>
-              <a:ea typeface="HGS創英角ｺﾞｼｯｸUB" panose="020B0900000000000000" pitchFamily="50" charset="-128"/>
-            </a:endParaRPr>
-          </a:p>
-          <a:p>
-            <a:r>
-              <a:rPr lang="ja-JP" altLang="en-US" sz="2400" dirty="0">
-                <a:latin typeface="HGS創英角ｺﾞｼｯｸUB" panose="020B0900000000000000" pitchFamily="50" charset="-128"/>
-                <a:ea typeface="HGS創英角ｺﾞｼｯｸUB" panose="020B0900000000000000" pitchFamily="50" charset="-128"/>
-              </a:rPr>
-              <a:t>また、企業講演に参加する前日には、</a:t>
-            </a:r>
-            <a:endParaRPr lang="en-US" altLang="ja-JP" sz="2400" dirty="0">
-              <a:latin typeface="HGS創英角ｺﾞｼｯｸUB" panose="020B0900000000000000" pitchFamily="50" charset="-128"/>
-              <a:ea typeface="HGS創英角ｺﾞｼｯｸUB" panose="020B0900000000000000" pitchFamily="50" charset="-128"/>
-            </a:endParaRPr>
-          </a:p>
-          <a:p>
-            <a:r>
-              <a:rPr lang="ja-JP" altLang="en-US" sz="2400" dirty="0">
-                <a:latin typeface="HGS創英角ｺﾞｼｯｸUB" panose="020B0900000000000000" pitchFamily="50" charset="-128"/>
-                <a:ea typeface="HGS創英角ｺﾞｼｯｸUB" panose="020B0900000000000000" pitchFamily="50" charset="-128"/>
-              </a:rPr>
-              <a:t>企業のホームページなどで、どのような企業なのかを、</a:t>
-            </a:r>
-            <a:endParaRPr lang="en-US" altLang="ja-JP" sz="2400" dirty="0">
-              <a:latin typeface="HGS創英角ｺﾞｼｯｸUB" panose="020B0900000000000000" pitchFamily="50" charset="-128"/>
-              <a:ea typeface="HGS創英角ｺﾞｼｯｸUB" panose="020B0900000000000000" pitchFamily="50" charset="-128"/>
-            </a:endParaRPr>
-          </a:p>
-          <a:p>
-            <a:r>
-              <a:rPr lang="ja-JP" altLang="en-US" sz="2400" dirty="0">
-                <a:latin typeface="HGS創英角ｺﾞｼｯｸUB" panose="020B0900000000000000" pitchFamily="50" charset="-128"/>
-                <a:ea typeface="HGS創英角ｺﾞｼｯｸUB" panose="020B0900000000000000" pitchFamily="50" charset="-128"/>
-              </a:rPr>
-              <a:t>必ず下調べしましょう。</a:t>
+              <a:t>専門学校の授業は、</a:t>
+            </a:r>
+            <a:endParaRPr lang="en-US" altLang="ja-JP" sz="2400" dirty="0">
+              <a:latin typeface="HGS創英角ｺﾞｼｯｸUB" panose="020B0900000000000000" pitchFamily="50" charset="-128"/>
+              <a:ea typeface="HGS創英角ｺﾞｼｯｸUB" panose="020B0900000000000000" pitchFamily="50" charset="-128"/>
+            </a:endParaRPr>
+          </a:p>
+          <a:p>
+            <a:r>
+              <a:rPr lang="ja-JP" altLang="en-US" sz="2400" dirty="0">
+                <a:latin typeface="HGS創英角ｺﾞｼｯｸUB" panose="020B0900000000000000" pitchFamily="50" charset="-128"/>
+                <a:ea typeface="HGS創英角ｺﾞｼｯｸUB" panose="020B0900000000000000" pitchFamily="50" charset="-128"/>
+              </a:rPr>
+              <a:t>短期間に一気にまとめて知識と技術を叩き込みます。</a:t>
+            </a:r>
+            <a:endParaRPr lang="en-US" altLang="ja-JP" sz="2400" dirty="0">
+              <a:latin typeface="HGS創英角ｺﾞｼｯｸUB" panose="020B0900000000000000" pitchFamily="50" charset="-128"/>
+              <a:ea typeface="HGS創英角ｺﾞｼｯｸUB" panose="020B0900000000000000" pitchFamily="50" charset="-128"/>
+            </a:endParaRPr>
+          </a:p>
+          <a:p>
+            <a:endParaRPr lang="en-US" altLang="ja-JP" sz="2400" dirty="0">
+              <a:latin typeface="HGS創英角ｺﾞｼｯｸUB" panose="020B0900000000000000" pitchFamily="50" charset="-128"/>
+              <a:ea typeface="HGS創英角ｺﾞｼｯｸUB" panose="020B0900000000000000" pitchFamily="50" charset="-128"/>
+            </a:endParaRPr>
+          </a:p>
+          <a:p>
+            <a:r>
+              <a:rPr lang="ja-JP" altLang="en-US" sz="2400" dirty="0">
+                <a:latin typeface="HGS創英角ｺﾞｼｯｸUB" panose="020B0900000000000000" pitchFamily="50" charset="-128"/>
+                <a:ea typeface="HGS創英角ｺﾞｼｯｸUB" panose="020B0900000000000000" pitchFamily="50" charset="-128"/>
+              </a:rPr>
+              <a:t>１日休むだけで、すぐに取り残されてしまいますので、</a:t>
+            </a:r>
+            <a:endParaRPr lang="en-US" altLang="ja-JP" sz="2400" dirty="0">
+              <a:latin typeface="HGS創英角ｺﾞｼｯｸUB" panose="020B0900000000000000" pitchFamily="50" charset="-128"/>
+              <a:ea typeface="HGS創英角ｺﾞｼｯｸUB" panose="020B0900000000000000" pitchFamily="50" charset="-128"/>
+            </a:endParaRPr>
+          </a:p>
+          <a:p>
+            <a:r>
+              <a:rPr lang="ja-JP" altLang="en-US" sz="2400" dirty="0">
+                <a:latin typeface="HGS創英角ｺﾞｼｯｸUB" panose="020B0900000000000000" pitchFamily="50" charset="-128"/>
+                <a:ea typeface="HGS創英角ｺﾞｼｯｸUB" panose="020B0900000000000000" pitchFamily="50" charset="-128"/>
+              </a:rPr>
+              <a:t>学校は休まないようにしましょう。</a:t>
+            </a:r>
+            <a:endParaRPr lang="en-US" altLang="ja-JP" sz="2400" dirty="0">
+              <a:latin typeface="HGS創英角ｺﾞｼｯｸUB" panose="020B0900000000000000" pitchFamily="50" charset="-128"/>
+              <a:ea typeface="HGS創英角ｺﾞｼｯｸUB" panose="020B0900000000000000" pitchFamily="50" charset="-128"/>
+            </a:endParaRPr>
+          </a:p>
+          <a:p>
+            <a:endParaRPr lang="en-US" altLang="ja-JP" sz="2400" dirty="0">
+              <a:latin typeface="HGS創英角ｺﾞｼｯｸUB" panose="020B0900000000000000" pitchFamily="50" charset="-128"/>
+              <a:ea typeface="HGS創英角ｺﾞｼｯｸUB" panose="020B0900000000000000" pitchFamily="50" charset="-128"/>
+            </a:endParaRPr>
+          </a:p>
+          <a:p>
+            <a:r>
+              <a:rPr lang="ja-JP" altLang="en-US" sz="2400" dirty="0">
+                <a:solidFill>
+                  <a:srgbClr val="FF0000"/>
+                </a:solidFill>
+                <a:latin typeface="HGS創英角ｺﾞｼｯｸUB" panose="020B0900000000000000" pitchFamily="50" charset="-128"/>
+                <a:ea typeface="HGS創英角ｺﾞｼｯｸUB" panose="020B0900000000000000" pitchFamily="50" charset="-128"/>
+              </a:rPr>
+              <a:t>■休む時の例</a:t>
+            </a:r>
+            <a:endParaRPr lang="en-US" altLang="ja-JP" sz="2400" dirty="0">
+              <a:solidFill>
+                <a:srgbClr val="FF0000"/>
+              </a:solidFill>
+              <a:latin typeface="HGS創英角ｺﾞｼｯｸUB" panose="020B0900000000000000" pitchFamily="50" charset="-128"/>
+              <a:ea typeface="HGS創英角ｺﾞｼｯｸUB" panose="020B0900000000000000" pitchFamily="50" charset="-128"/>
+            </a:endParaRPr>
+          </a:p>
+          <a:p>
+            <a:r>
+              <a:rPr lang="ja-JP" altLang="en-US" sz="2400" dirty="0">
+                <a:latin typeface="HGS創英角ｺﾞｼｯｸUB" panose="020B0900000000000000" pitchFamily="50" charset="-128"/>
+                <a:ea typeface="HGS創英角ｺﾞｼｯｸUB" panose="020B0900000000000000" pitchFamily="50" charset="-128"/>
+              </a:rPr>
+              <a:t>・感染症</a:t>
+            </a:r>
+            <a:endParaRPr lang="en-US" altLang="ja-JP" sz="2400" dirty="0">
+              <a:latin typeface="HGS創英角ｺﾞｼｯｸUB" panose="020B0900000000000000" pitchFamily="50" charset="-128"/>
+              <a:ea typeface="HGS創英角ｺﾞｼｯｸUB" panose="020B0900000000000000" pitchFamily="50" charset="-128"/>
+            </a:endParaRPr>
+          </a:p>
+          <a:p>
+            <a:r>
+              <a:rPr lang="ja-JP" altLang="en-US" sz="2400" dirty="0">
+                <a:latin typeface="HGS創英角ｺﾞｼｯｸUB" panose="020B0900000000000000" pitchFamily="50" charset="-128"/>
+                <a:ea typeface="HGS創英角ｺﾞｼｯｸUB" panose="020B0900000000000000" pitchFamily="50" charset="-128"/>
+              </a:rPr>
+              <a:t>・ひどい咳やくしゃみでうるさい</a:t>
+            </a:r>
+            <a:endParaRPr lang="en-US" altLang="ja-JP" sz="2400" dirty="0">
+              <a:latin typeface="HGS創英角ｺﾞｼｯｸUB" panose="020B0900000000000000" pitchFamily="50" charset="-128"/>
+              <a:ea typeface="HGS創英角ｺﾞｼｯｸUB" panose="020B0900000000000000" pitchFamily="50" charset="-128"/>
+            </a:endParaRPr>
+          </a:p>
+          <a:p>
+            <a:r>
+              <a:rPr lang="ja-JP" altLang="en-US" sz="2400" dirty="0">
+                <a:latin typeface="HGS創英角ｺﾞｼｯｸUB" panose="020B0900000000000000" pitchFamily="50" charset="-128"/>
+                <a:ea typeface="HGS創英角ｺﾞｼｯｸUB" panose="020B0900000000000000" pitchFamily="50" charset="-128"/>
+              </a:rPr>
+              <a:t>など</a:t>
+            </a:r>
+            <a:endParaRPr lang="en-US" altLang="ja-JP" sz="2400" dirty="0">
+              <a:latin typeface="HGS創英角ｺﾞｼｯｸUB" panose="020B0900000000000000" pitchFamily="50" charset="-128"/>
+              <a:ea typeface="HGS創英角ｺﾞｼｯｸUB" panose="020B0900000000000000" pitchFamily="50" charset="-128"/>
+            </a:endParaRPr>
+          </a:p>
+          <a:p>
+            <a:endParaRPr lang="en-US" altLang="ja-JP" sz="2400" dirty="0">
+              <a:latin typeface="HGS創英角ｺﾞｼｯｸUB" panose="020B0900000000000000" pitchFamily="50" charset="-128"/>
+              <a:ea typeface="HGS創英角ｺﾞｼｯｸUB" panose="020B0900000000000000" pitchFamily="50" charset="-128"/>
+            </a:endParaRPr>
+          </a:p>
+          <a:p>
+            <a:r>
+              <a:rPr lang="ja-JP" altLang="en-US" sz="2400" dirty="0">
+                <a:latin typeface="HGS創英角ｺﾞｼｯｸUB" panose="020B0900000000000000" pitchFamily="50" charset="-128"/>
+                <a:ea typeface="HGS創英角ｺﾞｼｯｸUB" panose="020B0900000000000000" pitchFamily="50" charset="-128"/>
+              </a:rPr>
+              <a:t>周りに迷惑がかかる場合は休むことを考慮しましょう</a:t>
             </a:r>
             <a:endParaRPr lang="en-US" altLang="ja-JP" sz="2400" dirty="0">
               <a:latin typeface="HGS創英角ｺﾞｼｯｸUB" panose="020B0900000000000000" pitchFamily="50" charset="-128"/>
@@ -8448,7 +8419,705 @@
     </p:spTree>
     <p:extLst>
       <p:ext uri="{BB962C8B-B14F-4D97-AF65-F5344CB8AC3E}">
-        <p14:creationId xmlns:p14="http://schemas.microsoft.com/office/powerpoint/2010/main" val="3042183115"/>
+        <p14:creationId xmlns:p14="http://schemas.microsoft.com/office/powerpoint/2010/main" val="473406200"/>
+      </p:ext>
+    </p:extLst>
+  </p:cSld>
+  <p:clrMapOvr>
+    <a:masterClrMapping/>
+  </p:clrMapOvr>
+</p:sld>
+</file>
+
+<file path=ppt/slides/slide27.xml><?xml version="1.0" encoding="utf-8"?>
+<p:sld xmlns:a="http://schemas.openxmlformats.org/drawingml/2006/main" xmlns:r="http://schemas.openxmlformats.org/officeDocument/2006/relationships" xmlns:p="http://schemas.openxmlformats.org/presentationml/2006/main">
+  <p:cSld>
+    <p:spTree>
+      <p:nvGrpSpPr>
+        <p:cNvPr id="1" name=""/>
+        <p:cNvGrpSpPr/>
+        <p:nvPr/>
+      </p:nvGrpSpPr>
+      <p:grpSpPr>
+        <a:xfrm>
+          <a:off x="0" y="0"/>
+          <a:ext cx="0" cy="0"/>
+          <a:chOff x="0" y="0"/>
+          <a:chExt cx="0" cy="0"/>
+        </a:xfrm>
+      </p:grpSpPr>
+      <p:sp>
+        <p:nvSpPr>
+          <p:cNvPr id="4" name="テキスト ボックス 3">
+            <a:extLst>
+              <a:ext uri="{FF2B5EF4-FFF2-40B4-BE49-F238E27FC236}">
+                <a16:creationId xmlns:a16="http://schemas.microsoft.com/office/drawing/2014/main" id="{5A13BF46-B8C5-48AA-8308-C9ECFF431A18}"/>
+              </a:ext>
+            </a:extLst>
+          </p:cNvPr>
+          <p:cNvSpPr txBox="1"/>
+          <p:nvPr/>
+        </p:nvSpPr>
+        <p:spPr>
+          <a:xfrm>
+            <a:off x="567542" y="491954"/>
+            <a:ext cx="3068469" cy="584775"/>
+          </a:xfrm>
+          <a:prstGeom prst="rect">
+            <a:avLst/>
+          </a:prstGeom>
+          <a:noFill/>
+        </p:spPr>
+        <p:txBody>
+          <a:bodyPr wrap="none" rtlCol="0">
+            <a:spAutoFit/>
+          </a:bodyPr>
+          <a:lstStyle/>
+          <a:p>
+            <a:r>
+              <a:rPr lang="ja-JP" altLang="en-US" sz="3200" b="1" u="sng" dirty="0">
+                <a:latin typeface="HGS創英角ｺﾞｼｯｸUB" panose="020B0900000000000000" pitchFamily="50" charset="-128"/>
+                <a:ea typeface="HGS創英角ｺﾞｼｯｸUB" panose="020B0900000000000000" pitchFamily="50" charset="-128"/>
+              </a:rPr>
+              <a:t>友達をつくろう</a:t>
+            </a:r>
+            <a:endParaRPr kumimoji="1" lang="en-US" altLang="ja-JP" sz="3200" b="1" u="sng" dirty="0">
+              <a:latin typeface="HGS創英角ｺﾞｼｯｸUB" panose="020B0900000000000000" pitchFamily="50" charset="-128"/>
+              <a:ea typeface="HGS創英角ｺﾞｼｯｸUB" panose="020B0900000000000000" pitchFamily="50" charset="-128"/>
+            </a:endParaRPr>
+          </a:p>
+        </p:txBody>
+      </p:sp>
+      <p:sp>
+        <p:nvSpPr>
+          <p:cNvPr id="6" name="テキスト ボックス 5">
+            <a:extLst>
+              <a:ext uri="{FF2B5EF4-FFF2-40B4-BE49-F238E27FC236}">
+                <a16:creationId xmlns:a16="http://schemas.microsoft.com/office/drawing/2014/main" id="{55830AD6-028B-4C4E-80BF-B70DFC1C3A46}"/>
+              </a:ext>
+            </a:extLst>
+          </p:cNvPr>
+          <p:cNvSpPr txBox="1"/>
+          <p:nvPr/>
+        </p:nvSpPr>
+        <p:spPr>
+          <a:xfrm>
+            <a:off x="567542" y="1216429"/>
+            <a:ext cx="8802410" cy="2308324"/>
+          </a:xfrm>
+          <a:prstGeom prst="rect">
+            <a:avLst/>
+          </a:prstGeom>
+          <a:noFill/>
+        </p:spPr>
+        <p:txBody>
+          <a:bodyPr wrap="none" rtlCol="0">
+            <a:spAutoFit/>
+          </a:bodyPr>
+          <a:lstStyle/>
+          <a:p>
+            <a:r>
+              <a:rPr lang="ja-JP" altLang="en-US" sz="2400" dirty="0">
+                <a:latin typeface="HGS創英角ｺﾞｼｯｸUB" panose="020B0900000000000000" pitchFamily="50" charset="-128"/>
+                <a:ea typeface="HGS創英角ｺﾞｼｯｸUB" panose="020B0900000000000000" pitchFamily="50" charset="-128"/>
+              </a:rPr>
+              <a:t>勉強も就活も一人で活動するよりは、</a:t>
+            </a:r>
+            <a:endParaRPr lang="en-US" altLang="ja-JP" sz="2400" dirty="0">
+              <a:latin typeface="HGS創英角ｺﾞｼｯｸUB" panose="020B0900000000000000" pitchFamily="50" charset="-128"/>
+              <a:ea typeface="HGS創英角ｺﾞｼｯｸUB" panose="020B0900000000000000" pitchFamily="50" charset="-128"/>
+            </a:endParaRPr>
+          </a:p>
+          <a:p>
+            <a:r>
+              <a:rPr lang="ja-JP" altLang="en-US" sz="2400" dirty="0">
+                <a:latin typeface="HGS創英角ｺﾞｼｯｸUB" panose="020B0900000000000000" pitchFamily="50" charset="-128"/>
+                <a:ea typeface="HGS創英角ｺﾞｼｯｸUB" panose="020B0900000000000000" pitchFamily="50" charset="-128"/>
+              </a:rPr>
+              <a:t>複数人で協力したほうが良い成果が出ます。</a:t>
+            </a:r>
+            <a:endParaRPr lang="en-US" altLang="ja-JP" sz="2400" dirty="0">
+              <a:latin typeface="HGS創英角ｺﾞｼｯｸUB" panose="020B0900000000000000" pitchFamily="50" charset="-128"/>
+              <a:ea typeface="HGS創英角ｺﾞｼｯｸUB" panose="020B0900000000000000" pitchFamily="50" charset="-128"/>
+            </a:endParaRPr>
+          </a:p>
+          <a:p>
+            <a:endParaRPr lang="en-US" altLang="ja-JP" sz="2400" dirty="0">
+              <a:latin typeface="HGS創英角ｺﾞｼｯｸUB" panose="020B0900000000000000" pitchFamily="50" charset="-128"/>
+              <a:ea typeface="HGS創英角ｺﾞｼｯｸUB" panose="020B0900000000000000" pitchFamily="50" charset="-128"/>
+            </a:endParaRPr>
+          </a:p>
+          <a:p>
+            <a:r>
+              <a:rPr lang="ja-JP" altLang="en-US" sz="2400" dirty="0">
+                <a:latin typeface="HGS創英角ｺﾞｼｯｸUB" panose="020B0900000000000000" pitchFamily="50" charset="-128"/>
+                <a:ea typeface="HGS創英角ｺﾞｼｯｸUB" panose="020B0900000000000000" pitchFamily="50" charset="-128"/>
+              </a:rPr>
+              <a:t>友達を作って、困ったときは相談しあえるようにしましょう。</a:t>
+            </a:r>
+            <a:endParaRPr lang="en-US" altLang="ja-JP" sz="2400" dirty="0">
+              <a:latin typeface="HGS創英角ｺﾞｼｯｸUB" panose="020B0900000000000000" pitchFamily="50" charset="-128"/>
+              <a:ea typeface="HGS創英角ｺﾞｼｯｸUB" panose="020B0900000000000000" pitchFamily="50" charset="-128"/>
+            </a:endParaRPr>
+          </a:p>
+          <a:p>
+            <a:endParaRPr lang="en-US" altLang="ja-JP" sz="2400" dirty="0">
+              <a:latin typeface="HGS創英角ｺﾞｼｯｸUB" panose="020B0900000000000000" pitchFamily="50" charset="-128"/>
+              <a:ea typeface="HGS創英角ｺﾞｼｯｸUB" panose="020B0900000000000000" pitchFamily="50" charset="-128"/>
+            </a:endParaRPr>
+          </a:p>
+          <a:p>
+            <a:r>
+              <a:rPr lang="en-US" altLang="ja-JP" sz="2400" dirty="0">
+                <a:latin typeface="HGS創英角ｺﾞｼｯｸUB" panose="020B0900000000000000" pitchFamily="50" charset="-128"/>
+                <a:ea typeface="HGS創英角ｺﾞｼｯｸUB" panose="020B0900000000000000" pitchFamily="50" charset="-128"/>
+              </a:rPr>
+              <a:t>※</a:t>
+            </a:r>
+            <a:r>
+              <a:rPr lang="ja-JP" altLang="en-US" sz="2400" dirty="0">
+                <a:latin typeface="HGS創英角ｺﾞｼｯｸUB" panose="020B0900000000000000" pitchFamily="50" charset="-128"/>
+                <a:ea typeface="HGS創英角ｺﾞｼｯｸUB" panose="020B0900000000000000" pitchFamily="50" charset="-128"/>
+              </a:rPr>
+              <a:t>もちろん教職員を頼ってもらっても</a:t>
+            </a:r>
+            <a:r>
+              <a:rPr lang="en-US" altLang="ja-JP" sz="2400" dirty="0">
+                <a:latin typeface="HGS創英角ｺﾞｼｯｸUB" panose="020B0900000000000000" pitchFamily="50" charset="-128"/>
+                <a:ea typeface="HGS創英角ｺﾞｼｯｸUB" panose="020B0900000000000000" pitchFamily="50" charset="-128"/>
+              </a:rPr>
+              <a:t>OK</a:t>
+            </a:r>
+            <a:r>
+              <a:rPr lang="ja-JP" altLang="en-US" sz="2400" dirty="0">
+                <a:latin typeface="HGS創英角ｺﾞｼｯｸUB" panose="020B0900000000000000" pitchFamily="50" charset="-128"/>
+                <a:ea typeface="HGS創英角ｺﾞｼｯｸUB" panose="020B0900000000000000" pitchFamily="50" charset="-128"/>
+              </a:rPr>
+              <a:t>です</a:t>
+            </a:r>
+            <a:endParaRPr lang="en-US" altLang="ja-JP" sz="2400" dirty="0">
+              <a:latin typeface="HGS創英角ｺﾞｼｯｸUB" panose="020B0900000000000000" pitchFamily="50" charset="-128"/>
+              <a:ea typeface="HGS創英角ｺﾞｼｯｸUB" panose="020B0900000000000000" pitchFamily="50" charset="-128"/>
+            </a:endParaRPr>
+          </a:p>
+        </p:txBody>
+      </p:sp>
+    </p:spTree>
+    <p:extLst>
+      <p:ext uri="{BB962C8B-B14F-4D97-AF65-F5344CB8AC3E}">
+        <p14:creationId xmlns:p14="http://schemas.microsoft.com/office/powerpoint/2010/main" val="1470804749"/>
+      </p:ext>
+    </p:extLst>
+  </p:cSld>
+  <p:clrMapOvr>
+    <a:masterClrMapping/>
+  </p:clrMapOvr>
+</p:sld>
+</file>
+
+<file path=ppt/slides/slide28.xml><?xml version="1.0" encoding="utf-8"?>
+<p:sld xmlns:a="http://schemas.openxmlformats.org/drawingml/2006/main" xmlns:r="http://schemas.openxmlformats.org/officeDocument/2006/relationships" xmlns:p="http://schemas.openxmlformats.org/presentationml/2006/main">
+  <p:cSld>
+    <p:spTree>
+      <p:nvGrpSpPr>
+        <p:cNvPr id="1" name=""/>
+        <p:cNvGrpSpPr/>
+        <p:nvPr/>
+      </p:nvGrpSpPr>
+      <p:grpSpPr>
+        <a:xfrm>
+          <a:off x="0" y="0"/>
+          <a:ext cx="0" cy="0"/>
+          <a:chOff x="0" y="0"/>
+          <a:chExt cx="0" cy="0"/>
+        </a:xfrm>
+      </p:grpSpPr>
+      <p:sp>
+        <p:nvSpPr>
+          <p:cNvPr id="4" name="テキスト ボックス 3">
+            <a:extLst>
+              <a:ext uri="{FF2B5EF4-FFF2-40B4-BE49-F238E27FC236}">
+                <a16:creationId xmlns:a16="http://schemas.microsoft.com/office/drawing/2014/main" id="{5A13BF46-B8C5-48AA-8308-C9ECFF431A18}"/>
+              </a:ext>
+            </a:extLst>
+          </p:cNvPr>
+          <p:cNvSpPr txBox="1"/>
+          <p:nvPr/>
+        </p:nvSpPr>
+        <p:spPr>
+          <a:xfrm>
+            <a:off x="567542" y="491954"/>
+            <a:ext cx="2244525" cy="584775"/>
+          </a:xfrm>
+          <a:prstGeom prst="rect">
+            <a:avLst/>
+          </a:prstGeom>
+          <a:noFill/>
+        </p:spPr>
+        <p:txBody>
+          <a:bodyPr wrap="none" rtlCol="0">
+            <a:spAutoFit/>
+          </a:bodyPr>
+          <a:lstStyle/>
+          <a:p>
+            <a:r>
+              <a:rPr lang="ja-JP" altLang="en-US" sz="3200" b="1" u="sng" dirty="0">
+                <a:latin typeface="HGS創英角ｺﾞｼｯｸUB" panose="020B0900000000000000" pitchFamily="50" charset="-128"/>
+                <a:ea typeface="HGS創英角ｺﾞｼｯｸUB" panose="020B0900000000000000" pitchFamily="50" charset="-128"/>
+              </a:rPr>
+              <a:t>毎日残ろう</a:t>
+            </a:r>
+            <a:endParaRPr kumimoji="1" lang="en-US" altLang="ja-JP" sz="3200" b="1" u="sng" dirty="0">
+              <a:latin typeface="HGS創英角ｺﾞｼｯｸUB" panose="020B0900000000000000" pitchFamily="50" charset="-128"/>
+              <a:ea typeface="HGS創英角ｺﾞｼｯｸUB" panose="020B0900000000000000" pitchFamily="50" charset="-128"/>
+            </a:endParaRPr>
+          </a:p>
+        </p:txBody>
+      </p:sp>
+      <p:sp>
+        <p:nvSpPr>
+          <p:cNvPr id="6" name="テキスト ボックス 5">
+            <a:extLst>
+              <a:ext uri="{FF2B5EF4-FFF2-40B4-BE49-F238E27FC236}">
+                <a16:creationId xmlns:a16="http://schemas.microsoft.com/office/drawing/2014/main" id="{55830AD6-028B-4C4E-80BF-B70DFC1C3A46}"/>
+              </a:ext>
+            </a:extLst>
+          </p:cNvPr>
+          <p:cNvSpPr txBox="1"/>
+          <p:nvPr/>
+        </p:nvSpPr>
+        <p:spPr>
+          <a:xfrm>
+            <a:off x="567542" y="1216429"/>
+            <a:ext cx="7959230" cy="2308324"/>
+          </a:xfrm>
+          <a:prstGeom prst="rect">
+            <a:avLst/>
+          </a:prstGeom>
+          <a:noFill/>
+        </p:spPr>
+        <p:txBody>
+          <a:bodyPr wrap="none" rtlCol="0">
+            <a:spAutoFit/>
+          </a:bodyPr>
+          <a:lstStyle/>
+          <a:p>
+            <a:r>
+              <a:rPr lang="ja-JP" altLang="en-US" sz="2400" dirty="0">
+                <a:latin typeface="HGS創英角ｺﾞｼｯｸUB" panose="020B0900000000000000" pitchFamily="50" charset="-128"/>
+                <a:ea typeface="HGS創英角ｺﾞｼｯｸUB" panose="020B0900000000000000" pitchFamily="50" charset="-128"/>
+              </a:rPr>
+              <a:t>教室は</a:t>
+            </a:r>
+            <a:r>
+              <a:rPr lang="en-US" altLang="ja-JP" sz="2400" dirty="0">
+                <a:solidFill>
+                  <a:srgbClr val="FF0000"/>
+                </a:solidFill>
+                <a:latin typeface="HGS創英角ｺﾞｼｯｸUB" panose="020B0900000000000000" pitchFamily="50" charset="-128"/>
+                <a:ea typeface="HGS創英角ｺﾞｼｯｸUB" panose="020B0900000000000000" pitchFamily="50" charset="-128"/>
+              </a:rPr>
+              <a:t>17</a:t>
+            </a:r>
+            <a:r>
+              <a:rPr lang="ja-JP" altLang="en-US" sz="2400" dirty="0">
+                <a:solidFill>
+                  <a:srgbClr val="FF0000"/>
+                </a:solidFill>
+                <a:latin typeface="HGS創英角ｺﾞｼｯｸUB" panose="020B0900000000000000" pitchFamily="50" charset="-128"/>
+                <a:ea typeface="HGS創英角ｺﾞｼｯｸUB" panose="020B0900000000000000" pitchFamily="50" charset="-128"/>
+              </a:rPr>
+              <a:t>時まで</a:t>
+            </a:r>
+            <a:r>
+              <a:rPr lang="ja-JP" altLang="en-US" sz="2400" dirty="0">
+                <a:latin typeface="HGS創英角ｺﾞｼｯｸUB" panose="020B0900000000000000" pitchFamily="50" charset="-128"/>
+                <a:ea typeface="HGS創英角ｺﾞｼｯｸUB" panose="020B0900000000000000" pitchFamily="50" charset="-128"/>
+              </a:rPr>
+              <a:t>開放しています。</a:t>
+            </a:r>
+            <a:endParaRPr lang="en-US" altLang="ja-JP" sz="2400" dirty="0">
+              <a:latin typeface="HGS創英角ｺﾞｼｯｸUB" panose="020B0900000000000000" pitchFamily="50" charset="-128"/>
+              <a:ea typeface="HGS創英角ｺﾞｼｯｸUB" panose="020B0900000000000000" pitchFamily="50" charset="-128"/>
+            </a:endParaRPr>
+          </a:p>
+          <a:p>
+            <a:r>
+              <a:rPr lang="en-US" altLang="ja-JP" sz="2400" dirty="0">
+                <a:latin typeface="HGS創英角ｺﾞｼｯｸUB" panose="020B0900000000000000" pitchFamily="50" charset="-128"/>
+                <a:ea typeface="HGS創英角ｺﾞｼｯｸUB" panose="020B0900000000000000" pitchFamily="50" charset="-128"/>
+              </a:rPr>
+              <a:t>17</a:t>
+            </a:r>
+            <a:r>
+              <a:rPr lang="ja-JP" altLang="en-US" sz="2400" dirty="0">
+                <a:latin typeface="HGS創英角ｺﾞｼｯｸUB" panose="020B0900000000000000" pitchFamily="50" charset="-128"/>
+                <a:ea typeface="HGS創英角ｺﾞｼｯｸUB" panose="020B0900000000000000" pitchFamily="50" charset="-128"/>
+              </a:rPr>
+              <a:t>時まで居残りして、勉強、ゲーム制作をしましょう。</a:t>
+            </a:r>
+            <a:endParaRPr lang="en-US" altLang="ja-JP" sz="2400" dirty="0">
+              <a:latin typeface="HGS創英角ｺﾞｼｯｸUB" panose="020B0900000000000000" pitchFamily="50" charset="-128"/>
+              <a:ea typeface="HGS創英角ｺﾞｼｯｸUB" panose="020B0900000000000000" pitchFamily="50" charset="-128"/>
+            </a:endParaRPr>
+          </a:p>
+          <a:p>
+            <a:endParaRPr lang="en-US" altLang="ja-JP" sz="2400" dirty="0">
+              <a:latin typeface="HGS創英角ｺﾞｼｯｸUB" panose="020B0900000000000000" pitchFamily="50" charset="-128"/>
+              <a:ea typeface="HGS創英角ｺﾞｼｯｸUB" panose="020B0900000000000000" pitchFamily="50" charset="-128"/>
+            </a:endParaRPr>
+          </a:p>
+          <a:p>
+            <a:r>
+              <a:rPr lang="ja-JP" altLang="en-US" sz="2400" dirty="0">
+                <a:latin typeface="HGS創英角ｺﾞｼｯｸUB" panose="020B0900000000000000" pitchFamily="50" charset="-128"/>
+                <a:ea typeface="HGS創英角ｺﾞｼｯｸUB" panose="020B0900000000000000" pitchFamily="50" charset="-128"/>
+              </a:rPr>
+              <a:t>アルバイトはそのあとからにしましょう。</a:t>
+            </a:r>
+            <a:endParaRPr lang="en-US" altLang="ja-JP" sz="2400" dirty="0">
+              <a:latin typeface="HGS創英角ｺﾞｼｯｸUB" panose="020B0900000000000000" pitchFamily="50" charset="-128"/>
+              <a:ea typeface="HGS創英角ｺﾞｼｯｸUB" panose="020B0900000000000000" pitchFamily="50" charset="-128"/>
+            </a:endParaRPr>
+          </a:p>
+          <a:p>
+            <a:endParaRPr lang="en-US" altLang="ja-JP" sz="2400" dirty="0">
+              <a:latin typeface="HGS創英角ｺﾞｼｯｸUB" panose="020B0900000000000000" pitchFamily="50" charset="-128"/>
+              <a:ea typeface="HGS創英角ｺﾞｼｯｸUB" panose="020B0900000000000000" pitchFamily="50" charset="-128"/>
+            </a:endParaRPr>
+          </a:p>
+          <a:p>
+            <a:r>
+              <a:rPr lang="en-US" altLang="ja-JP" sz="2400" dirty="0">
+                <a:latin typeface="HGS創英角ｺﾞｼｯｸUB" panose="020B0900000000000000" pitchFamily="50" charset="-128"/>
+                <a:ea typeface="HGS創英角ｺﾞｼｯｸUB" panose="020B0900000000000000" pitchFamily="50" charset="-128"/>
+              </a:rPr>
+              <a:t>※</a:t>
+            </a:r>
+            <a:r>
+              <a:rPr lang="ja-JP" altLang="en-US" sz="2400" dirty="0">
+                <a:latin typeface="HGS創英角ｺﾞｼｯｸUB" panose="020B0900000000000000" pitchFamily="50" charset="-128"/>
+                <a:ea typeface="HGS創英角ｺﾞｼｯｸUB" panose="020B0900000000000000" pitchFamily="50" charset="-128"/>
+              </a:rPr>
+              <a:t>たまにはゲームして遊ぶために残っても大丈夫です</a:t>
+            </a:r>
+            <a:endParaRPr lang="en-US" altLang="ja-JP" sz="2400" dirty="0">
+              <a:latin typeface="HGS創英角ｺﾞｼｯｸUB" panose="020B0900000000000000" pitchFamily="50" charset="-128"/>
+              <a:ea typeface="HGS創英角ｺﾞｼｯｸUB" panose="020B0900000000000000" pitchFamily="50" charset="-128"/>
+            </a:endParaRPr>
+          </a:p>
+        </p:txBody>
+      </p:sp>
+    </p:spTree>
+    <p:extLst>
+      <p:ext uri="{BB962C8B-B14F-4D97-AF65-F5344CB8AC3E}">
+        <p14:creationId xmlns:p14="http://schemas.microsoft.com/office/powerpoint/2010/main" val="818534836"/>
+      </p:ext>
+    </p:extLst>
+  </p:cSld>
+  <p:clrMapOvr>
+    <a:masterClrMapping/>
+  </p:clrMapOvr>
+</p:sld>
+</file>
+
+<file path=ppt/slides/slide29.xml><?xml version="1.0" encoding="utf-8"?>
+<p:sld xmlns:a="http://schemas.openxmlformats.org/drawingml/2006/main" xmlns:r="http://schemas.openxmlformats.org/officeDocument/2006/relationships" xmlns:p="http://schemas.openxmlformats.org/presentationml/2006/main">
+  <p:cSld>
+    <p:spTree>
+      <p:nvGrpSpPr>
+        <p:cNvPr id="1" name=""/>
+        <p:cNvGrpSpPr/>
+        <p:nvPr/>
+      </p:nvGrpSpPr>
+      <p:grpSpPr>
+        <a:xfrm>
+          <a:off x="0" y="0"/>
+          <a:ext cx="0" cy="0"/>
+          <a:chOff x="0" y="0"/>
+          <a:chExt cx="0" cy="0"/>
+        </a:xfrm>
+      </p:grpSpPr>
+      <p:sp>
+        <p:nvSpPr>
+          <p:cNvPr id="4" name="テキスト ボックス 3">
+            <a:extLst>
+              <a:ext uri="{FF2B5EF4-FFF2-40B4-BE49-F238E27FC236}">
+                <a16:creationId xmlns:a16="http://schemas.microsoft.com/office/drawing/2014/main" id="{5A13BF46-B8C5-48AA-8308-C9ECFF431A18}"/>
+              </a:ext>
+            </a:extLst>
+          </p:cNvPr>
+          <p:cNvSpPr txBox="1"/>
+          <p:nvPr/>
+        </p:nvSpPr>
+        <p:spPr>
+          <a:xfrm>
+            <a:off x="567542" y="491954"/>
+            <a:ext cx="4304383" cy="584775"/>
+          </a:xfrm>
+          <a:prstGeom prst="rect">
+            <a:avLst/>
+          </a:prstGeom>
+          <a:noFill/>
+        </p:spPr>
+        <p:txBody>
+          <a:bodyPr wrap="none" rtlCol="0">
+            <a:spAutoFit/>
+          </a:bodyPr>
+          <a:lstStyle/>
+          <a:p>
+            <a:r>
+              <a:rPr lang="ja-JP" altLang="en-US" sz="3200" b="1" u="sng" dirty="0">
+                <a:latin typeface="HGS創英角ｺﾞｼｯｸUB" panose="020B0900000000000000" pitchFamily="50" charset="-128"/>
+                <a:ea typeface="HGS創英角ｺﾞｼｯｸUB" panose="020B0900000000000000" pitchFamily="50" charset="-128"/>
+              </a:rPr>
+              <a:t>イベントに参加しよう</a:t>
+            </a:r>
+            <a:endParaRPr kumimoji="1" lang="en-US" altLang="ja-JP" sz="3200" b="1" u="sng" dirty="0">
+              <a:latin typeface="HGS創英角ｺﾞｼｯｸUB" panose="020B0900000000000000" pitchFamily="50" charset="-128"/>
+              <a:ea typeface="HGS創英角ｺﾞｼｯｸUB" panose="020B0900000000000000" pitchFamily="50" charset="-128"/>
+            </a:endParaRPr>
+          </a:p>
+        </p:txBody>
+      </p:sp>
+      <p:sp>
+        <p:nvSpPr>
+          <p:cNvPr id="6" name="テキスト ボックス 5">
+            <a:extLst>
+              <a:ext uri="{FF2B5EF4-FFF2-40B4-BE49-F238E27FC236}">
+                <a16:creationId xmlns:a16="http://schemas.microsoft.com/office/drawing/2014/main" id="{55830AD6-028B-4C4E-80BF-B70DFC1C3A46}"/>
+              </a:ext>
+            </a:extLst>
+          </p:cNvPr>
+          <p:cNvSpPr txBox="1"/>
+          <p:nvPr/>
+        </p:nvSpPr>
+        <p:spPr>
+          <a:xfrm>
+            <a:off x="567542" y="1216429"/>
+            <a:ext cx="8186857" cy="4154984"/>
+          </a:xfrm>
+          <a:prstGeom prst="rect">
+            <a:avLst/>
+          </a:prstGeom>
+          <a:noFill/>
+        </p:spPr>
+        <p:txBody>
+          <a:bodyPr wrap="none" rtlCol="0">
+            <a:spAutoFit/>
+          </a:bodyPr>
+          <a:lstStyle/>
+          <a:p>
+            <a:r>
+              <a:rPr lang="ja-JP" altLang="en-US" sz="2400" dirty="0">
+                <a:latin typeface="HGS創英角ｺﾞｼｯｸUB" panose="020B0900000000000000" pitchFamily="50" charset="-128"/>
+                <a:ea typeface="HGS創英角ｺﾞｼｯｸUB" panose="020B0900000000000000" pitchFamily="50" charset="-128"/>
+              </a:rPr>
+              <a:t>就職活動では、他の専門学生や大学生がライバルです。</a:t>
+            </a:r>
+            <a:endParaRPr lang="en-US" altLang="ja-JP" sz="2400" dirty="0">
+              <a:latin typeface="HGS創英角ｺﾞｼｯｸUB" panose="020B0900000000000000" pitchFamily="50" charset="-128"/>
+              <a:ea typeface="HGS創英角ｺﾞｼｯｸUB" panose="020B0900000000000000" pitchFamily="50" charset="-128"/>
+            </a:endParaRPr>
+          </a:p>
+          <a:p>
+            <a:endParaRPr lang="en-US" altLang="ja-JP" sz="2400" dirty="0">
+              <a:latin typeface="HGS創英角ｺﾞｼｯｸUB" panose="020B0900000000000000" pitchFamily="50" charset="-128"/>
+              <a:ea typeface="HGS創英角ｺﾞｼｯｸUB" panose="020B0900000000000000" pitchFamily="50" charset="-128"/>
+            </a:endParaRPr>
+          </a:p>
+          <a:p>
+            <a:r>
+              <a:rPr lang="ja-JP" altLang="en-US" sz="2400" dirty="0">
+                <a:latin typeface="HGS創英角ｺﾞｼｯｸUB" panose="020B0900000000000000" pitchFamily="50" charset="-128"/>
+                <a:ea typeface="HGS創英角ｺﾞｼｯｸUB" panose="020B0900000000000000" pitchFamily="50" charset="-128"/>
+              </a:rPr>
+              <a:t>特に学生作品を見ることができるイベントには参加して、</a:t>
+            </a:r>
+            <a:endParaRPr lang="en-US" altLang="ja-JP" sz="2400" dirty="0">
+              <a:latin typeface="HGS創英角ｺﾞｼｯｸUB" panose="020B0900000000000000" pitchFamily="50" charset="-128"/>
+              <a:ea typeface="HGS創英角ｺﾞｼｯｸUB" panose="020B0900000000000000" pitchFamily="50" charset="-128"/>
+            </a:endParaRPr>
+          </a:p>
+          <a:p>
+            <a:r>
+              <a:rPr lang="ja-JP" altLang="en-US" sz="2400" dirty="0">
+                <a:latin typeface="HGS創英角ｺﾞｼｯｸUB" panose="020B0900000000000000" pitchFamily="50" charset="-128"/>
+                <a:ea typeface="HGS創英角ｺﾞｼｯｸUB" panose="020B0900000000000000" pitchFamily="50" charset="-128"/>
+              </a:rPr>
+              <a:t>ライバルの実力を把握しましょう。</a:t>
+            </a:r>
+            <a:endParaRPr lang="en-US" altLang="ja-JP" sz="2400" dirty="0">
+              <a:latin typeface="HGS創英角ｺﾞｼｯｸUB" panose="020B0900000000000000" pitchFamily="50" charset="-128"/>
+              <a:ea typeface="HGS創英角ｺﾞｼｯｸUB" panose="020B0900000000000000" pitchFamily="50" charset="-128"/>
+            </a:endParaRPr>
+          </a:p>
+          <a:p>
+            <a:endParaRPr lang="en-US" altLang="ja-JP" sz="2400" dirty="0">
+              <a:latin typeface="HGS創英角ｺﾞｼｯｸUB" panose="020B0900000000000000" pitchFamily="50" charset="-128"/>
+              <a:ea typeface="HGS創英角ｺﾞｼｯｸUB" panose="020B0900000000000000" pitchFamily="50" charset="-128"/>
+            </a:endParaRPr>
+          </a:p>
+          <a:p>
+            <a:r>
+              <a:rPr lang="ja-JP" altLang="en-US" sz="2400" dirty="0">
+                <a:solidFill>
+                  <a:srgbClr val="FF0000"/>
+                </a:solidFill>
+                <a:latin typeface="HGS創英角ｺﾞｼｯｸUB" panose="020B0900000000000000" pitchFamily="50" charset="-128"/>
+                <a:ea typeface="HGS創英角ｺﾞｼｯｸUB" panose="020B0900000000000000" pitchFamily="50" charset="-128"/>
+              </a:rPr>
+              <a:t>■主なイベント</a:t>
+            </a:r>
+            <a:endParaRPr lang="en-US" altLang="ja-JP" sz="2400" dirty="0">
+              <a:solidFill>
+                <a:srgbClr val="FF0000"/>
+              </a:solidFill>
+              <a:latin typeface="HGS創英角ｺﾞｼｯｸUB" panose="020B0900000000000000" pitchFamily="50" charset="-128"/>
+              <a:ea typeface="HGS創英角ｺﾞｼｯｸUB" panose="020B0900000000000000" pitchFamily="50" charset="-128"/>
+            </a:endParaRPr>
+          </a:p>
+          <a:p>
+            <a:r>
+              <a:rPr lang="ja-JP" altLang="en-US" sz="2400" dirty="0">
+                <a:latin typeface="HGS創英角ｺﾞｼｯｸUB" panose="020B0900000000000000" pitchFamily="50" charset="-128"/>
+                <a:ea typeface="HGS創英角ｺﾞｼｯｸUB" panose="020B0900000000000000" pitchFamily="50" charset="-128"/>
+              </a:rPr>
+              <a:t>・ゲーム制作展（</a:t>
+            </a:r>
+            <a:r>
+              <a:rPr lang="en-US" altLang="ja-JP" sz="2400" dirty="0">
+                <a:latin typeface="HGS創英角ｺﾞｼｯｸUB" panose="020B0900000000000000" pitchFamily="50" charset="-128"/>
+                <a:ea typeface="HGS創英角ｺﾞｼｯｸUB" panose="020B0900000000000000" pitchFamily="50" charset="-128"/>
+              </a:rPr>
+              <a:t>2</a:t>
+            </a:r>
+            <a:r>
+              <a:rPr lang="ja-JP" altLang="en-US" sz="2400" dirty="0">
+                <a:latin typeface="HGS創英角ｺﾞｼｯｸUB" panose="020B0900000000000000" pitchFamily="50" charset="-128"/>
+                <a:ea typeface="HGS創英角ｺﾞｼｯｸUB" panose="020B0900000000000000" pitchFamily="50" charset="-128"/>
+              </a:rPr>
+              <a:t>月ごろ、あるある</a:t>
+            </a:r>
+            <a:r>
+              <a:rPr lang="en-US" altLang="ja-JP" sz="2400" dirty="0">
+                <a:latin typeface="HGS創英角ｺﾞｼｯｸUB" panose="020B0900000000000000" pitchFamily="50" charset="-128"/>
+                <a:ea typeface="HGS創英角ｺﾞｼｯｸUB" panose="020B0900000000000000" pitchFamily="50" charset="-128"/>
+              </a:rPr>
+              <a:t>City</a:t>
+            </a:r>
+            <a:r>
+              <a:rPr lang="ja-JP" altLang="en-US" sz="2400" dirty="0">
+                <a:latin typeface="HGS創英角ｺﾞｼｯｸUB" panose="020B0900000000000000" pitchFamily="50" charset="-128"/>
+                <a:ea typeface="HGS創英角ｺﾞｼｯｸUB" panose="020B0900000000000000" pitchFamily="50" charset="-128"/>
+              </a:rPr>
+              <a:t>）</a:t>
+            </a:r>
+            <a:endParaRPr lang="en-US" altLang="ja-JP" sz="2400" dirty="0">
+              <a:latin typeface="HGS創英角ｺﾞｼｯｸUB" panose="020B0900000000000000" pitchFamily="50" charset="-128"/>
+              <a:ea typeface="HGS創英角ｺﾞｼｯｸUB" panose="020B0900000000000000" pitchFamily="50" charset="-128"/>
+            </a:endParaRPr>
+          </a:p>
+          <a:p>
+            <a:r>
+              <a:rPr lang="ja-JP" altLang="en-US" sz="2400" dirty="0">
+                <a:latin typeface="HGS創英角ｺﾞｼｯｸUB" panose="020B0900000000000000" pitchFamily="50" charset="-128"/>
+                <a:ea typeface="HGS創英角ｺﾞｼｯｸUB" panose="020B0900000000000000" pitchFamily="50" charset="-128"/>
+              </a:rPr>
+              <a:t>・ゲーム展示会（</a:t>
+            </a:r>
+            <a:r>
+              <a:rPr lang="en-US" altLang="ja-JP" sz="2400" dirty="0">
+                <a:latin typeface="HGS創英角ｺﾞｼｯｸUB" panose="020B0900000000000000" pitchFamily="50" charset="-128"/>
+                <a:ea typeface="HGS創英角ｺﾞｼｯｸUB" panose="020B0900000000000000" pitchFamily="50" charset="-128"/>
+              </a:rPr>
+              <a:t>1</a:t>
+            </a:r>
+            <a:r>
+              <a:rPr lang="ja-JP" altLang="en-US" sz="2400" dirty="0">
+                <a:latin typeface="HGS創英角ｺﾞｼｯｸUB" panose="020B0900000000000000" pitchFamily="50" charset="-128"/>
+                <a:ea typeface="HGS創英角ｺﾞｼｯｸUB" panose="020B0900000000000000" pitchFamily="50" charset="-128"/>
+              </a:rPr>
+              <a:t>月ごろ、福岡校）</a:t>
+            </a:r>
+            <a:endParaRPr lang="en-US" altLang="ja-JP" sz="2400" dirty="0">
+              <a:latin typeface="HGS創英角ｺﾞｼｯｸUB" panose="020B0900000000000000" pitchFamily="50" charset="-128"/>
+              <a:ea typeface="HGS創英角ｺﾞｼｯｸUB" panose="020B0900000000000000" pitchFamily="50" charset="-128"/>
+            </a:endParaRPr>
+          </a:p>
+          <a:p>
+            <a:r>
+              <a:rPr lang="ja-JP" altLang="en-US" sz="2400" dirty="0">
+                <a:latin typeface="HGS創英角ｺﾞｼｯｸUB" panose="020B0900000000000000" pitchFamily="50" charset="-128"/>
+                <a:ea typeface="HGS創英角ｺﾞｼｯｸUB" panose="020B0900000000000000" pitchFamily="50" charset="-128"/>
+              </a:rPr>
+              <a:t>・</a:t>
+            </a:r>
+            <a:r>
+              <a:rPr lang="en-US" altLang="ja-JP" sz="2400" dirty="0">
+                <a:latin typeface="HGS創英角ｺﾞｼｯｸUB" panose="020B0900000000000000" pitchFamily="50" charset="-128"/>
+                <a:ea typeface="HGS創英角ｺﾞｼｯｸUB" panose="020B0900000000000000" pitchFamily="50" charset="-128"/>
+              </a:rPr>
+              <a:t>CEDEC+KYUSHU</a:t>
+            </a:r>
+            <a:r>
+              <a:rPr lang="ja-JP" altLang="en-US" sz="2400" dirty="0">
+                <a:latin typeface="HGS創英角ｺﾞｼｯｸUB" panose="020B0900000000000000" pitchFamily="50" charset="-128"/>
+                <a:ea typeface="HGS創英角ｺﾞｼｯｸUB" panose="020B0900000000000000" pitchFamily="50" charset="-128"/>
+              </a:rPr>
+              <a:t>（</a:t>
+            </a:r>
+            <a:r>
+              <a:rPr lang="en-US" altLang="ja-JP" sz="2400" dirty="0">
+                <a:latin typeface="HGS創英角ｺﾞｼｯｸUB" panose="020B0900000000000000" pitchFamily="50" charset="-128"/>
+                <a:ea typeface="HGS創英角ｺﾞｼｯｸUB" panose="020B0900000000000000" pitchFamily="50" charset="-128"/>
+              </a:rPr>
+              <a:t>11</a:t>
+            </a:r>
+            <a:r>
+              <a:rPr lang="ja-JP" altLang="en-US" sz="2400" dirty="0">
+                <a:latin typeface="HGS創英角ｺﾞｼｯｸUB" panose="020B0900000000000000" pitchFamily="50" charset="-128"/>
+                <a:ea typeface="HGS創英角ｺﾞｼｯｸUB" panose="020B0900000000000000" pitchFamily="50" charset="-128"/>
+              </a:rPr>
+              <a:t>月末、九州産業大学）</a:t>
+            </a:r>
+            <a:endParaRPr lang="en-US" altLang="ja-JP" sz="2400" dirty="0">
+              <a:latin typeface="HGS創英角ｺﾞｼｯｸUB" panose="020B0900000000000000" pitchFamily="50" charset="-128"/>
+              <a:ea typeface="HGS創英角ｺﾞｼｯｸUB" panose="020B0900000000000000" pitchFamily="50" charset="-128"/>
+            </a:endParaRPr>
+          </a:p>
+          <a:p>
+            <a:endParaRPr lang="en-US" altLang="ja-JP" sz="2400" dirty="0">
+              <a:latin typeface="HGS創英角ｺﾞｼｯｸUB" panose="020B0900000000000000" pitchFamily="50" charset="-128"/>
+              <a:ea typeface="HGS創英角ｺﾞｼｯｸUB" panose="020B0900000000000000" pitchFamily="50" charset="-128"/>
+            </a:endParaRPr>
+          </a:p>
+          <a:p>
+            <a:r>
+              <a:rPr lang="en-US" altLang="ja-JP" sz="2400" dirty="0">
+                <a:latin typeface="HGS創英角ｺﾞｼｯｸUB" panose="020B0900000000000000" pitchFamily="50" charset="-128"/>
+                <a:ea typeface="HGS創英角ｺﾞｼｯｸUB" panose="020B0900000000000000" pitchFamily="50" charset="-128"/>
+              </a:rPr>
+              <a:t>※</a:t>
+            </a:r>
+            <a:r>
+              <a:rPr lang="ja-JP" altLang="en-US" sz="2400" dirty="0">
+                <a:latin typeface="HGS創英角ｺﾞｼｯｸUB" panose="020B0900000000000000" pitchFamily="50" charset="-128"/>
+                <a:ea typeface="HGS創英角ｺﾞｼｯｸUB" panose="020B0900000000000000" pitchFamily="50" charset="-128"/>
+              </a:rPr>
+              <a:t>もちろんクラスメイトもライバルになります</a:t>
+            </a:r>
+            <a:endParaRPr lang="en-US" altLang="ja-JP" sz="2400" dirty="0">
+              <a:latin typeface="HGS創英角ｺﾞｼｯｸUB" panose="020B0900000000000000" pitchFamily="50" charset="-128"/>
+              <a:ea typeface="HGS創英角ｺﾞｼｯｸUB" panose="020B0900000000000000" pitchFamily="50" charset="-128"/>
+            </a:endParaRPr>
+          </a:p>
+        </p:txBody>
+      </p:sp>
+    </p:spTree>
+    <p:extLst>
+      <p:ext uri="{BB962C8B-B14F-4D97-AF65-F5344CB8AC3E}">
+        <p14:creationId xmlns:p14="http://schemas.microsoft.com/office/powerpoint/2010/main" val="2523051170"/>
       </p:ext>
     </p:extLst>
   </p:cSld>
@@ -8707,6 +9376,627 @@
     <p:extLst>
       <p:ext uri="{BB962C8B-B14F-4D97-AF65-F5344CB8AC3E}">
         <p14:creationId xmlns:p14="http://schemas.microsoft.com/office/powerpoint/2010/main" val="280611255"/>
+      </p:ext>
+    </p:extLst>
+  </p:cSld>
+  <p:clrMapOvr>
+    <a:masterClrMapping/>
+  </p:clrMapOvr>
+</p:sld>
+</file>
+
+<file path=ppt/slides/slide30.xml><?xml version="1.0" encoding="utf-8"?>
+<p:sld xmlns:a="http://schemas.openxmlformats.org/drawingml/2006/main" xmlns:r="http://schemas.openxmlformats.org/officeDocument/2006/relationships" xmlns:p="http://schemas.openxmlformats.org/presentationml/2006/main">
+  <p:cSld>
+    <p:spTree>
+      <p:nvGrpSpPr>
+        <p:cNvPr id="1" name=""/>
+        <p:cNvGrpSpPr/>
+        <p:nvPr/>
+      </p:nvGrpSpPr>
+      <p:grpSpPr>
+        <a:xfrm>
+          <a:off x="0" y="0"/>
+          <a:ext cx="0" cy="0"/>
+          <a:chOff x="0" y="0"/>
+          <a:chExt cx="0" cy="0"/>
+        </a:xfrm>
+      </p:grpSpPr>
+      <p:sp>
+        <p:nvSpPr>
+          <p:cNvPr id="4" name="テキスト ボックス 3">
+            <a:extLst>
+              <a:ext uri="{FF2B5EF4-FFF2-40B4-BE49-F238E27FC236}">
+                <a16:creationId xmlns:a16="http://schemas.microsoft.com/office/drawing/2014/main" id="{5A13BF46-B8C5-48AA-8308-C9ECFF431A18}"/>
+              </a:ext>
+            </a:extLst>
+          </p:cNvPr>
+          <p:cNvSpPr txBox="1"/>
+          <p:nvPr/>
+        </p:nvSpPr>
+        <p:spPr>
+          <a:xfrm>
+            <a:off x="567542" y="491954"/>
+            <a:ext cx="2656496" cy="584775"/>
+          </a:xfrm>
+          <a:prstGeom prst="rect">
+            <a:avLst/>
+          </a:prstGeom>
+          <a:noFill/>
+        </p:spPr>
+        <p:txBody>
+          <a:bodyPr wrap="none" rtlCol="0">
+            <a:spAutoFit/>
+          </a:bodyPr>
+          <a:lstStyle/>
+          <a:p>
+            <a:r>
+              <a:rPr lang="ja-JP" altLang="en-US" sz="3200" b="1" u="sng" dirty="0">
+                <a:latin typeface="HGS創英角ｺﾞｼｯｸUB" panose="020B0900000000000000" pitchFamily="50" charset="-128"/>
+                <a:ea typeface="HGS創英角ｺﾞｼｯｸUB" panose="020B0900000000000000" pitchFamily="50" charset="-128"/>
+              </a:rPr>
+              <a:t>就職活動時期</a:t>
+            </a:r>
+            <a:endParaRPr kumimoji="1" lang="en-US" altLang="ja-JP" sz="3200" b="1" u="sng" dirty="0">
+              <a:latin typeface="HGS創英角ｺﾞｼｯｸUB" panose="020B0900000000000000" pitchFamily="50" charset="-128"/>
+              <a:ea typeface="HGS創英角ｺﾞｼｯｸUB" panose="020B0900000000000000" pitchFamily="50" charset="-128"/>
+            </a:endParaRPr>
+          </a:p>
+        </p:txBody>
+      </p:sp>
+      <p:sp>
+        <p:nvSpPr>
+          <p:cNvPr id="6" name="テキスト ボックス 5">
+            <a:extLst>
+              <a:ext uri="{FF2B5EF4-FFF2-40B4-BE49-F238E27FC236}">
+                <a16:creationId xmlns:a16="http://schemas.microsoft.com/office/drawing/2014/main" id="{55830AD6-028B-4C4E-80BF-B70DFC1C3A46}"/>
+              </a:ext>
+            </a:extLst>
+          </p:cNvPr>
+          <p:cNvSpPr txBox="1"/>
+          <p:nvPr/>
+        </p:nvSpPr>
+        <p:spPr>
+          <a:xfrm>
+            <a:off x="567542" y="1216429"/>
+            <a:ext cx="8802410" cy="1569660"/>
+          </a:xfrm>
+          <a:prstGeom prst="rect">
+            <a:avLst/>
+          </a:prstGeom>
+          <a:noFill/>
+        </p:spPr>
+        <p:txBody>
+          <a:bodyPr wrap="none" rtlCol="0">
+            <a:spAutoFit/>
+          </a:bodyPr>
+          <a:lstStyle/>
+          <a:p>
+            <a:r>
+              <a:rPr lang="ja-JP" altLang="en-US" sz="2400" dirty="0">
+                <a:latin typeface="HGS創英角ｺﾞｼｯｸUB" panose="020B0900000000000000" pitchFamily="50" charset="-128"/>
+                <a:ea typeface="HGS創英角ｺﾞｼｯｸUB" panose="020B0900000000000000" pitchFamily="50" charset="-128"/>
+              </a:rPr>
+              <a:t>就職活動は最速では２年生の秋にははじまります。</a:t>
+            </a:r>
+            <a:endParaRPr lang="en-US" altLang="ja-JP" sz="2400" dirty="0">
+              <a:latin typeface="HGS創英角ｺﾞｼｯｸUB" panose="020B0900000000000000" pitchFamily="50" charset="-128"/>
+              <a:ea typeface="HGS創英角ｺﾞｼｯｸUB" panose="020B0900000000000000" pitchFamily="50" charset="-128"/>
+            </a:endParaRPr>
+          </a:p>
+          <a:p>
+            <a:r>
+              <a:rPr lang="ja-JP" altLang="en-US" sz="2400" dirty="0">
+                <a:latin typeface="HGS創英角ｺﾞｼｯｸUB" panose="020B0900000000000000" pitchFamily="50" charset="-128"/>
+                <a:ea typeface="HGS創英角ｺﾞｼｯｸUB" panose="020B0900000000000000" pitchFamily="50" charset="-128"/>
+              </a:rPr>
+              <a:t>早い人は冬休み前に内定を取ることもあります。</a:t>
+            </a:r>
+            <a:endParaRPr lang="en-US" altLang="ja-JP" sz="2400" dirty="0">
+              <a:latin typeface="HGS創英角ｺﾞｼｯｸUB" panose="020B0900000000000000" pitchFamily="50" charset="-128"/>
+              <a:ea typeface="HGS創英角ｺﾞｼｯｸUB" panose="020B0900000000000000" pitchFamily="50" charset="-128"/>
+            </a:endParaRPr>
+          </a:p>
+          <a:p>
+            <a:endParaRPr lang="en-US" altLang="ja-JP" sz="2400" dirty="0">
+              <a:latin typeface="HGS創英角ｺﾞｼｯｸUB" panose="020B0900000000000000" pitchFamily="50" charset="-128"/>
+              <a:ea typeface="HGS創英角ｺﾞｼｯｸUB" panose="020B0900000000000000" pitchFamily="50" charset="-128"/>
+            </a:endParaRPr>
+          </a:p>
+          <a:p>
+            <a:r>
+              <a:rPr lang="ja-JP" altLang="en-US" sz="2400" dirty="0">
+                <a:latin typeface="HGS創英角ｺﾞｼｯｸUB" panose="020B0900000000000000" pitchFamily="50" charset="-128"/>
+                <a:ea typeface="HGS創英角ｺﾞｼｯｸUB" panose="020B0900000000000000" pitchFamily="50" charset="-128"/>
+              </a:rPr>
+              <a:t>残された時間は短いですので、毎日を大切に過ごしましょう。</a:t>
+            </a:r>
+            <a:endParaRPr lang="en-US" altLang="ja-JP" sz="2400" dirty="0">
+              <a:latin typeface="HGS創英角ｺﾞｼｯｸUB" panose="020B0900000000000000" pitchFamily="50" charset="-128"/>
+              <a:ea typeface="HGS創英角ｺﾞｼｯｸUB" panose="020B0900000000000000" pitchFamily="50" charset="-128"/>
+            </a:endParaRPr>
+          </a:p>
+        </p:txBody>
+      </p:sp>
+    </p:spTree>
+    <p:extLst>
+      <p:ext uri="{BB962C8B-B14F-4D97-AF65-F5344CB8AC3E}">
+        <p14:creationId xmlns:p14="http://schemas.microsoft.com/office/powerpoint/2010/main" val="1746151252"/>
+      </p:ext>
+    </p:extLst>
+  </p:cSld>
+  <p:clrMapOvr>
+    <a:masterClrMapping/>
+  </p:clrMapOvr>
+</p:sld>
+</file>
+
+<file path=ppt/slides/slide31.xml><?xml version="1.0" encoding="utf-8"?>
+<p:sld xmlns:a="http://schemas.openxmlformats.org/drawingml/2006/main" xmlns:r="http://schemas.openxmlformats.org/officeDocument/2006/relationships" xmlns:p="http://schemas.openxmlformats.org/presentationml/2006/main">
+  <p:cSld>
+    <p:spTree>
+      <p:nvGrpSpPr>
+        <p:cNvPr id="1" name=""/>
+        <p:cNvGrpSpPr/>
+        <p:nvPr/>
+      </p:nvGrpSpPr>
+      <p:grpSpPr>
+        <a:xfrm>
+          <a:off x="0" y="0"/>
+          <a:ext cx="0" cy="0"/>
+          <a:chOff x="0" y="0"/>
+          <a:chExt cx="0" cy="0"/>
+        </a:xfrm>
+      </p:grpSpPr>
+      <p:sp>
+        <p:nvSpPr>
+          <p:cNvPr id="4" name="テキスト ボックス 3">
+            <a:extLst>
+              <a:ext uri="{FF2B5EF4-FFF2-40B4-BE49-F238E27FC236}">
+                <a16:creationId xmlns:a16="http://schemas.microsoft.com/office/drawing/2014/main" id="{5A13BF46-B8C5-48AA-8308-C9ECFF431A18}"/>
+              </a:ext>
+            </a:extLst>
+          </p:cNvPr>
+          <p:cNvSpPr txBox="1"/>
+          <p:nvPr/>
+        </p:nvSpPr>
+        <p:spPr>
+          <a:xfrm>
+            <a:off x="567542" y="491954"/>
+            <a:ext cx="1832553" cy="584775"/>
+          </a:xfrm>
+          <a:prstGeom prst="rect">
+            <a:avLst/>
+          </a:prstGeom>
+          <a:noFill/>
+        </p:spPr>
+        <p:txBody>
+          <a:bodyPr wrap="none" rtlCol="0">
+            <a:spAutoFit/>
+          </a:bodyPr>
+          <a:lstStyle/>
+          <a:p>
+            <a:r>
+              <a:rPr lang="ja-JP" altLang="en-US" sz="3200" b="1" u="sng" dirty="0">
+                <a:latin typeface="HGS創英角ｺﾞｼｯｸUB" panose="020B0900000000000000" pitchFamily="50" charset="-128"/>
+                <a:ea typeface="HGS創英角ｺﾞｼｯｸUB" panose="020B0900000000000000" pitchFamily="50" charset="-128"/>
+              </a:rPr>
+              <a:t>さいごに</a:t>
+            </a:r>
+            <a:endParaRPr kumimoji="1" lang="en-US" altLang="ja-JP" sz="3200" b="1" u="sng" dirty="0">
+              <a:latin typeface="HGS創英角ｺﾞｼｯｸUB" panose="020B0900000000000000" pitchFamily="50" charset="-128"/>
+              <a:ea typeface="HGS創英角ｺﾞｼｯｸUB" panose="020B0900000000000000" pitchFamily="50" charset="-128"/>
+            </a:endParaRPr>
+          </a:p>
+        </p:txBody>
+      </p:sp>
+      <p:sp>
+        <p:nvSpPr>
+          <p:cNvPr id="6" name="テキスト ボックス 5">
+            <a:extLst>
+              <a:ext uri="{FF2B5EF4-FFF2-40B4-BE49-F238E27FC236}">
+                <a16:creationId xmlns:a16="http://schemas.microsoft.com/office/drawing/2014/main" id="{55830AD6-028B-4C4E-80BF-B70DFC1C3A46}"/>
+              </a:ext>
+            </a:extLst>
+          </p:cNvPr>
+          <p:cNvSpPr txBox="1"/>
+          <p:nvPr/>
+        </p:nvSpPr>
+        <p:spPr>
+          <a:xfrm>
+            <a:off x="567542" y="1216429"/>
+            <a:ext cx="6340197" cy="5262979"/>
+          </a:xfrm>
+          <a:prstGeom prst="rect">
+            <a:avLst/>
+          </a:prstGeom>
+          <a:noFill/>
+        </p:spPr>
+        <p:txBody>
+          <a:bodyPr wrap="none" rtlCol="0">
+            <a:spAutoFit/>
+          </a:bodyPr>
+          <a:lstStyle/>
+          <a:p>
+            <a:r>
+              <a:rPr lang="ja-JP" altLang="en-US" sz="2400" dirty="0">
+                <a:latin typeface="HGS創英角ｺﾞｼｯｸUB" panose="020B0900000000000000" pitchFamily="50" charset="-128"/>
+                <a:ea typeface="HGS創英角ｺﾞｼｯｸUB" panose="020B0900000000000000" pitchFamily="50" charset="-128"/>
+              </a:rPr>
+              <a:t>明日の予定は以下の通りです。</a:t>
+            </a:r>
+            <a:endParaRPr lang="en-US" altLang="ja-JP" sz="2400" dirty="0">
+              <a:latin typeface="HGS創英角ｺﾞｼｯｸUB" panose="020B0900000000000000" pitchFamily="50" charset="-128"/>
+              <a:ea typeface="HGS創英角ｺﾞｼｯｸUB" panose="020B0900000000000000" pitchFamily="50" charset="-128"/>
+            </a:endParaRPr>
+          </a:p>
+          <a:p>
+            <a:endParaRPr lang="en-US" altLang="ja-JP" sz="2400" dirty="0">
+              <a:latin typeface="HGS創英角ｺﾞｼｯｸUB" panose="020B0900000000000000" pitchFamily="50" charset="-128"/>
+              <a:ea typeface="HGS創英角ｺﾞｼｯｸUB" panose="020B0900000000000000" pitchFamily="50" charset="-128"/>
+            </a:endParaRPr>
+          </a:p>
+          <a:p>
+            <a:r>
+              <a:rPr lang="ja-JP" altLang="en-US" sz="2400" dirty="0">
+                <a:latin typeface="HGS創英角ｺﾞｼｯｸUB" panose="020B0900000000000000" pitchFamily="50" charset="-128"/>
+                <a:ea typeface="HGS創英角ｺﾞｼｯｸUB" panose="020B0900000000000000" pitchFamily="50" charset="-128"/>
+              </a:rPr>
+              <a:t>１限目</a:t>
+            </a:r>
+            <a:endParaRPr lang="en-US" altLang="ja-JP" sz="2400" dirty="0">
+              <a:latin typeface="HGS創英角ｺﾞｼｯｸUB" panose="020B0900000000000000" pitchFamily="50" charset="-128"/>
+              <a:ea typeface="HGS創英角ｺﾞｼｯｸUB" panose="020B0900000000000000" pitchFamily="50" charset="-128"/>
+            </a:endParaRPr>
+          </a:p>
+          <a:p>
+            <a:r>
+              <a:rPr lang="ja-JP" altLang="en-US" sz="2400" dirty="0">
+                <a:latin typeface="HGS創英角ｺﾞｼｯｸUB" panose="020B0900000000000000" pitchFamily="50" charset="-128"/>
+                <a:ea typeface="HGS創英角ｺﾞｼｯｸUB" panose="020B0900000000000000" pitchFamily="50" charset="-128"/>
+              </a:rPr>
+              <a:t>　楽しい感じでグループワーク</a:t>
+            </a:r>
+            <a:endParaRPr lang="en-US" altLang="ja-JP" sz="2400" dirty="0">
+              <a:latin typeface="HGS創英角ｺﾞｼｯｸUB" panose="020B0900000000000000" pitchFamily="50" charset="-128"/>
+              <a:ea typeface="HGS創英角ｺﾞｼｯｸUB" panose="020B0900000000000000" pitchFamily="50" charset="-128"/>
+            </a:endParaRPr>
+          </a:p>
+          <a:p>
+            <a:r>
+              <a:rPr lang="ja-JP" altLang="en-US" sz="2400" dirty="0">
+                <a:latin typeface="HGS創英角ｺﾞｼｯｸUB" panose="020B0900000000000000" pitchFamily="50" charset="-128"/>
+                <a:ea typeface="HGS創英角ｺﾞｼｯｸUB" panose="020B0900000000000000" pitchFamily="50" charset="-128"/>
+              </a:rPr>
+              <a:t>　みんなで１つのテーマについて議論しよう</a:t>
+            </a:r>
+            <a:endParaRPr lang="en-US" altLang="ja-JP" sz="2400" dirty="0">
+              <a:latin typeface="HGS創英角ｺﾞｼｯｸUB" panose="020B0900000000000000" pitchFamily="50" charset="-128"/>
+              <a:ea typeface="HGS創英角ｺﾞｼｯｸUB" panose="020B0900000000000000" pitchFamily="50" charset="-128"/>
+            </a:endParaRPr>
+          </a:p>
+          <a:p>
+            <a:r>
+              <a:rPr lang="ja-JP" altLang="en-US" sz="2400" dirty="0">
+                <a:latin typeface="HGS創英角ｺﾞｼｯｸUB" panose="020B0900000000000000" pitchFamily="50" charset="-128"/>
+                <a:ea typeface="HGS創英角ｺﾞｼｯｸUB" panose="020B0900000000000000" pitchFamily="50" charset="-128"/>
+              </a:rPr>
+              <a:t>　</a:t>
+            </a:r>
+            <a:endParaRPr lang="en-US" altLang="ja-JP" sz="2400" dirty="0">
+              <a:latin typeface="HGS創英角ｺﾞｼｯｸUB" panose="020B0900000000000000" pitchFamily="50" charset="-128"/>
+              <a:ea typeface="HGS創英角ｺﾞｼｯｸUB" panose="020B0900000000000000" pitchFamily="50" charset="-128"/>
+            </a:endParaRPr>
+          </a:p>
+          <a:p>
+            <a:r>
+              <a:rPr lang="ja-JP" altLang="en-US" sz="2400" dirty="0">
+                <a:latin typeface="HGS創英角ｺﾞｼｯｸUB" panose="020B0900000000000000" pitchFamily="50" charset="-128"/>
+                <a:ea typeface="HGS創英角ｺﾞｼｯｸUB" panose="020B0900000000000000" pitchFamily="50" charset="-128"/>
+              </a:rPr>
+              <a:t>２限目</a:t>
+            </a:r>
+            <a:endParaRPr lang="en-US" altLang="ja-JP" sz="2400" dirty="0">
+              <a:latin typeface="HGS創英角ｺﾞｼｯｸUB" panose="020B0900000000000000" pitchFamily="50" charset="-128"/>
+              <a:ea typeface="HGS創英角ｺﾞｼｯｸUB" panose="020B0900000000000000" pitchFamily="50" charset="-128"/>
+            </a:endParaRPr>
+          </a:p>
+          <a:p>
+            <a:r>
+              <a:rPr lang="ja-JP" altLang="en-US" sz="2400" dirty="0">
+                <a:latin typeface="HGS創英角ｺﾞｼｯｸUB" panose="020B0900000000000000" pitchFamily="50" charset="-128"/>
+                <a:ea typeface="HGS創英角ｺﾞｼｯｸUB" panose="020B0900000000000000" pitchFamily="50" charset="-128"/>
+              </a:rPr>
+              <a:t>　大好きなものプレゼン選手権　資料作成</a:t>
+            </a:r>
+            <a:endParaRPr lang="en-US" altLang="ja-JP" sz="2400" dirty="0">
+              <a:latin typeface="HGS創英角ｺﾞｼｯｸUB" panose="020B0900000000000000" pitchFamily="50" charset="-128"/>
+              <a:ea typeface="HGS創英角ｺﾞｼｯｸUB" panose="020B0900000000000000" pitchFamily="50" charset="-128"/>
+            </a:endParaRPr>
+          </a:p>
+          <a:p>
+            <a:endParaRPr lang="en-US" altLang="ja-JP" sz="2400" dirty="0">
+              <a:latin typeface="HGS創英角ｺﾞｼｯｸUB" panose="020B0900000000000000" pitchFamily="50" charset="-128"/>
+              <a:ea typeface="HGS創英角ｺﾞｼｯｸUB" panose="020B0900000000000000" pitchFamily="50" charset="-128"/>
+            </a:endParaRPr>
+          </a:p>
+          <a:p>
+            <a:r>
+              <a:rPr lang="ja-JP" altLang="en-US" sz="2400" dirty="0">
+                <a:latin typeface="HGS創英角ｺﾞｼｯｸUB" panose="020B0900000000000000" pitchFamily="50" charset="-128"/>
+                <a:ea typeface="HGS創英角ｺﾞｼｯｸUB" panose="020B0900000000000000" pitchFamily="50" charset="-128"/>
+              </a:rPr>
+              <a:t>３限目</a:t>
+            </a:r>
+            <a:endParaRPr lang="en-US" altLang="ja-JP" sz="2400" dirty="0">
+              <a:latin typeface="HGS創英角ｺﾞｼｯｸUB" panose="020B0900000000000000" pitchFamily="50" charset="-128"/>
+              <a:ea typeface="HGS創英角ｺﾞｼｯｸUB" panose="020B0900000000000000" pitchFamily="50" charset="-128"/>
+            </a:endParaRPr>
+          </a:p>
+          <a:p>
+            <a:r>
+              <a:rPr lang="ja-JP" altLang="en-US" sz="2400" dirty="0">
+                <a:latin typeface="HGS創英角ｺﾞｼｯｸUB" panose="020B0900000000000000" pitchFamily="50" charset="-128"/>
+                <a:ea typeface="HGS創英角ｺﾞｼｯｸUB" panose="020B0900000000000000" pitchFamily="50" charset="-128"/>
+              </a:rPr>
+              <a:t>　大好きなものプレゼン選手権　発表会</a:t>
+            </a:r>
+            <a:endParaRPr lang="en-US" altLang="ja-JP" sz="2400" dirty="0">
+              <a:latin typeface="HGS創英角ｺﾞｼｯｸUB" panose="020B0900000000000000" pitchFamily="50" charset="-128"/>
+              <a:ea typeface="HGS創英角ｺﾞｼｯｸUB" panose="020B0900000000000000" pitchFamily="50" charset="-128"/>
+            </a:endParaRPr>
+          </a:p>
+          <a:p>
+            <a:endParaRPr lang="en-US" altLang="ja-JP" sz="2400" dirty="0">
+              <a:latin typeface="HGS創英角ｺﾞｼｯｸUB" panose="020B0900000000000000" pitchFamily="50" charset="-128"/>
+              <a:ea typeface="HGS創英角ｺﾞｼｯｸUB" panose="020B0900000000000000" pitchFamily="50" charset="-128"/>
+            </a:endParaRPr>
+          </a:p>
+          <a:p>
+            <a:r>
+              <a:rPr lang="ja-JP" altLang="en-US" sz="2400" dirty="0">
+                <a:latin typeface="HGS創英角ｺﾞｼｯｸUB" panose="020B0900000000000000" pitchFamily="50" charset="-128"/>
+                <a:ea typeface="HGS創英角ｺﾞｼｯｸUB" panose="020B0900000000000000" pitchFamily="50" charset="-128"/>
+              </a:rPr>
+              <a:t>４限目</a:t>
+            </a:r>
+            <a:endParaRPr lang="en-US" altLang="ja-JP" sz="2400" dirty="0">
+              <a:latin typeface="HGS創英角ｺﾞｼｯｸUB" panose="020B0900000000000000" pitchFamily="50" charset="-128"/>
+              <a:ea typeface="HGS創英角ｺﾞｼｯｸUB" panose="020B0900000000000000" pitchFamily="50" charset="-128"/>
+            </a:endParaRPr>
+          </a:p>
+          <a:p>
+            <a:r>
+              <a:rPr lang="ja-JP" altLang="en-US" sz="2400" dirty="0">
+                <a:latin typeface="HGS創英角ｺﾞｼｯｸUB" panose="020B0900000000000000" pitchFamily="50" charset="-128"/>
+                <a:ea typeface="HGS創英角ｺﾞｼｯｸUB" panose="020B0900000000000000" pitchFamily="50" charset="-128"/>
+              </a:rPr>
+              <a:t>　企業講演　㈱サイバーコネクトツー</a:t>
+            </a:r>
+            <a:endParaRPr lang="en-US" altLang="ja-JP" sz="2400" dirty="0">
+              <a:latin typeface="HGS創英角ｺﾞｼｯｸUB" panose="020B0900000000000000" pitchFamily="50" charset="-128"/>
+              <a:ea typeface="HGS創英角ｺﾞｼｯｸUB" panose="020B0900000000000000" pitchFamily="50" charset="-128"/>
+            </a:endParaRPr>
+          </a:p>
+        </p:txBody>
+      </p:sp>
+    </p:spTree>
+    <p:extLst>
+      <p:ext uri="{BB962C8B-B14F-4D97-AF65-F5344CB8AC3E}">
+        <p14:creationId xmlns:p14="http://schemas.microsoft.com/office/powerpoint/2010/main" val="3144968622"/>
+      </p:ext>
+    </p:extLst>
+  </p:cSld>
+  <p:clrMapOvr>
+    <a:masterClrMapping/>
+  </p:clrMapOvr>
+</p:sld>
+</file>
+
+<file path=ppt/slides/slide32.xml><?xml version="1.0" encoding="utf-8"?>
+<p:sld xmlns:a="http://schemas.openxmlformats.org/drawingml/2006/main" xmlns:r="http://schemas.openxmlformats.org/officeDocument/2006/relationships" xmlns:p="http://schemas.openxmlformats.org/presentationml/2006/main">
+  <p:cSld>
+    <p:spTree>
+      <p:nvGrpSpPr>
+        <p:cNvPr id="1" name=""/>
+        <p:cNvGrpSpPr/>
+        <p:nvPr/>
+      </p:nvGrpSpPr>
+      <p:grpSpPr>
+        <a:xfrm>
+          <a:off x="0" y="0"/>
+          <a:ext cx="0" cy="0"/>
+          <a:chOff x="0" y="0"/>
+          <a:chExt cx="0" cy="0"/>
+        </a:xfrm>
+      </p:grpSpPr>
+      <p:sp>
+        <p:nvSpPr>
+          <p:cNvPr id="4" name="テキスト ボックス 3">
+            <a:extLst>
+              <a:ext uri="{FF2B5EF4-FFF2-40B4-BE49-F238E27FC236}">
+                <a16:creationId xmlns:a16="http://schemas.microsoft.com/office/drawing/2014/main" id="{5A13BF46-B8C5-48AA-8308-C9ECFF431A18}"/>
+              </a:ext>
+            </a:extLst>
+          </p:cNvPr>
+          <p:cNvSpPr txBox="1"/>
+          <p:nvPr/>
+        </p:nvSpPr>
+        <p:spPr>
+          <a:xfrm>
+            <a:off x="567542" y="491954"/>
+            <a:ext cx="1832553" cy="584775"/>
+          </a:xfrm>
+          <a:prstGeom prst="rect">
+            <a:avLst/>
+          </a:prstGeom>
+          <a:noFill/>
+        </p:spPr>
+        <p:txBody>
+          <a:bodyPr wrap="none" rtlCol="0">
+            <a:spAutoFit/>
+          </a:bodyPr>
+          <a:lstStyle/>
+          <a:p>
+            <a:r>
+              <a:rPr lang="ja-JP" altLang="en-US" sz="3200" b="1" u="sng" dirty="0">
+                <a:latin typeface="HGS創英角ｺﾞｼｯｸUB" panose="020B0900000000000000" pitchFamily="50" charset="-128"/>
+                <a:ea typeface="HGS創英角ｺﾞｼｯｸUB" panose="020B0900000000000000" pitchFamily="50" charset="-128"/>
+              </a:rPr>
+              <a:t>さいごに</a:t>
+            </a:r>
+            <a:endParaRPr kumimoji="1" lang="en-US" altLang="ja-JP" sz="3200" b="1" u="sng" dirty="0">
+              <a:latin typeface="HGS創英角ｺﾞｼｯｸUB" panose="020B0900000000000000" pitchFamily="50" charset="-128"/>
+              <a:ea typeface="HGS創英角ｺﾞｼｯｸUB" panose="020B0900000000000000" pitchFamily="50" charset="-128"/>
+            </a:endParaRPr>
+          </a:p>
+        </p:txBody>
+      </p:sp>
+      <p:sp>
+        <p:nvSpPr>
+          <p:cNvPr id="6" name="テキスト ボックス 5">
+            <a:extLst>
+              <a:ext uri="{FF2B5EF4-FFF2-40B4-BE49-F238E27FC236}">
+                <a16:creationId xmlns:a16="http://schemas.microsoft.com/office/drawing/2014/main" id="{55830AD6-028B-4C4E-80BF-B70DFC1C3A46}"/>
+              </a:ext>
+            </a:extLst>
+          </p:cNvPr>
+          <p:cNvSpPr txBox="1"/>
+          <p:nvPr/>
+        </p:nvSpPr>
+        <p:spPr>
+          <a:xfrm>
+            <a:off x="567542" y="1216429"/>
+            <a:ext cx="11264622" cy="2677656"/>
+          </a:xfrm>
+          <a:prstGeom prst="rect">
+            <a:avLst/>
+          </a:prstGeom>
+          <a:noFill/>
+        </p:spPr>
+        <p:txBody>
+          <a:bodyPr wrap="none" rtlCol="0">
+            <a:spAutoFit/>
+          </a:bodyPr>
+          <a:lstStyle/>
+          <a:p>
+            <a:r>
+              <a:rPr lang="ja-JP" altLang="en-US" sz="2400" dirty="0">
+                <a:latin typeface="HGS創英角ｺﾞｼｯｸUB" panose="020B0900000000000000" pitchFamily="50" charset="-128"/>
+                <a:ea typeface="HGS創英角ｺﾞｼｯｸUB" panose="020B0900000000000000" pitchFamily="50" charset="-128"/>
+              </a:rPr>
+              <a:t>明日の</a:t>
+            </a:r>
+            <a:r>
+              <a:rPr lang="en-US" altLang="ja-JP" sz="2400" dirty="0">
+                <a:latin typeface="HGS創英角ｺﾞｼｯｸUB" panose="020B0900000000000000" pitchFamily="50" charset="-128"/>
+                <a:ea typeface="HGS創英角ｺﾞｼｯｸUB" panose="020B0900000000000000" pitchFamily="50" charset="-128"/>
+              </a:rPr>
+              <a:t>15</a:t>
+            </a:r>
+            <a:r>
+              <a:rPr lang="ja-JP" altLang="en-US" sz="2400" dirty="0">
+                <a:latin typeface="HGS創英角ｺﾞｼｯｸUB" panose="020B0900000000000000" pitchFamily="50" charset="-128"/>
+                <a:ea typeface="HGS創英角ｺﾞｼｯｸUB" panose="020B0900000000000000" pitchFamily="50" charset="-128"/>
+              </a:rPr>
+              <a:t>：</a:t>
+            </a:r>
+            <a:r>
+              <a:rPr lang="en-US" altLang="ja-JP" sz="2400" dirty="0">
+                <a:latin typeface="HGS創英角ｺﾞｼｯｸUB" panose="020B0900000000000000" pitchFamily="50" charset="-128"/>
+                <a:ea typeface="HGS創英角ｺﾞｼｯｸUB" panose="020B0900000000000000" pitchFamily="50" charset="-128"/>
+              </a:rPr>
+              <a:t>30</a:t>
+            </a:r>
+            <a:r>
+              <a:rPr lang="ja-JP" altLang="en-US" sz="2400" dirty="0">
+                <a:latin typeface="HGS創英角ｺﾞｼｯｸUB" panose="020B0900000000000000" pitchFamily="50" charset="-128"/>
+                <a:ea typeface="HGS創英角ｺﾞｼｯｸUB" panose="020B0900000000000000" pitchFamily="50" charset="-128"/>
+              </a:rPr>
+              <a:t>より、</a:t>
+            </a:r>
+            <a:endParaRPr lang="en-US" altLang="ja-JP" sz="2400" dirty="0">
+              <a:latin typeface="HGS創英角ｺﾞｼｯｸUB" panose="020B0900000000000000" pitchFamily="50" charset="-128"/>
+              <a:ea typeface="HGS創英角ｺﾞｼｯｸUB" panose="020B0900000000000000" pitchFamily="50" charset="-128"/>
+            </a:endParaRPr>
+          </a:p>
+          <a:p>
+            <a:r>
+              <a:rPr lang="ja-JP" altLang="en-US" sz="2400" dirty="0">
+                <a:latin typeface="HGS創英角ｺﾞｼｯｸUB" panose="020B0900000000000000" pitchFamily="50" charset="-128"/>
+                <a:ea typeface="HGS創英角ｺﾞｼｯｸUB" panose="020B0900000000000000" pitchFamily="50" charset="-128"/>
+              </a:rPr>
+              <a:t>福岡のゲーム会社である㈱サイバーコネクトツー様の企業講演があります。</a:t>
+            </a:r>
+            <a:endParaRPr lang="en-US" altLang="ja-JP" sz="2400" dirty="0">
+              <a:latin typeface="HGS創英角ｺﾞｼｯｸUB" panose="020B0900000000000000" pitchFamily="50" charset="-128"/>
+              <a:ea typeface="HGS創英角ｺﾞｼｯｸUB" panose="020B0900000000000000" pitchFamily="50" charset="-128"/>
+            </a:endParaRPr>
+          </a:p>
+          <a:p>
+            <a:r>
+              <a:rPr lang="ja-JP" altLang="en-US" sz="2400" dirty="0">
+                <a:latin typeface="HGS創英角ｺﾞｼｯｸUB" panose="020B0900000000000000" pitchFamily="50" charset="-128"/>
+                <a:ea typeface="HGS創英角ｺﾞｼｯｸUB" panose="020B0900000000000000" pitchFamily="50" charset="-128"/>
+              </a:rPr>
+              <a:t>このように企業から直接講演をすることが今後も多くありますので、</a:t>
+            </a:r>
+            <a:endParaRPr lang="en-US" altLang="ja-JP" sz="2400" dirty="0">
+              <a:latin typeface="HGS創英角ｺﾞｼｯｸUB" panose="020B0900000000000000" pitchFamily="50" charset="-128"/>
+              <a:ea typeface="HGS創英角ｺﾞｼｯｸUB" panose="020B0900000000000000" pitchFamily="50" charset="-128"/>
+            </a:endParaRPr>
+          </a:p>
+          <a:p>
+            <a:r>
+              <a:rPr lang="ja-JP" altLang="en-US" sz="2400" dirty="0">
+                <a:latin typeface="HGS創英角ｺﾞｼｯｸUB" panose="020B0900000000000000" pitchFamily="50" charset="-128"/>
+                <a:ea typeface="HGS創英角ｺﾞｼｯｸUB" panose="020B0900000000000000" pitchFamily="50" charset="-128"/>
+              </a:rPr>
+              <a:t>積極的に参加し、モチベーションとしましょう。</a:t>
+            </a:r>
+            <a:endParaRPr lang="en-US" altLang="ja-JP" sz="2400" dirty="0">
+              <a:latin typeface="HGS創英角ｺﾞｼｯｸUB" panose="020B0900000000000000" pitchFamily="50" charset="-128"/>
+              <a:ea typeface="HGS創英角ｺﾞｼｯｸUB" panose="020B0900000000000000" pitchFamily="50" charset="-128"/>
+            </a:endParaRPr>
+          </a:p>
+          <a:p>
+            <a:endParaRPr lang="en-US" altLang="ja-JP" sz="2400" dirty="0">
+              <a:latin typeface="HGS創英角ｺﾞｼｯｸUB" panose="020B0900000000000000" pitchFamily="50" charset="-128"/>
+              <a:ea typeface="HGS創英角ｺﾞｼｯｸUB" panose="020B0900000000000000" pitchFamily="50" charset="-128"/>
+            </a:endParaRPr>
+          </a:p>
+          <a:p>
+            <a:r>
+              <a:rPr lang="ja-JP" altLang="en-US" sz="2400" dirty="0">
+                <a:latin typeface="HGS創英角ｺﾞｼｯｸUB" panose="020B0900000000000000" pitchFamily="50" charset="-128"/>
+                <a:ea typeface="HGS創英角ｺﾞｼｯｸUB" panose="020B0900000000000000" pitchFamily="50" charset="-128"/>
+              </a:rPr>
+              <a:t>また、企業講演に参加する前日には、</a:t>
+            </a:r>
+            <a:endParaRPr lang="en-US" altLang="ja-JP" sz="2400" dirty="0">
+              <a:latin typeface="HGS創英角ｺﾞｼｯｸUB" panose="020B0900000000000000" pitchFamily="50" charset="-128"/>
+              <a:ea typeface="HGS創英角ｺﾞｼｯｸUB" panose="020B0900000000000000" pitchFamily="50" charset="-128"/>
+            </a:endParaRPr>
+          </a:p>
+          <a:p>
+            <a:r>
+              <a:rPr lang="ja-JP" altLang="en-US" sz="2400" dirty="0">
+                <a:latin typeface="HGS創英角ｺﾞｼｯｸUB" panose="020B0900000000000000" pitchFamily="50" charset="-128"/>
+                <a:ea typeface="HGS創英角ｺﾞｼｯｸUB" panose="020B0900000000000000" pitchFamily="50" charset="-128"/>
+              </a:rPr>
+              <a:t>企業のホームページなどで、どのような企業なのかを、必ず下調べしましょう。</a:t>
+            </a:r>
+            <a:endParaRPr lang="en-US" altLang="ja-JP" sz="2400" dirty="0">
+              <a:latin typeface="HGS創英角ｺﾞｼｯｸUB" panose="020B0900000000000000" pitchFamily="50" charset="-128"/>
+              <a:ea typeface="HGS創英角ｺﾞｼｯｸUB" panose="020B0900000000000000" pitchFamily="50" charset="-128"/>
+            </a:endParaRPr>
+          </a:p>
+        </p:txBody>
+      </p:sp>
+    </p:spTree>
+    <p:extLst>
+      <p:ext uri="{BB962C8B-B14F-4D97-AF65-F5344CB8AC3E}">
+        <p14:creationId xmlns:p14="http://schemas.microsoft.com/office/powerpoint/2010/main" val="3042183115"/>
       </p:ext>
     </p:extLst>
   </p:cSld>

--- a/その他/新入生ガイダンス/00_はじめに.pptx
+++ b/その他/新入生ガイダンス/00_はじめに.pptx
@@ -28,15 +28,15 @@
     <p:sldId id="277" r:id="rId22"/>
     <p:sldId id="278" r:id="rId23"/>
     <p:sldId id="279" r:id="rId24"/>
-    <p:sldId id="280" r:id="rId25"/>
-    <p:sldId id="281" r:id="rId26"/>
-    <p:sldId id="284" r:id="rId27"/>
-    <p:sldId id="285" r:id="rId28"/>
-    <p:sldId id="286" r:id="rId29"/>
-    <p:sldId id="287" r:id="rId30"/>
-    <p:sldId id="288" r:id="rId31"/>
-    <p:sldId id="283" r:id="rId32"/>
-    <p:sldId id="282" r:id="rId33"/>
+    <p:sldId id="281" r:id="rId25"/>
+    <p:sldId id="284" r:id="rId26"/>
+    <p:sldId id="285" r:id="rId27"/>
+    <p:sldId id="286" r:id="rId28"/>
+    <p:sldId id="287" r:id="rId29"/>
+    <p:sldId id="288" r:id="rId30"/>
+    <p:sldId id="283" r:id="rId31"/>
+    <p:sldId id="282" r:id="rId32"/>
+    <p:sldId id="280" r:id="rId33"/>
   </p:sldIdLst>
   <p:sldSz cx="12192000" cy="6858000"/>
   <p:notesSz cx="6858000" cy="9144000"/>
@@ -5865,7 +5865,7 @@
                 <a:latin typeface="HGS創英角ｺﾞｼｯｸUB" panose="020B0900000000000000" pitchFamily="50" charset="-128"/>
                 <a:ea typeface="HGS創英角ｺﾞｼｯｸUB" panose="020B0900000000000000" pitchFamily="50" charset="-128"/>
               </a:rPr>
-              <a:t>Micro Soft</a:t>
+              <a:t>Microsoft</a:t>
             </a:r>
             <a:r>
               <a:rPr lang="ja-JP" altLang="en-US" sz="2400" dirty="0">
@@ -7828,7 +7828,7 @@
         <p:spPr>
           <a:xfrm>
             <a:off x="567542" y="491954"/>
-            <a:ext cx="3068469" cy="584775"/>
+            <a:ext cx="1832553" cy="584775"/>
           </a:xfrm>
           <a:prstGeom prst="rect">
             <a:avLst/>
@@ -7846,7 +7846,7 @@
                 <a:latin typeface="HGS創英角ｺﾞｼｯｸUB" panose="020B0900000000000000" pitchFamily="50" charset="-128"/>
                 <a:ea typeface="HGS創英角ｺﾞｼｯｸUB" panose="020B0900000000000000" pitchFamily="50" charset="-128"/>
               </a:rPr>
-              <a:t>タイピング練習</a:t>
+              <a:t>さいごに</a:t>
             </a:r>
             <a:endParaRPr kumimoji="1" lang="en-US" altLang="ja-JP" sz="3200" b="1" u="sng" dirty="0">
               <a:latin typeface="HGS創英角ｺﾞｼｯｸUB" panose="020B0900000000000000" pitchFamily="50" charset="-128"/>
@@ -7870,7 +7870,7 @@
         <p:spPr>
           <a:xfrm>
             <a:off x="567542" y="1216429"/>
-            <a:ext cx="9417963" cy="2308324"/>
+            <a:ext cx="9417963" cy="3416320"/>
           </a:xfrm>
           <a:prstGeom prst="rect">
             <a:avLst/>
@@ -7888,33 +7888,20 @@
                 <a:latin typeface="HGS創英角ｺﾞｼｯｸUB" panose="020B0900000000000000" pitchFamily="50" charset="-128"/>
                 <a:ea typeface="HGS創英角ｺﾞｼｯｸUB" panose="020B0900000000000000" pitchFamily="50" charset="-128"/>
               </a:rPr>
-              <a:t>それでは残った時間はタイピング練習をしましょう。</a:t>
-            </a:r>
-            <a:endParaRPr lang="en-US" altLang="ja-JP" sz="2400" dirty="0">
-              <a:latin typeface="HGS創英角ｺﾞｼｯｸUB" panose="020B0900000000000000" pitchFamily="50" charset="-128"/>
-              <a:ea typeface="HGS創英角ｺﾞｼｯｸUB" panose="020B0900000000000000" pitchFamily="50" charset="-128"/>
-            </a:endParaRPr>
-          </a:p>
-          <a:p>
-            <a:r>
-              <a:rPr lang="ja-JP" altLang="en-US" sz="2400" dirty="0">
-                <a:latin typeface="HGS創英角ｺﾞｼｯｸUB" panose="020B0900000000000000" pitchFamily="50" charset="-128"/>
-                <a:ea typeface="HGS創英角ｺﾞｼｯｸUB" panose="020B0900000000000000" pitchFamily="50" charset="-128"/>
-              </a:rPr>
-              <a:t>タイピングが速いほど授業に余裕が生まれ、習熟度も上がります。</a:t>
-            </a:r>
-            <a:endParaRPr lang="en-US" altLang="ja-JP" sz="2400" dirty="0">
-              <a:latin typeface="HGS創英角ｺﾞｼｯｸUB" panose="020B0900000000000000" pitchFamily="50" charset="-128"/>
-              <a:ea typeface="HGS創英角ｺﾞｼｯｸUB" panose="020B0900000000000000" pitchFamily="50" charset="-128"/>
-            </a:endParaRPr>
-          </a:p>
-          <a:p>
-            <a:r>
-              <a:rPr lang="ja-JP" altLang="en-US" sz="2400" dirty="0">
-                <a:latin typeface="HGS創英角ｺﾞｼｯｸUB" panose="020B0900000000000000" pitchFamily="50" charset="-128"/>
-                <a:ea typeface="HGS創英角ｺﾞｼｯｸUB" panose="020B0900000000000000" pitchFamily="50" charset="-128"/>
-              </a:rPr>
-              <a:t>ぜひ、お家でも練習してください。</a:t>
+              <a:t>３年間でゲーム会社に就職することは、非常に難易度が高いです。</a:t>
+            </a:r>
+            <a:endParaRPr lang="en-US" altLang="ja-JP" sz="2400" dirty="0">
+              <a:latin typeface="HGS創英角ｺﾞｼｯｸUB" panose="020B0900000000000000" pitchFamily="50" charset="-128"/>
+              <a:ea typeface="HGS創英角ｺﾞｼｯｸUB" panose="020B0900000000000000" pitchFamily="50" charset="-128"/>
+            </a:endParaRPr>
+          </a:p>
+          <a:p>
+            <a:r>
+              <a:rPr lang="ja-JP" altLang="en-US" sz="2400" dirty="0">
+                <a:latin typeface="HGS創英角ｺﾞｼｯｸUB" panose="020B0900000000000000" pitchFamily="50" charset="-128"/>
+                <a:ea typeface="HGS創英角ｺﾞｼｯｸUB" panose="020B0900000000000000" pitchFamily="50" charset="-128"/>
+              </a:rPr>
+              <a:t>以下のことを心がけて３年間過ごしましょう。</a:t>
             </a:r>
             <a:endParaRPr lang="en-US" altLang="ja-JP" sz="2400" dirty="0">
               <a:latin typeface="HGS創英角ｺﾞｼｯｸUB" panose="020B0900000000000000" pitchFamily="50" charset="-128"/>
@@ -7936,7 +7923,7 @@
                 <a:latin typeface="HGS創英角ｺﾞｼｯｸUB" panose="020B0900000000000000" pitchFamily="50" charset="-128"/>
                 <a:ea typeface="HGS創英角ｺﾞｼｯｸUB" panose="020B0900000000000000" pitchFamily="50" charset="-128"/>
               </a:rPr>
-              <a:t>■タイピング練習ゲーム寿司打</a:t>
+              <a:t>■心がけてほしいこと</a:t>
             </a:r>
             <a:endParaRPr lang="en-US" altLang="ja-JP" sz="2400" dirty="0">
               <a:solidFill>
@@ -7948,19 +7935,75 @@
           </a:p>
           <a:p>
             <a:r>
-              <a:rPr lang="en-US" altLang="ja-JP" sz="2400" dirty="0">
-                <a:latin typeface="HGS創英角ｺﾞｼｯｸUB" panose="020B0900000000000000" pitchFamily="50" charset="-128"/>
-                <a:ea typeface="HGS創英角ｺﾞｼｯｸUB" panose="020B0900000000000000" pitchFamily="50" charset="-128"/>
-              </a:rPr>
-              <a:t>https://sushida.net/</a:t>
-            </a:r>
+              <a:rPr lang="ja-JP" altLang="en-US" sz="2400" dirty="0">
+                <a:latin typeface="HGS創英角ｺﾞｼｯｸUB" panose="020B0900000000000000" pitchFamily="50" charset="-128"/>
+                <a:ea typeface="HGS創英角ｺﾞｼｯｸUB" panose="020B0900000000000000" pitchFamily="50" charset="-128"/>
+              </a:rPr>
+              <a:t>・休まない</a:t>
+            </a:r>
+            <a:endParaRPr lang="en-US" altLang="ja-JP" sz="2400" dirty="0">
+              <a:latin typeface="HGS創英角ｺﾞｼｯｸUB" panose="020B0900000000000000" pitchFamily="50" charset="-128"/>
+              <a:ea typeface="HGS創英角ｺﾞｼｯｸUB" panose="020B0900000000000000" pitchFamily="50" charset="-128"/>
+            </a:endParaRPr>
+          </a:p>
+          <a:p>
+            <a:r>
+              <a:rPr lang="ja-JP" altLang="en-US" sz="2400" dirty="0">
+                <a:latin typeface="HGS創英角ｺﾞｼｯｸUB" panose="020B0900000000000000" pitchFamily="50" charset="-128"/>
+                <a:ea typeface="HGS創英角ｺﾞｼｯｸUB" panose="020B0900000000000000" pitchFamily="50" charset="-128"/>
+              </a:rPr>
+              <a:t>・友達を作る</a:t>
+            </a:r>
+            <a:endParaRPr lang="en-US" altLang="ja-JP" sz="2400" dirty="0">
+              <a:latin typeface="HGS創英角ｺﾞｼｯｸUB" panose="020B0900000000000000" pitchFamily="50" charset="-128"/>
+              <a:ea typeface="HGS創英角ｺﾞｼｯｸUB" panose="020B0900000000000000" pitchFamily="50" charset="-128"/>
+            </a:endParaRPr>
+          </a:p>
+          <a:p>
+            <a:r>
+              <a:rPr lang="ja-JP" altLang="en-US" sz="2400" dirty="0">
+                <a:latin typeface="HGS創英角ｺﾞｼｯｸUB" panose="020B0900000000000000" pitchFamily="50" charset="-128"/>
+                <a:ea typeface="HGS創英角ｺﾞｼｯｸUB" panose="020B0900000000000000" pitchFamily="50" charset="-128"/>
+              </a:rPr>
+              <a:t>・毎日残る</a:t>
+            </a:r>
+            <a:endParaRPr lang="en-US" altLang="ja-JP" sz="2400" dirty="0">
+              <a:latin typeface="HGS創英角ｺﾞｼｯｸUB" panose="020B0900000000000000" pitchFamily="50" charset="-128"/>
+              <a:ea typeface="HGS創英角ｺﾞｼｯｸUB" panose="020B0900000000000000" pitchFamily="50" charset="-128"/>
+            </a:endParaRPr>
+          </a:p>
+          <a:p>
+            <a:r>
+              <a:rPr lang="ja-JP" altLang="en-US" sz="2400" dirty="0">
+                <a:latin typeface="HGS創英角ｺﾞｼｯｸUB" panose="020B0900000000000000" pitchFamily="50" charset="-128"/>
+                <a:ea typeface="HGS創英角ｺﾞｼｯｸUB" panose="020B0900000000000000" pitchFamily="50" charset="-128"/>
+              </a:rPr>
+              <a:t>・イベントに参加する</a:t>
+            </a:r>
+            <a:endParaRPr lang="en-US" altLang="ja-JP" sz="2400" dirty="0">
+              <a:latin typeface="HGS創英角ｺﾞｼｯｸUB" panose="020B0900000000000000" pitchFamily="50" charset="-128"/>
+              <a:ea typeface="HGS創英角ｺﾞｼｯｸUB" panose="020B0900000000000000" pitchFamily="50" charset="-128"/>
+            </a:endParaRPr>
+          </a:p>
+          <a:p>
+            <a:r>
+              <a:rPr lang="ja-JP" altLang="en-US" sz="2400" dirty="0">
+                <a:latin typeface="HGS創英角ｺﾞｼｯｸUB" panose="020B0900000000000000" pitchFamily="50" charset="-128"/>
+                <a:ea typeface="HGS創英角ｺﾞｼｯｸUB" panose="020B0900000000000000" pitchFamily="50" charset="-128"/>
+              </a:rPr>
+              <a:t>・就職活動時期</a:t>
+            </a:r>
+            <a:endParaRPr lang="en-US" altLang="ja-JP" sz="2400" dirty="0">
+              <a:latin typeface="HGS創英角ｺﾞｼｯｸUB" panose="020B0900000000000000" pitchFamily="50" charset="-128"/>
+              <a:ea typeface="HGS創英角ｺﾞｼｯｸUB" panose="020B0900000000000000" pitchFamily="50" charset="-128"/>
+            </a:endParaRPr>
           </a:p>
         </p:txBody>
       </p:sp>
     </p:spTree>
     <p:extLst>
       <p:ext uri="{BB962C8B-B14F-4D97-AF65-F5344CB8AC3E}">
-        <p14:creationId xmlns:p14="http://schemas.microsoft.com/office/powerpoint/2010/main" val="2792684129"/>
+        <p14:creationId xmlns:p14="http://schemas.microsoft.com/office/powerpoint/2010/main" val="646173412"/>
       </p:ext>
     </p:extLst>
   </p:cSld>
@@ -8002,7 +8045,7 @@
         <p:spPr>
           <a:xfrm>
             <a:off x="567542" y="491954"/>
-            <a:ext cx="1832553" cy="584775"/>
+            <a:ext cx="2656496" cy="584775"/>
           </a:xfrm>
           <a:prstGeom prst="rect">
             <a:avLst/>
@@ -8020,7 +8063,7 @@
                 <a:latin typeface="HGS創英角ｺﾞｼｯｸUB" panose="020B0900000000000000" pitchFamily="50" charset="-128"/>
                 <a:ea typeface="HGS創英角ｺﾞｼｯｸUB" panose="020B0900000000000000" pitchFamily="50" charset="-128"/>
               </a:rPr>
-              <a:t>さいごに</a:t>
+              <a:t>休まないこと</a:t>
             </a:r>
             <a:endParaRPr kumimoji="1" lang="en-US" altLang="ja-JP" sz="3200" b="1" u="sng" dirty="0">
               <a:latin typeface="HGS創英角ｺﾞｼｯｸUB" panose="020B0900000000000000" pitchFamily="50" charset="-128"/>
@@ -8044,7 +8087,7 @@
         <p:spPr>
           <a:xfrm>
             <a:off x="567542" y="1216429"/>
-            <a:ext cx="9417963" cy="3416320"/>
+            <a:ext cx="7879080" cy="4524315"/>
           </a:xfrm>
           <a:prstGeom prst="rect">
             <a:avLst/>
@@ -8062,20 +8105,52 @@
                 <a:latin typeface="HGS創英角ｺﾞｼｯｸUB" panose="020B0900000000000000" pitchFamily="50" charset="-128"/>
                 <a:ea typeface="HGS創英角ｺﾞｼｯｸUB" panose="020B0900000000000000" pitchFamily="50" charset="-128"/>
               </a:rPr>
-              <a:t>３年間でゲーム会社に就職することは、非常に難易度が高いです。</a:t>
-            </a:r>
-            <a:endParaRPr lang="en-US" altLang="ja-JP" sz="2400" dirty="0">
-              <a:latin typeface="HGS創英角ｺﾞｼｯｸUB" panose="020B0900000000000000" pitchFamily="50" charset="-128"/>
-              <a:ea typeface="HGS創英角ｺﾞｼｯｸUB" panose="020B0900000000000000" pitchFamily="50" charset="-128"/>
-            </a:endParaRPr>
-          </a:p>
-          <a:p>
-            <a:r>
-              <a:rPr lang="ja-JP" altLang="en-US" sz="2400" dirty="0">
-                <a:latin typeface="HGS創英角ｺﾞｼｯｸUB" panose="020B0900000000000000" pitchFamily="50" charset="-128"/>
-                <a:ea typeface="HGS創英角ｺﾞｼｯｸUB" panose="020B0900000000000000" pitchFamily="50" charset="-128"/>
-              </a:rPr>
-              <a:t>これからのことを心がけて、３年間過ごしましょう。</a:t>
+              <a:t>専門学校の授業は、</a:t>
+            </a:r>
+            <a:endParaRPr lang="en-US" altLang="ja-JP" sz="2400" dirty="0">
+              <a:latin typeface="HGS創英角ｺﾞｼｯｸUB" panose="020B0900000000000000" pitchFamily="50" charset="-128"/>
+              <a:ea typeface="HGS創英角ｺﾞｼｯｸUB" panose="020B0900000000000000" pitchFamily="50" charset="-128"/>
+            </a:endParaRPr>
+          </a:p>
+          <a:p>
+            <a:r>
+              <a:rPr lang="ja-JP" altLang="en-US" sz="2400" dirty="0">
+                <a:latin typeface="HGS創英角ｺﾞｼｯｸUB" panose="020B0900000000000000" pitchFamily="50" charset="-128"/>
+                <a:ea typeface="HGS創英角ｺﾞｼｯｸUB" panose="020B0900000000000000" pitchFamily="50" charset="-128"/>
+              </a:rPr>
+              <a:t>短期間に一気にまとめて知識と技術を叩き込みます。</a:t>
+            </a:r>
+            <a:endParaRPr lang="en-US" altLang="ja-JP" sz="2400" dirty="0">
+              <a:latin typeface="HGS創英角ｺﾞｼｯｸUB" panose="020B0900000000000000" pitchFamily="50" charset="-128"/>
+              <a:ea typeface="HGS創英角ｺﾞｼｯｸUB" panose="020B0900000000000000" pitchFamily="50" charset="-128"/>
+            </a:endParaRPr>
+          </a:p>
+          <a:p>
+            <a:endParaRPr lang="en-US" altLang="ja-JP" sz="2400" dirty="0">
+              <a:latin typeface="HGS創英角ｺﾞｼｯｸUB" panose="020B0900000000000000" pitchFamily="50" charset="-128"/>
+              <a:ea typeface="HGS創英角ｺﾞｼｯｸUB" panose="020B0900000000000000" pitchFamily="50" charset="-128"/>
+            </a:endParaRPr>
+          </a:p>
+          <a:p>
+            <a:r>
+              <a:rPr lang="ja-JP" altLang="en-US" sz="2400" dirty="0">
+                <a:latin typeface="HGS創英角ｺﾞｼｯｸUB" panose="020B0900000000000000" pitchFamily="50" charset="-128"/>
+                <a:ea typeface="HGS創英角ｺﾞｼｯｸUB" panose="020B0900000000000000" pitchFamily="50" charset="-128"/>
+              </a:rPr>
+              <a:t>１日休むだけで、すぐに取り残されてしまいますので、</a:t>
+            </a:r>
+            <a:endParaRPr lang="en-US" altLang="ja-JP" sz="2400" dirty="0">
+              <a:latin typeface="HGS創英角ｺﾞｼｯｸUB" panose="020B0900000000000000" pitchFamily="50" charset="-128"/>
+              <a:ea typeface="HGS創英角ｺﾞｼｯｸUB" panose="020B0900000000000000" pitchFamily="50" charset="-128"/>
+            </a:endParaRPr>
+          </a:p>
+          <a:p>
+            <a:r>
+              <a:rPr lang="ja-JP" altLang="en-US" sz="2400" dirty="0">
+                <a:latin typeface="HGS創英角ｺﾞｼｯｸUB" panose="020B0900000000000000" pitchFamily="50" charset="-128"/>
+                <a:ea typeface="HGS創英角ｺﾞｼｯｸUB" panose="020B0900000000000000" pitchFamily="50" charset="-128"/>
+              </a:rPr>
+              <a:t>学校は休まないようにしましょう。</a:t>
             </a:r>
             <a:endParaRPr lang="en-US" altLang="ja-JP" sz="2400" dirty="0">
               <a:latin typeface="HGS創英角ｺﾞｼｯｸUB" panose="020B0900000000000000" pitchFamily="50" charset="-128"/>
@@ -8097,7 +8172,7 @@
                 <a:latin typeface="HGS創英角ｺﾞｼｯｸUB" panose="020B0900000000000000" pitchFamily="50" charset="-128"/>
                 <a:ea typeface="HGS創英角ｺﾞｼｯｸUB" panose="020B0900000000000000" pitchFamily="50" charset="-128"/>
               </a:rPr>
-              <a:t>■心がけてほしいこと</a:t>
+              <a:t>■休む時の例</a:t>
             </a:r>
             <a:endParaRPr lang="en-US" altLang="ja-JP" sz="2400" dirty="0">
               <a:solidFill>
@@ -8113,59 +8188,52 @@
                 <a:latin typeface="HGS創英角ｺﾞｼｯｸUB" panose="020B0900000000000000" pitchFamily="50" charset="-128"/>
                 <a:ea typeface="HGS創英角ｺﾞｼｯｸUB" panose="020B0900000000000000" pitchFamily="50" charset="-128"/>
               </a:rPr>
-              <a:t>・休まない</a:t>
-            </a:r>
-            <a:endParaRPr lang="en-US" altLang="ja-JP" sz="2400" dirty="0">
-              <a:latin typeface="HGS創英角ｺﾞｼｯｸUB" panose="020B0900000000000000" pitchFamily="50" charset="-128"/>
-              <a:ea typeface="HGS創英角ｺﾞｼｯｸUB" panose="020B0900000000000000" pitchFamily="50" charset="-128"/>
-            </a:endParaRPr>
-          </a:p>
-          <a:p>
-            <a:r>
-              <a:rPr lang="ja-JP" altLang="en-US" sz="2400" dirty="0">
-                <a:latin typeface="HGS創英角ｺﾞｼｯｸUB" panose="020B0900000000000000" pitchFamily="50" charset="-128"/>
-                <a:ea typeface="HGS創英角ｺﾞｼｯｸUB" panose="020B0900000000000000" pitchFamily="50" charset="-128"/>
-              </a:rPr>
-              <a:t>・友達を作る</a:t>
-            </a:r>
-            <a:endParaRPr lang="en-US" altLang="ja-JP" sz="2400" dirty="0">
-              <a:latin typeface="HGS創英角ｺﾞｼｯｸUB" panose="020B0900000000000000" pitchFamily="50" charset="-128"/>
-              <a:ea typeface="HGS創英角ｺﾞｼｯｸUB" panose="020B0900000000000000" pitchFamily="50" charset="-128"/>
-            </a:endParaRPr>
-          </a:p>
-          <a:p>
-            <a:r>
-              <a:rPr lang="ja-JP" altLang="en-US" sz="2400" dirty="0">
-                <a:latin typeface="HGS創英角ｺﾞｼｯｸUB" panose="020B0900000000000000" pitchFamily="50" charset="-128"/>
-                <a:ea typeface="HGS創英角ｺﾞｼｯｸUB" panose="020B0900000000000000" pitchFamily="50" charset="-128"/>
-              </a:rPr>
-              <a:t>・毎日残る</a:t>
-            </a:r>
-            <a:endParaRPr lang="en-US" altLang="ja-JP" sz="2400" dirty="0">
-              <a:latin typeface="HGS創英角ｺﾞｼｯｸUB" panose="020B0900000000000000" pitchFamily="50" charset="-128"/>
-              <a:ea typeface="HGS創英角ｺﾞｼｯｸUB" panose="020B0900000000000000" pitchFamily="50" charset="-128"/>
-            </a:endParaRPr>
-          </a:p>
-          <a:p>
-            <a:r>
-              <a:rPr lang="ja-JP" altLang="en-US" sz="2400" dirty="0">
-                <a:latin typeface="HGS創英角ｺﾞｼｯｸUB" panose="020B0900000000000000" pitchFamily="50" charset="-128"/>
-                <a:ea typeface="HGS創英角ｺﾞｼｯｸUB" panose="020B0900000000000000" pitchFamily="50" charset="-128"/>
-              </a:rPr>
-              <a:t>・イベントに参加する</a:t>
-            </a:r>
-            <a:endParaRPr lang="en-US" altLang="ja-JP" sz="2400" dirty="0">
-              <a:latin typeface="HGS創英角ｺﾞｼｯｸUB" panose="020B0900000000000000" pitchFamily="50" charset="-128"/>
-              <a:ea typeface="HGS創英角ｺﾞｼｯｸUB" panose="020B0900000000000000" pitchFamily="50" charset="-128"/>
-            </a:endParaRPr>
-          </a:p>
-          <a:p>
-            <a:r>
-              <a:rPr lang="ja-JP" altLang="en-US" sz="2400" dirty="0">
-                <a:latin typeface="HGS創英角ｺﾞｼｯｸUB" panose="020B0900000000000000" pitchFamily="50" charset="-128"/>
-                <a:ea typeface="HGS創英角ｺﾞｼｯｸUB" panose="020B0900000000000000" pitchFamily="50" charset="-128"/>
-              </a:rPr>
-              <a:t>・就職活動時期</a:t>
+              <a:t>・感染症</a:t>
+            </a:r>
+            <a:endParaRPr lang="en-US" altLang="ja-JP" sz="2400" dirty="0">
+              <a:latin typeface="HGS創英角ｺﾞｼｯｸUB" panose="020B0900000000000000" pitchFamily="50" charset="-128"/>
+              <a:ea typeface="HGS創英角ｺﾞｼｯｸUB" panose="020B0900000000000000" pitchFamily="50" charset="-128"/>
+            </a:endParaRPr>
+          </a:p>
+          <a:p>
+            <a:r>
+              <a:rPr lang="ja-JP" altLang="en-US" sz="2400" dirty="0">
+                <a:latin typeface="HGS創英角ｺﾞｼｯｸUB" panose="020B0900000000000000" pitchFamily="50" charset="-128"/>
+                <a:ea typeface="HGS創英角ｺﾞｼｯｸUB" panose="020B0900000000000000" pitchFamily="50" charset="-128"/>
+              </a:rPr>
+              <a:t>・ひどい咳やくしゃみでうるさい</a:t>
+            </a:r>
+            <a:endParaRPr lang="en-US" altLang="ja-JP" sz="2400" dirty="0">
+              <a:latin typeface="HGS創英角ｺﾞｼｯｸUB" panose="020B0900000000000000" pitchFamily="50" charset="-128"/>
+              <a:ea typeface="HGS創英角ｺﾞｼｯｸUB" panose="020B0900000000000000" pitchFamily="50" charset="-128"/>
+            </a:endParaRPr>
+          </a:p>
+          <a:p>
+            <a:r>
+              <a:rPr lang="ja-JP" altLang="en-US" sz="2400" dirty="0">
+                <a:latin typeface="HGS創英角ｺﾞｼｯｸUB" panose="020B0900000000000000" pitchFamily="50" charset="-128"/>
+                <a:ea typeface="HGS創英角ｺﾞｼｯｸUB" panose="020B0900000000000000" pitchFamily="50" charset="-128"/>
+              </a:rPr>
+              <a:t>など</a:t>
+            </a:r>
+            <a:endParaRPr lang="en-US" altLang="ja-JP" sz="2400" dirty="0">
+              <a:latin typeface="HGS創英角ｺﾞｼｯｸUB" panose="020B0900000000000000" pitchFamily="50" charset="-128"/>
+              <a:ea typeface="HGS創英角ｺﾞｼｯｸUB" panose="020B0900000000000000" pitchFamily="50" charset="-128"/>
+            </a:endParaRPr>
+          </a:p>
+          <a:p>
+            <a:endParaRPr lang="en-US" altLang="ja-JP" sz="2400" dirty="0">
+              <a:latin typeface="HGS創英角ｺﾞｼｯｸUB" panose="020B0900000000000000" pitchFamily="50" charset="-128"/>
+              <a:ea typeface="HGS創英角ｺﾞｼｯｸUB" panose="020B0900000000000000" pitchFamily="50" charset="-128"/>
+            </a:endParaRPr>
+          </a:p>
+          <a:p>
+            <a:r>
+              <a:rPr lang="ja-JP" altLang="en-US" sz="2400" dirty="0">
+                <a:latin typeface="HGS創英角ｺﾞｼｯｸUB" panose="020B0900000000000000" pitchFamily="50" charset="-128"/>
+                <a:ea typeface="HGS創英角ｺﾞｼｯｸUB" panose="020B0900000000000000" pitchFamily="50" charset="-128"/>
+              </a:rPr>
+              <a:t>周りに迷惑がかかる場合は休むことを考慮しましょう</a:t>
             </a:r>
             <a:endParaRPr lang="en-US" altLang="ja-JP" sz="2400" dirty="0">
               <a:latin typeface="HGS創英角ｺﾞｼｯｸUB" panose="020B0900000000000000" pitchFamily="50" charset="-128"/>
@@ -8177,7 +8245,7 @@
     </p:spTree>
     <p:extLst>
       <p:ext uri="{BB962C8B-B14F-4D97-AF65-F5344CB8AC3E}">
-        <p14:creationId xmlns:p14="http://schemas.microsoft.com/office/powerpoint/2010/main" val="646173412"/>
+        <p14:creationId xmlns:p14="http://schemas.microsoft.com/office/powerpoint/2010/main" val="473406200"/>
       </p:ext>
     </p:extLst>
   </p:cSld>
@@ -8219,7 +8287,7 @@
         <p:spPr>
           <a:xfrm>
             <a:off x="567542" y="491954"/>
-            <a:ext cx="2656496" cy="584775"/>
+            <a:ext cx="3068469" cy="584775"/>
           </a:xfrm>
           <a:prstGeom prst="rect">
             <a:avLst/>
@@ -8237,7 +8305,7 @@
                 <a:latin typeface="HGS創英角ｺﾞｼｯｸUB" panose="020B0900000000000000" pitchFamily="50" charset="-128"/>
                 <a:ea typeface="HGS創英角ｺﾞｼｯｸUB" panose="020B0900000000000000" pitchFamily="50" charset="-128"/>
               </a:rPr>
-              <a:t>休まないこと</a:t>
+              <a:t>友達をつくろう</a:t>
             </a:r>
             <a:endParaRPr kumimoji="1" lang="en-US" altLang="ja-JP" sz="3200" b="1" u="sng" dirty="0">
               <a:latin typeface="HGS創英角ｺﾞｼｯｸUB" panose="020B0900000000000000" pitchFamily="50" charset="-128"/>
@@ -8261,7 +8329,7 @@
         <p:spPr>
           <a:xfrm>
             <a:off x="567542" y="1216429"/>
-            <a:ext cx="7879080" cy="4524315"/>
+            <a:ext cx="8802410" cy="2308324"/>
           </a:xfrm>
           <a:prstGeom prst="rect">
             <a:avLst/>
@@ -8279,135 +8347,79 @@
                 <a:latin typeface="HGS創英角ｺﾞｼｯｸUB" panose="020B0900000000000000" pitchFamily="50" charset="-128"/>
                 <a:ea typeface="HGS創英角ｺﾞｼｯｸUB" panose="020B0900000000000000" pitchFamily="50" charset="-128"/>
               </a:rPr>
-              <a:t>専門学校の授業は、</a:t>
-            </a:r>
-            <a:endParaRPr lang="en-US" altLang="ja-JP" sz="2400" dirty="0">
-              <a:latin typeface="HGS創英角ｺﾞｼｯｸUB" panose="020B0900000000000000" pitchFamily="50" charset="-128"/>
-              <a:ea typeface="HGS創英角ｺﾞｼｯｸUB" panose="020B0900000000000000" pitchFamily="50" charset="-128"/>
-            </a:endParaRPr>
-          </a:p>
-          <a:p>
-            <a:r>
-              <a:rPr lang="ja-JP" altLang="en-US" sz="2400" dirty="0">
-                <a:latin typeface="HGS創英角ｺﾞｼｯｸUB" panose="020B0900000000000000" pitchFamily="50" charset="-128"/>
-                <a:ea typeface="HGS創英角ｺﾞｼｯｸUB" panose="020B0900000000000000" pitchFamily="50" charset="-128"/>
-              </a:rPr>
-              <a:t>短期間に一気にまとめて知識と技術を叩き込みます。</a:t>
-            </a:r>
-            <a:endParaRPr lang="en-US" altLang="ja-JP" sz="2400" dirty="0">
-              <a:latin typeface="HGS創英角ｺﾞｼｯｸUB" panose="020B0900000000000000" pitchFamily="50" charset="-128"/>
-              <a:ea typeface="HGS創英角ｺﾞｼｯｸUB" panose="020B0900000000000000" pitchFamily="50" charset="-128"/>
-            </a:endParaRPr>
-          </a:p>
-          <a:p>
-            <a:endParaRPr lang="en-US" altLang="ja-JP" sz="2400" dirty="0">
-              <a:latin typeface="HGS創英角ｺﾞｼｯｸUB" panose="020B0900000000000000" pitchFamily="50" charset="-128"/>
-              <a:ea typeface="HGS創英角ｺﾞｼｯｸUB" panose="020B0900000000000000" pitchFamily="50" charset="-128"/>
-            </a:endParaRPr>
-          </a:p>
-          <a:p>
-            <a:r>
-              <a:rPr lang="ja-JP" altLang="en-US" sz="2400" dirty="0">
-                <a:latin typeface="HGS創英角ｺﾞｼｯｸUB" panose="020B0900000000000000" pitchFamily="50" charset="-128"/>
-                <a:ea typeface="HGS創英角ｺﾞｼｯｸUB" panose="020B0900000000000000" pitchFamily="50" charset="-128"/>
-              </a:rPr>
-              <a:t>１日休むだけで、すぐに取り残されてしまいますので、</a:t>
-            </a:r>
-            <a:endParaRPr lang="en-US" altLang="ja-JP" sz="2400" dirty="0">
-              <a:latin typeface="HGS創英角ｺﾞｼｯｸUB" panose="020B0900000000000000" pitchFamily="50" charset="-128"/>
-              <a:ea typeface="HGS創英角ｺﾞｼｯｸUB" panose="020B0900000000000000" pitchFamily="50" charset="-128"/>
-            </a:endParaRPr>
-          </a:p>
-          <a:p>
-            <a:r>
-              <a:rPr lang="ja-JP" altLang="en-US" sz="2400" dirty="0">
-                <a:latin typeface="HGS創英角ｺﾞｼｯｸUB" panose="020B0900000000000000" pitchFamily="50" charset="-128"/>
-                <a:ea typeface="HGS創英角ｺﾞｼｯｸUB" panose="020B0900000000000000" pitchFamily="50" charset="-128"/>
-              </a:rPr>
-              <a:t>学校は休まないようにしましょう。</a:t>
-            </a:r>
-            <a:endParaRPr lang="en-US" altLang="ja-JP" sz="2400" dirty="0">
-              <a:latin typeface="HGS創英角ｺﾞｼｯｸUB" panose="020B0900000000000000" pitchFamily="50" charset="-128"/>
-              <a:ea typeface="HGS創英角ｺﾞｼｯｸUB" panose="020B0900000000000000" pitchFamily="50" charset="-128"/>
-            </a:endParaRPr>
-          </a:p>
-          <a:p>
-            <a:endParaRPr lang="en-US" altLang="ja-JP" sz="2400" dirty="0">
-              <a:latin typeface="HGS創英角ｺﾞｼｯｸUB" panose="020B0900000000000000" pitchFamily="50" charset="-128"/>
-              <a:ea typeface="HGS創英角ｺﾞｼｯｸUB" panose="020B0900000000000000" pitchFamily="50" charset="-128"/>
-            </a:endParaRPr>
-          </a:p>
-          <a:p>
-            <a:r>
-              <a:rPr lang="ja-JP" altLang="en-US" sz="2400" dirty="0">
-                <a:solidFill>
-                  <a:srgbClr val="FF0000"/>
-                </a:solidFill>
-                <a:latin typeface="HGS創英角ｺﾞｼｯｸUB" panose="020B0900000000000000" pitchFamily="50" charset="-128"/>
-                <a:ea typeface="HGS創英角ｺﾞｼｯｸUB" panose="020B0900000000000000" pitchFamily="50" charset="-128"/>
-              </a:rPr>
-              <a:t>■休む時の例</a:t>
-            </a:r>
-            <a:endParaRPr lang="en-US" altLang="ja-JP" sz="2400" dirty="0">
-              <a:solidFill>
-                <a:srgbClr val="FF0000"/>
-              </a:solidFill>
-              <a:latin typeface="HGS創英角ｺﾞｼｯｸUB" panose="020B0900000000000000" pitchFamily="50" charset="-128"/>
-              <a:ea typeface="HGS創英角ｺﾞｼｯｸUB" panose="020B0900000000000000" pitchFamily="50" charset="-128"/>
-            </a:endParaRPr>
-          </a:p>
-          <a:p>
-            <a:r>
-              <a:rPr lang="ja-JP" altLang="en-US" sz="2400" dirty="0">
-                <a:latin typeface="HGS創英角ｺﾞｼｯｸUB" panose="020B0900000000000000" pitchFamily="50" charset="-128"/>
-                <a:ea typeface="HGS創英角ｺﾞｼｯｸUB" panose="020B0900000000000000" pitchFamily="50" charset="-128"/>
-              </a:rPr>
-              <a:t>・感染症</a:t>
-            </a:r>
-            <a:endParaRPr lang="en-US" altLang="ja-JP" sz="2400" dirty="0">
-              <a:latin typeface="HGS創英角ｺﾞｼｯｸUB" panose="020B0900000000000000" pitchFamily="50" charset="-128"/>
-              <a:ea typeface="HGS創英角ｺﾞｼｯｸUB" panose="020B0900000000000000" pitchFamily="50" charset="-128"/>
-            </a:endParaRPr>
-          </a:p>
-          <a:p>
-            <a:r>
-              <a:rPr lang="ja-JP" altLang="en-US" sz="2400" dirty="0">
-                <a:latin typeface="HGS創英角ｺﾞｼｯｸUB" panose="020B0900000000000000" pitchFamily="50" charset="-128"/>
-                <a:ea typeface="HGS創英角ｺﾞｼｯｸUB" panose="020B0900000000000000" pitchFamily="50" charset="-128"/>
-              </a:rPr>
-              <a:t>・ひどい咳やくしゃみでうるさい</a:t>
-            </a:r>
-            <a:endParaRPr lang="en-US" altLang="ja-JP" sz="2400" dirty="0">
-              <a:latin typeface="HGS創英角ｺﾞｼｯｸUB" panose="020B0900000000000000" pitchFamily="50" charset="-128"/>
-              <a:ea typeface="HGS創英角ｺﾞｼｯｸUB" panose="020B0900000000000000" pitchFamily="50" charset="-128"/>
-            </a:endParaRPr>
-          </a:p>
-          <a:p>
-            <a:r>
-              <a:rPr lang="ja-JP" altLang="en-US" sz="2400" dirty="0">
-                <a:latin typeface="HGS創英角ｺﾞｼｯｸUB" panose="020B0900000000000000" pitchFamily="50" charset="-128"/>
-                <a:ea typeface="HGS創英角ｺﾞｼｯｸUB" panose="020B0900000000000000" pitchFamily="50" charset="-128"/>
-              </a:rPr>
-              <a:t>など</a:t>
-            </a:r>
-            <a:endParaRPr lang="en-US" altLang="ja-JP" sz="2400" dirty="0">
-              <a:latin typeface="HGS創英角ｺﾞｼｯｸUB" panose="020B0900000000000000" pitchFamily="50" charset="-128"/>
-              <a:ea typeface="HGS創英角ｺﾞｼｯｸUB" panose="020B0900000000000000" pitchFamily="50" charset="-128"/>
-            </a:endParaRPr>
-          </a:p>
-          <a:p>
-            <a:endParaRPr lang="en-US" altLang="ja-JP" sz="2400" dirty="0">
-              <a:latin typeface="HGS創英角ｺﾞｼｯｸUB" panose="020B0900000000000000" pitchFamily="50" charset="-128"/>
-              <a:ea typeface="HGS創英角ｺﾞｼｯｸUB" panose="020B0900000000000000" pitchFamily="50" charset="-128"/>
-            </a:endParaRPr>
-          </a:p>
-          <a:p>
-            <a:r>
-              <a:rPr lang="ja-JP" altLang="en-US" sz="2400" dirty="0">
-                <a:latin typeface="HGS創英角ｺﾞｼｯｸUB" panose="020B0900000000000000" pitchFamily="50" charset="-128"/>
-                <a:ea typeface="HGS創英角ｺﾞｼｯｸUB" panose="020B0900000000000000" pitchFamily="50" charset="-128"/>
-              </a:rPr>
-              <a:t>周りに迷惑がかかる場合は休むことを考慮しましょう</a:t>
+              <a:t>勉強も就活も一人でするよりは、</a:t>
+            </a:r>
+            <a:endParaRPr lang="en-US" altLang="ja-JP" sz="2400" dirty="0">
+              <a:latin typeface="HGS創英角ｺﾞｼｯｸUB" panose="020B0900000000000000" pitchFamily="50" charset="-128"/>
+              <a:ea typeface="HGS創英角ｺﾞｼｯｸUB" panose="020B0900000000000000" pitchFamily="50" charset="-128"/>
+            </a:endParaRPr>
+          </a:p>
+          <a:p>
+            <a:r>
+              <a:rPr lang="ja-JP" altLang="en-US" sz="2400" dirty="0">
+                <a:latin typeface="HGS創英角ｺﾞｼｯｸUB" panose="020B0900000000000000" pitchFamily="50" charset="-128"/>
+                <a:ea typeface="HGS創英角ｺﾞｼｯｸUB" panose="020B0900000000000000" pitchFamily="50" charset="-128"/>
+              </a:rPr>
+              <a:t>複数人で協力したほうが良い成果が出ます。</a:t>
+            </a:r>
+            <a:endParaRPr lang="en-US" altLang="ja-JP" sz="2400" dirty="0">
+              <a:latin typeface="HGS創英角ｺﾞｼｯｸUB" panose="020B0900000000000000" pitchFamily="50" charset="-128"/>
+              <a:ea typeface="HGS創英角ｺﾞｼｯｸUB" panose="020B0900000000000000" pitchFamily="50" charset="-128"/>
+            </a:endParaRPr>
+          </a:p>
+          <a:p>
+            <a:endParaRPr lang="en-US" altLang="ja-JP" sz="2400" dirty="0">
+              <a:latin typeface="HGS創英角ｺﾞｼｯｸUB" panose="020B0900000000000000" pitchFamily="50" charset="-128"/>
+              <a:ea typeface="HGS創英角ｺﾞｼｯｸUB" panose="020B0900000000000000" pitchFamily="50" charset="-128"/>
+            </a:endParaRPr>
+          </a:p>
+          <a:p>
+            <a:r>
+              <a:rPr lang="ja-JP" altLang="en-US" sz="2400" dirty="0">
+                <a:latin typeface="HGS創英角ｺﾞｼｯｸUB" panose="020B0900000000000000" pitchFamily="50" charset="-128"/>
+                <a:ea typeface="HGS創英角ｺﾞｼｯｸUB" panose="020B0900000000000000" pitchFamily="50" charset="-128"/>
+              </a:rPr>
+              <a:t>友達を作って、困ったときは相談しあえるようにしましょう。</a:t>
+            </a:r>
+            <a:endParaRPr lang="en-US" altLang="ja-JP" sz="2400" dirty="0">
+              <a:latin typeface="HGS創英角ｺﾞｼｯｸUB" panose="020B0900000000000000" pitchFamily="50" charset="-128"/>
+              <a:ea typeface="HGS創英角ｺﾞｼｯｸUB" panose="020B0900000000000000" pitchFamily="50" charset="-128"/>
+            </a:endParaRPr>
+          </a:p>
+          <a:p>
+            <a:endParaRPr lang="en-US" altLang="ja-JP" sz="2400" dirty="0">
+              <a:latin typeface="HGS創英角ｺﾞｼｯｸUB" panose="020B0900000000000000" pitchFamily="50" charset="-128"/>
+              <a:ea typeface="HGS創英角ｺﾞｼｯｸUB" panose="020B0900000000000000" pitchFamily="50" charset="-128"/>
+            </a:endParaRPr>
+          </a:p>
+          <a:p>
+            <a:r>
+              <a:rPr lang="en-US" altLang="ja-JP" sz="2400" dirty="0">
+                <a:latin typeface="HGS創英角ｺﾞｼｯｸUB" panose="020B0900000000000000" pitchFamily="50" charset="-128"/>
+                <a:ea typeface="HGS創英角ｺﾞｼｯｸUB" panose="020B0900000000000000" pitchFamily="50" charset="-128"/>
+              </a:rPr>
+              <a:t>※</a:t>
+            </a:r>
+            <a:r>
+              <a:rPr lang="ja-JP" altLang="en-US" sz="2400" dirty="0">
+                <a:latin typeface="HGS創英角ｺﾞｼｯｸUB" panose="020B0900000000000000" pitchFamily="50" charset="-128"/>
+                <a:ea typeface="HGS創英角ｺﾞｼｯｸUB" panose="020B0900000000000000" pitchFamily="50" charset="-128"/>
+              </a:rPr>
+              <a:t>もちろん教職員を頼ってもらっても</a:t>
+            </a:r>
+            <a:r>
+              <a:rPr lang="en-US" altLang="ja-JP" sz="2400" dirty="0">
+                <a:latin typeface="HGS創英角ｺﾞｼｯｸUB" panose="020B0900000000000000" pitchFamily="50" charset="-128"/>
+                <a:ea typeface="HGS創英角ｺﾞｼｯｸUB" panose="020B0900000000000000" pitchFamily="50" charset="-128"/>
+              </a:rPr>
+              <a:t>OK</a:t>
+            </a:r>
+            <a:r>
+              <a:rPr lang="ja-JP" altLang="en-US" sz="2400" dirty="0">
+                <a:latin typeface="HGS創英角ｺﾞｼｯｸUB" panose="020B0900000000000000" pitchFamily="50" charset="-128"/>
+                <a:ea typeface="HGS創英角ｺﾞｼｯｸUB" panose="020B0900000000000000" pitchFamily="50" charset="-128"/>
+              </a:rPr>
+              <a:t>です</a:t>
             </a:r>
             <a:endParaRPr lang="en-US" altLang="ja-JP" sz="2400" dirty="0">
               <a:latin typeface="HGS創英角ｺﾞｼｯｸUB" panose="020B0900000000000000" pitchFamily="50" charset="-128"/>
@@ -8419,7 +8431,7 @@
     </p:spTree>
     <p:extLst>
       <p:ext uri="{BB962C8B-B14F-4D97-AF65-F5344CB8AC3E}">
-        <p14:creationId xmlns:p14="http://schemas.microsoft.com/office/powerpoint/2010/main" val="473406200"/>
+        <p14:creationId xmlns:p14="http://schemas.microsoft.com/office/powerpoint/2010/main" val="1470804749"/>
       </p:ext>
     </p:extLst>
   </p:cSld>
@@ -8461,7 +8473,7 @@
         <p:spPr>
           <a:xfrm>
             <a:off x="567542" y="491954"/>
-            <a:ext cx="3068469" cy="584775"/>
+            <a:ext cx="2244525" cy="584775"/>
           </a:xfrm>
           <a:prstGeom prst="rect">
             <a:avLst/>
@@ -8479,7 +8491,7 @@
                 <a:latin typeface="HGS創英角ｺﾞｼｯｸUB" panose="020B0900000000000000" pitchFamily="50" charset="-128"/>
                 <a:ea typeface="HGS創英角ｺﾞｼｯｸUB" panose="020B0900000000000000" pitchFamily="50" charset="-128"/>
               </a:rPr>
-              <a:t>友達をつくろう</a:t>
+              <a:t>毎日残ろう</a:t>
             </a:r>
             <a:endParaRPr kumimoji="1" lang="en-US" altLang="ja-JP" sz="3200" b="1" u="sng" dirty="0">
               <a:latin typeface="HGS創英角ｺﾞｼｯｸUB" panose="020B0900000000000000" pitchFamily="50" charset="-128"/>
@@ -8503,7 +8515,7 @@
         <p:spPr>
           <a:xfrm>
             <a:off x="567542" y="1216429"/>
-            <a:ext cx="8802410" cy="2308324"/>
+            <a:ext cx="7959230" cy="2308324"/>
           </a:xfrm>
           <a:prstGeom prst="rect">
             <a:avLst/>
@@ -8521,54 +8533,88 @@
                 <a:latin typeface="HGS創英角ｺﾞｼｯｸUB" panose="020B0900000000000000" pitchFamily="50" charset="-128"/>
                 <a:ea typeface="HGS創英角ｺﾞｼｯｸUB" panose="020B0900000000000000" pitchFamily="50" charset="-128"/>
               </a:rPr>
-              <a:t>勉強も就活も一人で活動するよりは、</a:t>
-            </a:r>
-            <a:endParaRPr lang="en-US" altLang="ja-JP" sz="2400" dirty="0">
-              <a:latin typeface="HGS創英角ｺﾞｼｯｸUB" panose="020B0900000000000000" pitchFamily="50" charset="-128"/>
-              <a:ea typeface="HGS創英角ｺﾞｼｯｸUB" panose="020B0900000000000000" pitchFamily="50" charset="-128"/>
-            </a:endParaRPr>
-          </a:p>
-          <a:p>
-            <a:r>
-              <a:rPr lang="ja-JP" altLang="en-US" sz="2400" dirty="0">
-                <a:latin typeface="HGS創英角ｺﾞｼｯｸUB" panose="020B0900000000000000" pitchFamily="50" charset="-128"/>
-                <a:ea typeface="HGS創英角ｺﾞｼｯｸUB" panose="020B0900000000000000" pitchFamily="50" charset="-128"/>
-              </a:rPr>
-              <a:t>複数人で協力したほうが良い成果が出ます。</a:t>
-            </a:r>
-            <a:endParaRPr lang="en-US" altLang="ja-JP" sz="2400" dirty="0">
-              <a:latin typeface="HGS創英角ｺﾞｼｯｸUB" panose="020B0900000000000000" pitchFamily="50" charset="-128"/>
-              <a:ea typeface="HGS創英角ｺﾞｼｯｸUB" panose="020B0900000000000000" pitchFamily="50" charset="-128"/>
-            </a:endParaRPr>
-          </a:p>
-          <a:p>
-            <a:endParaRPr lang="en-US" altLang="ja-JP" sz="2400" dirty="0">
-              <a:latin typeface="HGS創英角ｺﾞｼｯｸUB" panose="020B0900000000000000" pitchFamily="50" charset="-128"/>
-              <a:ea typeface="HGS創英角ｺﾞｼｯｸUB" panose="020B0900000000000000" pitchFamily="50" charset="-128"/>
-            </a:endParaRPr>
-          </a:p>
-          <a:p>
-            <a:r>
-              <a:rPr lang="ja-JP" altLang="en-US" sz="2400" dirty="0">
-                <a:latin typeface="HGS創英角ｺﾞｼｯｸUB" panose="020B0900000000000000" pitchFamily="50" charset="-128"/>
-                <a:ea typeface="HGS創英角ｺﾞｼｯｸUB" panose="020B0900000000000000" pitchFamily="50" charset="-128"/>
-              </a:rPr>
-              <a:t>友達を作って、困ったときは相談しあえるようにしましょう。</a:t>
-            </a:r>
-            <a:endParaRPr lang="en-US" altLang="ja-JP" sz="2400" dirty="0">
-              <a:latin typeface="HGS創英角ｺﾞｼｯｸUB" panose="020B0900000000000000" pitchFamily="50" charset="-128"/>
-              <a:ea typeface="HGS創英角ｺﾞｼｯｸUB" panose="020B0900000000000000" pitchFamily="50" charset="-128"/>
-            </a:endParaRPr>
-          </a:p>
-          <a:p>
-            <a:endParaRPr lang="en-US" altLang="ja-JP" sz="2400" dirty="0">
-              <a:latin typeface="HGS創英角ｺﾞｼｯｸUB" panose="020B0900000000000000" pitchFamily="50" charset="-128"/>
-              <a:ea typeface="HGS創英角ｺﾞｼｯｸUB" panose="020B0900000000000000" pitchFamily="50" charset="-128"/>
-            </a:endParaRPr>
-          </a:p>
-          <a:p>
+              <a:t>教室は</a:t>
+            </a:r>
             <a:r>
               <a:rPr lang="en-US" altLang="ja-JP" sz="2400" dirty="0">
+                <a:solidFill>
+                  <a:srgbClr val="FF0000"/>
+                </a:solidFill>
+                <a:latin typeface="HGS創英角ｺﾞｼｯｸUB" panose="020B0900000000000000" pitchFamily="50" charset="-128"/>
+                <a:ea typeface="HGS創英角ｺﾞｼｯｸUB" panose="020B0900000000000000" pitchFamily="50" charset="-128"/>
+              </a:rPr>
+              <a:t>17</a:t>
+            </a:r>
+            <a:r>
+              <a:rPr lang="ja-JP" altLang="en-US" sz="2400" dirty="0">
+                <a:solidFill>
+                  <a:srgbClr val="FF0000"/>
+                </a:solidFill>
+                <a:latin typeface="HGS創英角ｺﾞｼｯｸUB" panose="020B0900000000000000" pitchFamily="50" charset="-128"/>
+                <a:ea typeface="HGS創英角ｺﾞｼｯｸUB" panose="020B0900000000000000" pitchFamily="50" charset="-128"/>
+              </a:rPr>
+              <a:t>時まで</a:t>
+            </a:r>
+            <a:r>
+              <a:rPr lang="ja-JP" altLang="en-US" sz="2400" dirty="0">
+                <a:latin typeface="HGS創英角ｺﾞｼｯｸUB" panose="020B0900000000000000" pitchFamily="50" charset="-128"/>
+                <a:ea typeface="HGS創英角ｺﾞｼｯｸUB" panose="020B0900000000000000" pitchFamily="50" charset="-128"/>
+              </a:rPr>
+              <a:t>開放しています。</a:t>
+            </a:r>
+            <a:endParaRPr lang="en-US" altLang="ja-JP" sz="2400" dirty="0">
+              <a:latin typeface="HGS創英角ｺﾞｼｯｸUB" panose="020B0900000000000000" pitchFamily="50" charset="-128"/>
+              <a:ea typeface="HGS創英角ｺﾞｼｯｸUB" panose="020B0900000000000000" pitchFamily="50" charset="-128"/>
+            </a:endParaRPr>
+          </a:p>
+          <a:p>
+            <a:r>
+              <a:rPr lang="en-US" altLang="ja-JP" sz="2400" dirty="0">
+                <a:latin typeface="HGS創英角ｺﾞｼｯｸUB" panose="020B0900000000000000" pitchFamily="50" charset="-128"/>
+                <a:ea typeface="HGS創英角ｺﾞｼｯｸUB" panose="020B0900000000000000" pitchFamily="50" charset="-128"/>
+              </a:rPr>
+              <a:t>17</a:t>
+            </a:r>
+            <a:r>
+              <a:rPr lang="ja-JP" altLang="en-US" sz="2400" dirty="0">
+                <a:latin typeface="HGS創英角ｺﾞｼｯｸUB" panose="020B0900000000000000" pitchFamily="50" charset="-128"/>
+                <a:ea typeface="HGS創英角ｺﾞｼｯｸUB" panose="020B0900000000000000" pitchFamily="50" charset="-128"/>
+              </a:rPr>
+              <a:t>時まで居残りして、勉強、ゲーム制作をしましょう。</a:t>
+            </a:r>
+            <a:endParaRPr lang="en-US" altLang="ja-JP" sz="2400" dirty="0">
+              <a:latin typeface="HGS創英角ｺﾞｼｯｸUB" panose="020B0900000000000000" pitchFamily="50" charset="-128"/>
+              <a:ea typeface="HGS創英角ｺﾞｼｯｸUB" panose="020B0900000000000000" pitchFamily="50" charset="-128"/>
+            </a:endParaRPr>
+          </a:p>
+          <a:p>
+            <a:endParaRPr lang="en-US" altLang="ja-JP" sz="2400" dirty="0">
+              <a:latin typeface="HGS創英角ｺﾞｼｯｸUB" panose="020B0900000000000000" pitchFamily="50" charset="-128"/>
+              <a:ea typeface="HGS創英角ｺﾞｼｯｸUB" panose="020B0900000000000000" pitchFamily="50" charset="-128"/>
+            </a:endParaRPr>
+          </a:p>
+          <a:p>
+            <a:r>
+              <a:rPr lang="ja-JP" altLang="en-US" sz="2400" dirty="0">
+                <a:latin typeface="HGS創英角ｺﾞｼｯｸUB" panose="020B0900000000000000" pitchFamily="50" charset="-128"/>
+                <a:ea typeface="HGS創英角ｺﾞｼｯｸUB" panose="020B0900000000000000" pitchFamily="50" charset="-128"/>
+              </a:rPr>
+              <a:t>アルバイトはそのあとからにしましょう。</a:t>
+            </a:r>
+            <a:endParaRPr lang="en-US" altLang="ja-JP" sz="2400" dirty="0">
+              <a:latin typeface="HGS創英角ｺﾞｼｯｸUB" panose="020B0900000000000000" pitchFamily="50" charset="-128"/>
+              <a:ea typeface="HGS創英角ｺﾞｼｯｸUB" panose="020B0900000000000000" pitchFamily="50" charset="-128"/>
+            </a:endParaRPr>
+          </a:p>
+          <a:p>
+            <a:endParaRPr lang="en-US" altLang="ja-JP" sz="2400" dirty="0">
+              <a:latin typeface="HGS創英角ｺﾞｼｯｸUB" panose="020B0900000000000000" pitchFamily="50" charset="-128"/>
+              <a:ea typeface="HGS創英角ｺﾞｼｯｸUB" panose="020B0900000000000000" pitchFamily="50" charset="-128"/>
+            </a:endParaRPr>
+          </a:p>
+          <a:p>
+            <a:r>
+              <a:rPr lang="en-US" altLang="ja-JP" sz="2400" dirty="0">
                 <a:latin typeface="HGS創英角ｺﾞｼｯｸUB" panose="020B0900000000000000" pitchFamily="50" charset="-128"/>
                 <a:ea typeface="HGS創英角ｺﾞｼｯｸUB" panose="020B0900000000000000" pitchFamily="50" charset="-128"/>
               </a:rPr>
@@ -8579,21 +8625,7 @@
                 <a:latin typeface="HGS創英角ｺﾞｼｯｸUB" panose="020B0900000000000000" pitchFamily="50" charset="-128"/>
                 <a:ea typeface="HGS創英角ｺﾞｼｯｸUB" panose="020B0900000000000000" pitchFamily="50" charset="-128"/>
               </a:rPr>
-              <a:t>もちろん教職員を頼ってもらっても</a:t>
-            </a:r>
-            <a:r>
-              <a:rPr lang="en-US" altLang="ja-JP" sz="2400" dirty="0">
-                <a:latin typeface="HGS創英角ｺﾞｼｯｸUB" panose="020B0900000000000000" pitchFamily="50" charset="-128"/>
-                <a:ea typeface="HGS創英角ｺﾞｼｯｸUB" panose="020B0900000000000000" pitchFamily="50" charset="-128"/>
-              </a:rPr>
-              <a:t>OK</a:t>
-            </a:r>
-            <a:r>
-              <a:rPr lang="ja-JP" altLang="en-US" sz="2400" dirty="0">
-                <a:latin typeface="HGS創英角ｺﾞｼｯｸUB" panose="020B0900000000000000" pitchFamily="50" charset="-128"/>
-                <a:ea typeface="HGS創英角ｺﾞｼｯｸUB" panose="020B0900000000000000" pitchFamily="50" charset="-128"/>
-              </a:rPr>
-              <a:t>です</a:t>
+              <a:t>たまにはゲームして遊ぶために残っても大丈夫です</a:t>
             </a:r>
             <a:endParaRPr lang="en-US" altLang="ja-JP" sz="2400" dirty="0">
               <a:latin typeface="HGS創英角ｺﾞｼｯｸUB" panose="020B0900000000000000" pitchFamily="50" charset="-128"/>
@@ -8605,7 +8637,7 @@
     </p:spTree>
     <p:extLst>
       <p:ext uri="{BB962C8B-B14F-4D97-AF65-F5344CB8AC3E}">
-        <p14:creationId xmlns:p14="http://schemas.microsoft.com/office/powerpoint/2010/main" val="1470804749"/>
+        <p14:creationId xmlns:p14="http://schemas.microsoft.com/office/powerpoint/2010/main" val="818534836"/>
       </p:ext>
     </p:extLst>
   </p:cSld>
@@ -8647,7 +8679,7 @@
         <p:spPr>
           <a:xfrm>
             <a:off x="567542" y="491954"/>
-            <a:ext cx="2244525" cy="584775"/>
+            <a:ext cx="4304383" cy="584775"/>
           </a:xfrm>
           <a:prstGeom prst="rect">
             <a:avLst/>
@@ -8665,7 +8697,7 @@
                 <a:latin typeface="HGS創英角ｺﾞｼｯｸUB" panose="020B0900000000000000" pitchFamily="50" charset="-128"/>
                 <a:ea typeface="HGS創英角ｺﾞｼｯｸUB" panose="020B0900000000000000" pitchFamily="50" charset="-128"/>
               </a:rPr>
-              <a:t>毎日残ろう</a:t>
+              <a:t>イベントに参加しよう</a:t>
             </a:r>
             <a:endParaRPr kumimoji="1" lang="en-US" altLang="ja-JP" sz="3200" b="1" u="sng" dirty="0">
               <a:latin typeface="HGS創英角ｺﾞｼｯｸUB" panose="020B0900000000000000" pitchFamily="50" charset="-128"/>
@@ -8689,7 +8721,7 @@
         <p:spPr>
           <a:xfrm>
             <a:off x="567542" y="1216429"/>
-            <a:ext cx="7959230" cy="2308324"/>
+            <a:ext cx="8186857" cy="4154984"/>
           </a:xfrm>
           <a:prstGeom prst="rect">
             <a:avLst/>
@@ -8707,91 +8739,191 @@
                 <a:latin typeface="HGS創英角ｺﾞｼｯｸUB" panose="020B0900000000000000" pitchFamily="50" charset="-128"/>
                 <a:ea typeface="HGS創英角ｺﾞｼｯｸUB" panose="020B0900000000000000" pitchFamily="50" charset="-128"/>
               </a:rPr>
-              <a:t>教室は</a:t>
-            </a:r>
-            <a:r>
-              <a:rPr lang="en-US" altLang="ja-JP" sz="2400" dirty="0">
+              <a:t>就職活動では、他の専門学生や大学生がライバルです。</a:t>
+            </a:r>
+            <a:endParaRPr lang="en-US" altLang="ja-JP" sz="2400" dirty="0">
+              <a:latin typeface="HGS創英角ｺﾞｼｯｸUB" panose="020B0900000000000000" pitchFamily="50" charset="-128"/>
+              <a:ea typeface="HGS創英角ｺﾞｼｯｸUB" panose="020B0900000000000000" pitchFamily="50" charset="-128"/>
+            </a:endParaRPr>
+          </a:p>
+          <a:p>
+            <a:endParaRPr lang="en-US" altLang="ja-JP" sz="2400" dirty="0">
+              <a:latin typeface="HGS創英角ｺﾞｼｯｸUB" panose="020B0900000000000000" pitchFamily="50" charset="-128"/>
+              <a:ea typeface="HGS創英角ｺﾞｼｯｸUB" panose="020B0900000000000000" pitchFamily="50" charset="-128"/>
+            </a:endParaRPr>
+          </a:p>
+          <a:p>
+            <a:r>
+              <a:rPr lang="ja-JP" altLang="en-US" sz="2400" dirty="0">
+                <a:latin typeface="HGS創英角ｺﾞｼｯｸUB" panose="020B0900000000000000" pitchFamily="50" charset="-128"/>
+                <a:ea typeface="HGS創英角ｺﾞｼｯｸUB" panose="020B0900000000000000" pitchFamily="50" charset="-128"/>
+              </a:rPr>
+              <a:t>特に学生作品を見ることができるイベントには参加して、</a:t>
+            </a:r>
+            <a:endParaRPr lang="en-US" altLang="ja-JP" sz="2400" dirty="0">
+              <a:latin typeface="HGS創英角ｺﾞｼｯｸUB" panose="020B0900000000000000" pitchFamily="50" charset="-128"/>
+              <a:ea typeface="HGS創英角ｺﾞｼｯｸUB" panose="020B0900000000000000" pitchFamily="50" charset="-128"/>
+            </a:endParaRPr>
+          </a:p>
+          <a:p>
+            <a:r>
+              <a:rPr lang="ja-JP" altLang="en-US" sz="2400" dirty="0">
+                <a:latin typeface="HGS創英角ｺﾞｼｯｸUB" panose="020B0900000000000000" pitchFamily="50" charset="-128"/>
+                <a:ea typeface="HGS創英角ｺﾞｼｯｸUB" panose="020B0900000000000000" pitchFamily="50" charset="-128"/>
+              </a:rPr>
+              <a:t>ライバルの実力を把握しましょう。</a:t>
+            </a:r>
+            <a:endParaRPr lang="en-US" altLang="ja-JP" sz="2400" dirty="0">
+              <a:latin typeface="HGS創英角ｺﾞｼｯｸUB" panose="020B0900000000000000" pitchFamily="50" charset="-128"/>
+              <a:ea typeface="HGS創英角ｺﾞｼｯｸUB" panose="020B0900000000000000" pitchFamily="50" charset="-128"/>
+            </a:endParaRPr>
+          </a:p>
+          <a:p>
+            <a:endParaRPr lang="en-US" altLang="ja-JP" sz="2400" dirty="0">
+              <a:latin typeface="HGS創英角ｺﾞｼｯｸUB" panose="020B0900000000000000" pitchFamily="50" charset="-128"/>
+              <a:ea typeface="HGS創英角ｺﾞｼｯｸUB" panose="020B0900000000000000" pitchFamily="50" charset="-128"/>
+            </a:endParaRPr>
+          </a:p>
+          <a:p>
+            <a:r>
+              <a:rPr lang="ja-JP" altLang="en-US" sz="2400" dirty="0">
                 <a:solidFill>
                   <a:srgbClr val="FF0000"/>
                 </a:solidFill>
                 <a:latin typeface="HGS創英角ｺﾞｼｯｸUB" panose="020B0900000000000000" pitchFamily="50" charset="-128"/>
                 <a:ea typeface="HGS創英角ｺﾞｼｯｸUB" panose="020B0900000000000000" pitchFamily="50" charset="-128"/>
               </a:rPr>
-              <a:t>17</a:t>
-            </a:r>
-            <a:r>
-              <a:rPr lang="ja-JP" altLang="en-US" sz="2400" dirty="0">
-                <a:solidFill>
-                  <a:srgbClr val="FF0000"/>
-                </a:solidFill>
-                <a:latin typeface="HGS創英角ｺﾞｼｯｸUB" panose="020B0900000000000000" pitchFamily="50" charset="-128"/>
-                <a:ea typeface="HGS創英角ｺﾞｼｯｸUB" panose="020B0900000000000000" pitchFamily="50" charset="-128"/>
-              </a:rPr>
-              <a:t>時まで</a:t>
-            </a:r>
-            <a:r>
-              <a:rPr lang="ja-JP" altLang="en-US" sz="2400" dirty="0">
-                <a:latin typeface="HGS創英角ｺﾞｼｯｸUB" panose="020B0900000000000000" pitchFamily="50" charset="-128"/>
-                <a:ea typeface="HGS創英角ｺﾞｼｯｸUB" panose="020B0900000000000000" pitchFamily="50" charset="-128"/>
-              </a:rPr>
-              <a:t>開放しています。</a:t>
-            </a:r>
-            <a:endParaRPr lang="en-US" altLang="ja-JP" sz="2400" dirty="0">
-              <a:latin typeface="HGS創英角ｺﾞｼｯｸUB" panose="020B0900000000000000" pitchFamily="50" charset="-128"/>
-              <a:ea typeface="HGS創英角ｺﾞｼｯｸUB" panose="020B0900000000000000" pitchFamily="50" charset="-128"/>
-            </a:endParaRPr>
-          </a:p>
-          <a:p>
+              <a:t>■主なイベント</a:t>
+            </a:r>
+            <a:endParaRPr lang="en-US" altLang="ja-JP" sz="2400" dirty="0">
+              <a:solidFill>
+                <a:srgbClr val="FF0000"/>
+              </a:solidFill>
+              <a:latin typeface="HGS創英角ｺﾞｼｯｸUB" panose="020B0900000000000000" pitchFamily="50" charset="-128"/>
+              <a:ea typeface="HGS創英角ｺﾞｼｯｸUB" panose="020B0900000000000000" pitchFamily="50" charset="-128"/>
+            </a:endParaRPr>
+          </a:p>
+          <a:p>
+            <a:r>
+              <a:rPr lang="ja-JP" altLang="en-US" sz="2400" dirty="0">
+                <a:latin typeface="HGS創英角ｺﾞｼｯｸUB" panose="020B0900000000000000" pitchFamily="50" charset="-128"/>
+                <a:ea typeface="HGS創英角ｺﾞｼｯｸUB" panose="020B0900000000000000" pitchFamily="50" charset="-128"/>
+              </a:rPr>
+              <a:t>・ゲーム制作展（</a:t>
+            </a:r>
             <a:r>
               <a:rPr lang="en-US" altLang="ja-JP" sz="2400" dirty="0">
                 <a:latin typeface="HGS創英角ｺﾞｼｯｸUB" panose="020B0900000000000000" pitchFamily="50" charset="-128"/>
                 <a:ea typeface="HGS創英角ｺﾞｼｯｸUB" panose="020B0900000000000000" pitchFamily="50" charset="-128"/>
               </a:rPr>
-              <a:t>17</a:t>
-            </a:r>
-            <a:r>
-              <a:rPr lang="ja-JP" altLang="en-US" sz="2400" dirty="0">
-                <a:latin typeface="HGS創英角ｺﾞｼｯｸUB" panose="020B0900000000000000" pitchFamily="50" charset="-128"/>
-                <a:ea typeface="HGS創英角ｺﾞｼｯｸUB" panose="020B0900000000000000" pitchFamily="50" charset="-128"/>
-              </a:rPr>
-              <a:t>時まで居残りして、勉強、ゲーム制作をしましょう。</a:t>
-            </a:r>
-            <a:endParaRPr lang="en-US" altLang="ja-JP" sz="2400" dirty="0">
-              <a:latin typeface="HGS創英角ｺﾞｼｯｸUB" panose="020B0900000000000000" pitchFamily="50" charset="-128"/>
-              <a:ea typeface="HGS創英角ｺﾞｼｯｸUB" panose="020B0900000000000000" pitchFamily="50" charset="-128"/>
-            </a:endParaRPr>
-          </a:p>
-          <a:p>
-            <a:endParaRPr lang="en-US" altLang="ja-JP" sz="2400" dirty="0">
-              <a:latin typeface="HGS創英角ｺﾞｼｯｸUB" panose="020B0900000000000000" pitchFamily="50" charset="-128"/>
-              <a:ea typeface="HGS創英角ｺﾞｼｯｸUB" panose="020B0900000000000000" pitchFamily="50" charset="-128"/>
-            </a:endParaRPr>
-          </a:p>
-          <a:p>
-            <a:r>
-              <a:rPr lang="ja-JP" altLang="en-US" sz="2400" dirty="0">
-                <a:latin typeface="HGS創英角ｺﾞｼｯｸUB" panose="020B0900000000000000" pitchFamily="50" charset="-128"/>
-                <a:ea typeface="HGS創英角ｺﾞｼｯｸUB" panose="020B0900000000000000" pitchFamily="50" charset="-128"/>
-              </a:rPr>
-              <a:t>アルバイトはそのあとからにしましょう。</a:t>
-            </a:r>
-            <a:endParaRPr lang="en-US" altLang="ja-JP" sz="2400" dirty="0">
-              <a:latin typeface="HGS創英角ｺﾞｼｯｸUB" panose="020B0900000000000000" pitchFamily="50" charset="-128"/>
-              <a:ea typeface="HGS創英角ｺﾞｼｯｸUB" panose="020B0900000000000000" pitchFamily="50" charset="-128"/>
-            </a:endParaRPr>
-          </a:p>
-          <a:p>
-            <a:endParaRPr lang="en-US" altLang="ja-JP" sz="2400" dirty="0">
-              <a:latin typeface="HGS創英角ｺﾞｼｯｸUB" panose="020B0900000000000000" pitchFamily="50" charset="-128"/>
-              <a:ea typeface="HGS創英角ｺﾞｼｯｸUB" panose="020B0900000000000000" pitchFamily="50" charset="-128"/>
-            </a:endParaRPr>
-          </a:p>
-          <a:p>
+              <a:t>2</a:t>
+            </a:r>
+            <a:r>
+              <a:rPr lang="ja-JP" altLang="en-US" sz="2400" dirty="0">
+                <a:latin typeface="HGS創英角ｺﾞｼｯｸUB" panose="020B0900000000000000" pitchFamily="50" charset="-128"/>
+                <a:ea typeface="HGS創英角ｺﾞｼｯｸUB" panose="020B0900000000000000" pitchFamily="50" charset="-128"/>
+              </a:rPr>
+              <a:t>月ごろ、あるある</a:t>
+            </a:r>
             <a:r>
               <a:rPr lang="en-US" altLang="ja-JP" sz="2400" dirty="0">
                 <a:latin typeface="HGS創英角ｺﾞｼｯｸUB" panose="020B0900000000000000" pitchFamily="50" charset="-128"/>
                 <a:ea typeface="HGS創英角ｺﾞｼｯｸUB" panose="020B0900000000000000" pitchFamily="50" charset="-128"/>
               </a:rPr>
+              <a:t>City</a:t>
+            </a:r>
+            <a:r>
+              <a:rPr lang="ja-JP" altLang="en-US" sz="2400" dirty="0">
+                <a:latin typeface="HGS創英角ｺﾞｼｯｸUB" panose="020B0900000000000000" pitchFamily="50" charset="-128"/>
+                <a:ea typeface="HGS創英角ｺﾞｼｯｸUB" panose="020B0900000000000000" pitchFamily="50" charset="-128"/>
+              </a:rPr>
+              <a:t>）</a:t>
+            </a:r>
+            <a:endParaRPr lang="en-US" altLang="ja-JP" sz="2400" dirty="0">
+              <a:latin typeface="HGS創英角ｺﾞｼｯｸUB" panose="020B0900000000000000" pitchFamily="50" charset="-128"/>
+              <a:ea typeface="HGS創英角ｺﾞｼｯｸUB" panose="020B0900000000000000" pitchFamily="50" charset="-128"/>
+            </a:endParaRPr>
+          </a:p>
+          <a:p>
+            <a:r>
+              <a:rPr lang="ja-JP" altLang="en-US" sz="2400" dirty="0">
+                <a:latin typeface="HGS創英角ｺﾞｼｯｸUB" panose="020B0900000000000000" pitchFamily="50" charset="-128"/>
+                <a:ea typeface="HGS創英角ｺﾞｼｯｸUB" panose="020B0900000000000000" pitchFamily="50" charset="-128"/>
+              </a:rPr>
+              <a:t>・ゲーム展示会（</a:t>
+            </a:r>
+            <a:r>
+              <a:rPr lang="en-US" altLang="ja-JP" sz="2400" dirty="0">
+                <a:latin typeface="HGS創英角ｺﾞｼｯｸUB" panose="020B0900000000000000" pitchFamily="50" charset="-128"/>
+                <a:ea typeface="HGS創英角ｺﾞｼｯｸUB" panose="020B0900000000000000" pitchFamily="50" charset="-128"/>
+              </a:rPr>
+              <a:t>1</a:t>
+            </a:r>
+            <a:r>
+              <a:rPr lang="ja-JP" altLang="en-US" sz="2400" dirty="0">
+                <a:latin typeface="HGS創英角ｺﾞｼｯｸUB" panose="020B0900000000000000" pitchFamily="50" charset="-128"/>
+                <a:ea typeface="HGS創英角ｺﾞｼｯｸUB" panose="020B0900000000000000" pitchFamily="50" charset="-128"/>
+              </a:rPr>
+              <a:t>月ごろ、福岡校）</a:t>
+            </a:r>
+            <a:endParaRPr lang="en-US" altLang="ja-JP" sz="2400" dirty="0">
+              <a:latin typeface="HGS創英角ｺﾞｼｯｸUB" panose="020B0900000000000000" pitchFamily="50" charset="-128"/>
+              <a:ea typeface="HGS創英角ｺﾞｼｯｸUB" panose="020B0900000000000000" pitchFamily="50" charset="-128"/>
+            </a:endParaRPr>
+          </a:p>
+          <a:p>
+            <a:r>
+              <a:rPr lang="ja-JP" altLang="en-US" sz="2400" dirty="0">
+                <a:latin typeface="HGS創英角ｺﾞｼｯｸUB" panose="020B0900000000000000" pitchFamily="50" charset="-128"/>
+                <a:ea typeface="HGS創英角ｺﾞｼｯｸUB" panose="020B0900000000000000" pitchFamily="50" charset="-128"/>
+              </a:rPr>
+              <a:t>・</a:t>
+            </a:r>
+            <a:r>
+              <a:rPr lang="en-US" altLang="ja-JP" sz="2400" dirty="0">
+                <a:latin typeface="HGS創英角ｺﾞｼｯｸUB" panose="020B0900000000000000" pitchFamily="50" charset="-128"/>
+                <a:ea typeface="HGS創英角ｺﾞｼｯｸUB" panose="020B0900000000000000" pitchFamily="50" charset="-128"/>
+              </a:rPr>
+              <a:t>CEDEC+KYUSHU</a:t>
+            </a:r>
+            <a:r>
+              <a:rPr lang="ja-JP" altLang="en-US" sz="2400" dirty="0">
+                <a:latin typeface="HGS創英角ｺﾞｼｯｸUB" panose="020B0900000000000000" pitchFamily="50" charset="-128"/>
+                <a:ea typeface="HGS創英角ｺﾞｼｯｸUB" panose="020B0900000000000000" pitchFamily="50" charset="-128"/>
+              </a:rPr>
+              <a:t>（</a:t>
+            </a:r>
+            <a:r>
+              <a:rPr lang="en-US" altLang="ja-JP" sz="2400" dirty="0">
+                <a:latin typeface="HGS創英角ｺﾞｼｯｸUB" panose="020B0900000000000000" pitchFamily="50" charset="-128"/>
+                <a:ea typeface="HGS創英角ｺﾞｼｯｸUB" panose="020B0900000000000000" pitchFamily="50" charset="-128"/>
+              </a:rPr>
+              <a:t>11</a:t>
+            </a:r>
+            <a:r>
+              <a:rPr lang="ja-JP" altLang="en-US" sz="2400" dirty="0">
+                <a:latin typeface="HGS創英角ｺﾞｼｯｸUB" panose="020B0900000000000000" pitchFamily="50" charset="-128"/>
+                <a:ea typeface="HGS創英角ｺﾞｼｯｸUB" panose="020B0900000000000000" pitchFamily="50" charset="-128"/>
+              </a:rPr>
+              <a:t>月末、九州産業大学）</a:t>
+            </a:r>
+            <a:endParaRPr lang="en-US" altLang="ja-JP" sz="2400" dirty="0">
+              <a:latin typeface="HGS創英角ｺﾞｼｯｸUB" panose="020B0900000000000000" pitchFamily="50" charset="-128"/>
+              <a:ea typeface="HGS創英角ｺﾞｼｯｸUB" panose="020B0900000000000000" pitchFamily="50" charset="-128"/>
+            </a:endParaRPr>
+          </a:p>
+          <a:p>
+            <a:endParaRPr lang="en-US" altLang="ja-JP" sz="2400" dirty="0">
+              <a:latin typeface="HGS創英角ｺﾞｼｯｸUB" panose="020B0900000000000000" pitchFamily="50" charset="-128"/>
+              <a:ea typeface="HGS創英角ｺﾞｼｯｸUB" panose="020B0900000000000000" pitchFamily="50" charset="-128"/>
+            </a:endParaRPr>
+          </a:p>
+          <a:p>
+            <a:r>
+              <a:rPr lang="en-US" altLang="ja-JP" sz="2400" dirty="0">
+                <a:latin typeface="HGS創英角ｺﾞｼｯｸUB" panose="020B0900000000000000" pitchFamily="50" charset="-128"/>
+                <a:ea typeface="HGS創英角ｺﾞｼｯｸUB" panose="020B0900000000000000" pitchFamily="50" charset="-128"/>
+              </a:rPr>
               <a:t>※</a:t>
             </a:r>
             <a:r>
@@ -8799,7 +8931,7 @@
                 <a:latin typeface="HGS創英角ｺﾞｼｯｸUB" panose="020B0900000000000000" pitchFamily="50" charset="-128"/>
                 <a:ea typeface="HGS創英角ｺﾞｼｯｸUB" panose="020B0900000000000000" pitchFamily="50" charset="-128"/>
               </a:rPr>
-              <a:t>たまにはゲームして遊ぶために残っても大丈夫です</a:t>
+              <a:t>もちろんクラスメイトもライバルになります</a:t>
             </a:r>
             <a:endParaRPr lang="en-US" altLang="ja-JP" sz="2400" dirty="0">
               <a:latin typeface="HGS創英角ｺﾞｼｯｸUB" panose="020B0900000000000000" pitchFamily="50" charset="-128"/>
@@ -8811,7 +8943,7 @@
     </p:spTree>
     <p:extLst>
       <p:ext uri="{BB962C8B-B14F-4D97-AF65-F5344CB8AC3E}">
-        <p14:creationId xmlns:p14="http://schemas.microsoft.com/office/powerpoint/2010/main" val="818534836"/>
+        <p14:creationId xmlns:p14="http://schemas.microsoft.com/office/powerpoint/2010/main" val="2523051170"/>
       </p:ext>
     </p:extLst>
   </p:cSld>
@@ -8853,7 +8985,7 @@
         <p:spPr>
           <a:xfrm>
             <a:off x="567542" y="491954"/>
-            <a:ext cx="4304383" cy="584775"/>
+            <a:ext cx="2656496" cy="584775"/>
           </a:xfrm>
           <a:prstGeom prst="rect">
             <a:avLst/>
@@ -8871,7 +9003,7 @@
                 <a:latin typeface="HGS創英角ｺﾞｼｯｸUB" panose="020B0900000000000000" pitchFamily="50" charset="-128"/>
                 <a:ea typeface="HGS創英角ｺﾞｼｯｸUB" panose="020B0900000000000000" pitchFamily="50" charset="-128"/>
               </a:rPr>
-              <a:t>イベントに参加しよう</a:t>
+              <a:t>就職活動時期</a:t>
             </a:r>
             <a:endParaRPr kumimoji="1" lang="en-US" altLang="ja-JP" sz="3200" b="1" u="sng" dirty="0">
               <a:latin typeface="HGS創英角ｺﾞｼｯｸUB" panose="020B0900000000000000" pitchFamily="50" charset="-128"/>
@@ -8895,7 +9027,7 @@
         <p:spPr>
           <a:xfrm>
             <a:off x="567542" y="1216429"/>
-            <a:ext cx="8186857" cy="4154984"/>
+            <a:ext cx="8802410" cy="1569660"/>
           </a:xfrm>
           <a:prstGeom prst="rect">
             <a:avLst/>
@@ -8913,199 +9045,39 @@
                 <a:latin typeface="HGS創英角ｺﾞｼｯｸUB" panose="020B0900000000000000" pitchFamily="50" charset="-128"/>
                 <a:ea typeface="HGS創英角ｺﾞｼｯｸUB" panose="020B0900000000000000" pitchFamily="50" charset="-128"/>
               </a:rPr>
-              <a:t>就職活動では、他の専門学生や大学生がライバルです。</a:t>
-            </a:r>
-            <a:endParaRPr lang="en-US" altLang="ja-JP" sz="2400" dirty="0">
-              <a:latin typeface="HGS創英角ｺﾞｼｯｸUB" panose="020B0900000000000000" pitchFamily="50" charset="-128"/>
-              <a:ea typeface="HGS創英角ｺﾞｼｯｸUB" panose="020B0900000000000000" pitchFamily="50" charset="-128"/>
-            </a:endParaRPr>
-          </a:p>
-          <a:p>
-            <a:endParaRPr lang="en-US" altLang="ja-JP" sz="2400" dirty="0">
-              <a:latin typeface="HGS創英角ｺﾞｼｯｸUB" panose="020B0900000000000000" pitchFamily="50" charset="-128"/>
-              <a:ea typeface="HGS創英角ｺﾞｼｯｸUB" panose="020B0900000000000000" pitchFamily="50" charset="-128"/>
-            </a:endParaRPr>
-          </a:p>
-          <a:p>
-            <a:r>
-              <a:rPr lang="ja-JP" altLang="en-US" sz="2400" dirty="0">
-                <a:latin typeface="HGS創英角ｺﾞｼｯｸUB" panose="020B0900000000000000" pitchFamily="50" charset="-128"/>
-                <a:ea typeface="HGS創英角ｺﾞｼｯｸUB" panose="020B0900000000000000" pitchFamily="50" charset="-128"/>
-              </a:rPr>
-              <a:t>特に学生作品を見ることができるイベントには参加して、</a:t>
-            </a:r>
-            <a:endParaRPr lang="en-US" altLang="ja-JP" sz="2400" dirty="0">
-              <a:latin typeface="HGS創英角ｺﾞｼｯｸUB" panose="020B0900000000000000" pitchFamily="50" charset="-128"/>
-              <a:ea typeface="HGS創英角ｺﾞｼｯｸUB" panose="020B0900000000000000" pitchFamily="50" charset="-128"/>
-            </a:endParaRPr>
-          </a:p>
-          <a:p>
-            <a:r>
-              <a:rPr lang="ja-JP" altLang="en-US" sz="2400" dirty="0">
-                <a:latin typeface="HGS創英角ｺﾞｼｯｸUB" panose="020B0900000000000000" pitchFamily="50" charset="-128"/>
-                <a:ea typeface="HGS創英角ｺﾞｼｯｸUB" panose="020B0900000000000000" pitchFamily="50" charset="-128"/>
-              </a:rPr>
-              <a:t>ライバルの実力を把握しましょう。</a:t>
-            </a:r>
-            <a:endParaRPr lang="en-US" altLang="ja-JP" sz="2400" dirty="0">
-              <a:latin typeface="HGS創英角ｺﾞｼｯｸUB" panose="020B0900000000000000" pitchFamily="50" charset="-128"/>
-              <a:ea typeface="HGS創英角ｺﾞｼｯｸUB" panose="020B0900000000000000" pitchFamily="50" charset="-128"/>
-            </a:endParaRPr>
-          </a:p>
-          <a:p>
-            <a:endParaRPr lang="en-US" altLang="ja-JP" sz="2400" dirty="0">
-              <a:latin typeface="HGS創英角ｺﾞｼｯｸUB" panose="020B0900000000000000" pitchFamily="50" charset="-128"/>
-              <a:ea typeface="HGS創英角ｺﾞｼｯｸUB" panose="020B0900000000000000" pitchFamily="50" charset="-128"/>
-            </a:endParaRPr>
-          </a:p>
-          <a:p>
-            <a:r>
-              <a:rPr lang="ja-JP" altLang="en-US" sz="2400" dirty="0">
-                <a:solidFill>
-                  <a:srgbClr val="FF0000"/>
-                </a:solidFill>
-                <a:latin typeface="HGS創英角ｺﾞｼｯｸUB" panose="020B0900000000000000" pitchFamily="50" charset="-128"/>
-                <a:ea typeface="HGS創英角ｺﾞｼｯｸUB" panose="020B0900000000000000" pitchFamily="50" charset="-128"/>
-              </a:rPr>
-              <a:t>■主なイベント</a:t>
-            </a:r>
-            <a:endParaRPr lang="en-US" altLang="ja-JP" sz="2400" dirty="0">
-              <a:solidFill>
-                <a:srgbClr val="FF0000"/>
-              </a:solidFill>
-              <a:latin typeface="HGS創英角ｺﾞｼｯｸUB" panose="020B0900000000000000" pitchFamily="50" charset="-128"/>
-              <a:ea typeface="HGS創英角ｺﾞｼｯｸUB" panose="020B0900000000000000" pitchFamily="50" charset="-128"/>
-            </a:endParaRPr>
-          </a:p>
-          <a:p>
-            <a:r>
-              <a:rPr lang="ja-JP" altLang="en-US" sz="2400" dirty="0">
-                <a:latin typeface="HGS創英角ｺﾞｼｯｸUB" panose="020B0900000000000000" pitchFamily="50" charset="-128"/>
-                <a:ea typeface="HGS創英角ｺﾞｼｯｸUB" panose="020B0900000000000000" pitchFamily="50" charset="-128"/>
-              </a:rPr>
-              <a:t>・ゲーム制作展（</a:t>
-            </a:r>
-            <a:r>
-              <a:rPr lang="en-US" altLang="ja-JP" sz="2400" dirty="0">
-                <a:latin typeface="HGS創英角ｺﾞｼｯｸUB" panose="020B0900000000000000" pitchFamily="50" charset="-128"/>
-                <a:ea typeface="HGS創英角ｺﾞｼｯｸUB" panose="020B0900000000000000" pitchFamily="50" charset="-128"/>
-              </a:rPr>
-              <a:t>2</a:t>
-            </a:r>
-            <a:r>
-              <a:rPr lang="ja-JP" altLang="en-US" sz="2400" dirty="0">
-                <a:latin typeface="HGS創英角ｺﾞｼｯｸUB" panose="020B0900000000000000" pitchFamily="50" charset="-128"/>
-                <a:ea typeface="HGS創英角ｺﾞｼｯｸUB" panose="020B0900000000000000" pitchFamily="50" charset="-128"/>
-              </a:rPr>
-              <a:t>月ごろ、あるある</a:t>
-            </a:r>
-            <a:r>
-              <a:rPr lang="en-US" altLang="ja-JP" sz="2400" dirty="0">
-                <a:latin typeface="HGS創英角ｺﾞｼｯｸUB" panose="020B0900000000000000" pitchFamily="50" charset="-128"/>
-                <a:ea typeface="HGS創英角ｺﾞｼｯｸUB" panose="020B0900000000000000" pitchFamily="50" charset="-128"/>
-              </a:rPr>
-              <a:t>City</a:t>
-            </a:r>
-            <a:r>
-              <a:rPr lang="ja-JP" altLang="en-US" sz="2400" dirty="0">
-                <a:latin typeface="HGS創英角ｺﾞｼｯｸUB" panose="020B0900000000000000" pitchFamily="50" charset="-128"/>
-                <a:ea typeface="HGS創英角ｺﾞｼｯｸUB" panose="020B0900000000000000" pitchFamily="50" charset="-128"/>
-              </a:rPr>
-              <a:t>）</a:t>
-            </a:r>
-            <a:endParaRPr lang="en-US" altLang="ja-JP" sz="2400" dirty="0">
-              <a:latin typeface="HGS創英角ｺﾞｼｯｸUB" panose="020B0900000000000000" pitchFamily="50" charset="-128"/>
-              <a:ea typeface="HGS創英角ｺﾞｼｯｸUB" panose="020B0900000000000000" pitchFamily="50" charset="-128"/>
-            </a:endParaRPr>
-          </a:p>
-          <a:p>
-            <a:r>
-              <a:rPr lang="ja-JP" altLang="en-US" sz="2400" dirty="0">
-                <a:latin typeface="HGS創英角ｺﾞｼｯｸUB" panose="020B0900000000000000" pitchFamily="50" charset="-128"/>
-                <a:ea typeface="HGS創英角ｺﾞｼｯｸUB" panose="020B0900000000000000" pitchFamily="50" charset="-128"/>
-              </a:rPr>
-              <a:t>・ゲーム展示会（</a:t>
-            </a:r>
-            <a:r>
-              <a:rPr lang="en-US" altLang="ja-JP" sz="2400" dirty="0">
-                <a:latin typeface="HGS創英角ｺﾞｼｯｸUB" panose="020B0900000000000000" pitchFamily="50" charset="-128"/>
-                <a:ea typeface="HGS創英角ｺﾞｼｯｸUB" panose="020B0900000000000000" pitchFamily="50" charset="-128"/>
-              </a:rPr>
-              <a:t>1</a:t>
-            </a:r>
-            <a:r>
-              <a:rPr lang="ja-JP" altLang="en-US" sz="2400" dirty="0">
-                <a:latin typeface="HGS創英角ｺﾞｼｯｸUB" panose="020B0900000000000000" pitchFamily="50" charset="-128"/>
-                <a:ea typeface="HGS創英角ｺﾞｼｯｸUB" panose="020B0900000000000000" pitchFamily="50" charset="-128"/>
-              </a:rPr>
-              <a:t>月ごろ、福岡校）</a:t>
-            </a:r>
-            <a:endParaRPr lang="en-US" altLang="ja-JP" sz="2400" dirty="0">
-              <a:latin typeface="HGS創英角ｺﾞｼｯｸUB" panose="020B0900000000000000" pitchFamily="50" charset="-128"/>
-              <a:ea typeface="HGS創英角ｺﾞｼｯｸUB" panose="020B0900000000000000" pitchFamily="50" charset="-128"/>
-            </a:endParaRPr>
-          </a:p>
-          <a:p>
-            <a:r>
-              <a:rPr lang="ja-JP" altLang="en-US" sz="2400" dirty="0">
-                <a:latin typeface="HGS創英角ｺﾞｼｯｸUB" panose="020B0900000000000000" pitchFamily="50" charset="-128"/>
-                <a:ea typeface="HGS創英角ｺﾞｼｯｸUB" panose="020B0900000000000000" pitchFamily="50" charset="-128"/>
-              </a:rPr>
-              <a:t>・</a:t>
-            </a:r>
-            <a:r>
-              <a:rPr lang="en-US" altLang="ja-JP" sz="2400" dirty="0">
-                <a:latin typeface="HGS創英角ｺﾞｼｯｸUB" panose="020B0900000000000000" pitchFamily="50" charset="-128"/>
-                <a:ea typeface="HGS創英角ｺﾞｼｯｸUB" panose="020B0900000000000000" pitchFamily="50" charset="-128"/>
-              </a:rPr>
-              <a:t>CEDEC+KYUSHU</a:t>
-            </a:r>
-            <a:r>
-              <a:rPr lang="ja-JP" altLang="en-US" sz="2400" dirty="0">
-                <a:latin typeface="HGS創英角ｺﾞｼｯｸUB" panose="020B0900000000000000" pitchFamily="50" charset="-128"/>
-                <a:ea typeface="HGS創英角ｺﾞｼｯｸUB" panose="020B0900000000000000" pitchFamily="50" charset="-128"/>
-              </a:rPr>
-              <a:t>（</a:t>
-            </a:r>
-            <a:r>
-              <a:rPr lang="en-US" altLang="ja-JP" sz="2400" dirty="0">
-                <a:latin typeface="HGS創英角ｺﾞｼｯｸUB" panose="020B0900000000000000" pitchFamily="50" charset="-128"/>
-                <a:ea typeface="HGS創英角ｺﾞｼｯｸUB" panose="020B0900000000000000" pitchFamily="50" charset="-128"/>
-              </a:rPr>
-              <a:t>11</a:t>
-            </a:r>
-            <a:r>
-              <a:rPr lang="ja-JP" altLang="en-US" sz="2400" dirty="0">
-                <a:latin typeface="HGS創英角ｺﾞｼｯｸUB" panose="020B0900000000000000" pitchFamily="50" charset="-128"/>
-                <a:ea typeface="HGS創英角ｺﾞｼｯｸUB" panose="020B0900000000000000" pitchFamily="50" charset="-128"/>
-              </a:rPr>
-              <a:t>月末、九州産業大学）</a:t>
-            </a:r>
-            <a:endParaRPr lang="en-US" altLang="ja-JP" sz="2400" dirty="0">
-              <a:latin typeface="HGS創英角ｺﾞｼｯｸUB" panose="020B0900000000000000" pitchFamily="50" charset="-128"/>
-              <a:ea typeface="HGS創英角ｺﾞｼｯｸUB" panose="020B0900000000000000" pitchFamily="50" charset="-128"/>
-            </a:endParaRPr>
-          </a:p>
-          <a:p>
-            <a:endParaRPr lang="en-US" altLang="ja-JP" sz="2400" dirty="0">
-              <a:latin typeface="HGS創英角ｺﾞｼｯｸUB" panose="020B0900000000000000" pitchFamily="50" charset="-128"/>
-              <a:ea typeface="HGS創英角ｺﾞｼｯｸUB" panose="020B0900000000000000" pitchFamily="50" charset="-128"/>
-            </a:endParaRPr>
-          </a:p>
-          <a:p>
-            <a:r>
-              <a:rPr lang="en-US" altLang="ja-JP" sz="2400" dirty="0">
-                <a:latin typeface="HGS創英角ｺﾞｼｯｸUB" panose="020B0900000000000000" pitchFamily="50" charset="-128"/>
-                <a:ea typeface="HGS創英角ｺﾞｼｯｸUB" panose="020B0900000000000000" pitchFamily="50" charset="-128"/>
-              </a:rPr>
-              <a:t>※</a:t>
-            </a:r>
-            <a:r>
-              <a:rPr lang="ja-JP" altLang="en-US" sz="2400" dirty="0">
-                <a:latin typeface="HGS創英角ｺﾞｼｯｸUB" panose="020B0900000000000000" pitchFamily="50" charset="-128"/>
-                <a:ea typeface="HGS創英角ｺﾞｼｯｸUB" panose="020B0900000000000000" pitchFamily="50" charset="-128"/>
-              </a:rPr>
-              <a:t>もちろんクラスメイトもライバルになります</a:t>
+              <a:t>就職活動は最速では２年生の秋にははじまります。</a:t>
+            </a:r>
+            <a:endParaRPr lang="en-US" altLang="ja-JP" sz="2400" dirty="0">
+              <a:latin typeface="HGS創英角ｺﾞｼｯｸUB" panose="020B0900000000000000" pitchFamily="50" charset="-128"/>
+              <a:ea typeface="HGS創英角ｺﾞｼｯｸUB" panose="020B0900000000000000" pitchFamily="50" charset="-128"/>
+            </a:endParaRPr>
+          </a:p>
+          <a:p>
+            <a:r>
+              <a:rPr lang="ja-JP" altLang="en-US" sz="2400" dirty="0">
+                <a:latin typeface="HGS創英角ｺﾞｼｯｸUB" panose="020B0900000000000000" pitchFamily="50" charset="-128"/>
+                <a:ea typeface="HGS創英角ｺﾞｼｯｸUB" panose="020B0900000000000000" pitchFamily="50" charset="-128"/>
+              </a:rPr>
+              <a:t>早い人は冬休み前に内定を取ることもあります。</a:t>
+            </a:r>
+            <a:endParaRPr lang="en-US" altLang="ja-JP" sz="2400" dirty="0">
+              <a:latin typeface="HGS創英角ｺﾞｼｯｸUB" panose="020B0900000000000000" pitchFamily="50" charset="-128"/>
+              <a:ea typeface="HGS創英角ｺﾞｼｯｸUB" panose="020B0900000000000000" pitchFamily="50" charset="-128"/>
+            </a:endParaRPr>
+          </a:p>
+          <a:p>
+            <a:endParaRPr lang="en-US" altLang="ja-JP" sz="2400" dirty="0">
+              <a:latin typeface="HGS創英角ｺﾞｼｯｸUB" panose="020B0900000000000000" pitchFamily="50" charset="-128"/>
+              <a:ea typeface="HGS創英角ｺﾞｼｯｸUB" panose="020B0900000000000000" pitchFamily="50" charset="-128"/>
+            </a:endParaRPr>
+          </a:p>
+          <a:p>
+            <a:r>
+              <a:rPr lang="ja-JP" altLang="en-US" sz="2400" dirty="0">
+                <a:latin typeface="HGS創英角ｺﾞｼｯｸUB" panose="020B0900000000000000" pitchFamily="50" charset="-128"/>
+                <a:ea typeface="HGS創英角ｺﾞｼｯｸUB" panose="020B0900000000000000" pitchFamily="50" charset="-128"/>
+              </a:rPr>
+              <a:t>残された時間は短いですので、毎日を大切に過ごしましょう。</a:t>
             </a:r>
             <a:endParaRPr lang="en-US" altLang="ja-JP" sz="2400" dirty="0">
               <a:latin typeface="HGS創英角ｺﾞｼｯｸUB" panose="020B0900000000000000" pitchFamily="50" charset="-128"/>
@@ -9117,7 +9089,7 @@
     </p:spTree>
     <p:extLst>
       <p:ext uri="{BB962C8B-B14F-4D97-AF65-F5344CB8AC3E}">
-        <p14:creationId xmlns:p14="http://schemas.microsoft.com/office/powerpoint/2010/main" val="2523051170"/>
+        <p14:creationId xmlns:p14="http://schemas.microsoft.com/office/powerpoint/2010/main" val="1746151252"/>
       </p:ext>
     </p:extLst>
   </p:cSld>
@@ -9417,7 +9389,7 @@
         <p:spPr>
           <a:xfrm>
             <a:off x="567542" y="491954"/>
-            <a:ext cx="2656496" cy="584775"/>
+            <a:ext cx="1832553" cy="584775"/>
           </a:xfrm>
           <a:prstGeom prst="rect">
             <a:avLst/>
@@ -9435,7 +9407,7 @@
                 <a:latin typeface="HGS創英角ｺﾞｼｯｸUB" panose="020B0900000000000000" pitchFamily="50" charset="-128"/>
                 <a:ea typeface="HGS創英角ｺﾞｼｯｸUB" panose="020B0900000000000000" pitchFamily="50" charset="-128"/>
               </a:rPr>
-              <a:t>就職活動時期</a:t>
+              <a:t>さいごに</a:t>
             </a:r>
             <a:endParaRPr kumimoji="1" lang="en-US" altLang="ja-JP" sz="3200" b="1" u="sng" dirty="0">
               <a:latin typeface="HGS創英角ｺﾞｼｯｸUB" panose="020B0900000000000000" pitchFamily="50" charset="-128"/>
@@ -9459,7 +9431,7 @@
         <p:spPr>
           <a:xfrm>
             <a:off x="567542" y="1216429"/>
-            <a:ext cx="8802410" cy="1569660"/>
+            <a:ext cx="6340197" cy="5262979"/>
           </a:xfrm>
           <a:prstGeom prst="rect">
             <a:avLst/>
@@ -9477,39 +9449,155 @@
                 <a:latin typeface="HGS創英角ｺﾞｼｯｸUB" panose="020B0900000000000000" pitchFamily="50" charset="-128"/>
                 <a:ea typeface="HGS創英角ｺﾞｼｯｸUB" panose="020B0900000000000000" pitchFamily="50" charset="-128"/>
               </a:rPr>
-              <a:t>就職活動は最速では２年生の秋にははじまります。</a:t>
-            </a:r>
-            <a:endParaRPr lang="en-US" altLang="ja-JP" sz="2400" dirty="0">
-              <a:latin typeface="HGS創英角ｺﾞｼｯｸUB" panose="020B0900000000000000" pitchFamily="50" charset="-128"/>
-              <a:ea typeface="HGS創英角ｺﾞｼｯｸUB" panose="020B0900000000000000" pitchFamily="50" charset="-128"/>
-            </a:endParaRPr>
-          </a:p>
-          <a:p>
-            <a:r>
-              <a:rPr lang="ja-JP" altLang="en-US" sz="2400" dirty="0">
-                <a:latin typeface="HGS創英角ｺﾞｼｯｸUB" panose="020B0900000000000000" pitchFamily="50" charset="-128"/>
-                <a:ea typeface="HGS創英角ｺﾞｼｯｸUB" panose="020B0900000000000000" pitchFamily="50" charset="-128"/>
-              </a:rPr>
-              <a:t>早い人は冬休み前に内定を取ることもあります。</a:t>
-            </a:r>
-            <a:endParaRPr lang="en-US" altLang="ja-JP" sz="2400" dirty="0">
-              <a:latin typeface="HGS創英角ｺﾞｼｯｸUB" panose="020B0900000000000000" pitchFamily="50" charset="-128"/>
-              <a:ea typeface="HGS創英角ｺﾞｼｯｸUB" panose="020B0900000000000000" pitchFamily="50" charset="-128"/>
-            </a:endParaRPr>
-          </a:p>
-          <a:p>
-            <a:endParaRPr lang="en-US" altLang="ja-JP" sz="2400" dirty="0">
-              <a:latin typeface="HGS創英角ｺﾞｼｯｸUB" panose="020B0900000000000000" pitchFamily="50" charset="-128"/>
-              <a:ea typeface="HGS創英角ｺﾞｼｯｸUB" panose="020B0900000000000000" pitchFamily="50" charset="-128"/>
-            </a:endParaRPr>
-          </a:p>
-          <a:p>
-            <a:r>
-              <a:rPr lang="ja-JP" altLang="en-US" sz="2400" dirty="0">
-                <a:latin typeface="HGS創英角ｺﾞｼｯｸUB" panose="020B0900000000000000" pitchFamily="50" charset="-128"/>
-                <a:ea typeface="HGS創英角ｺﾞｼｯｸUB" panose="020B0900000000000000" pitchFamily="50" charset="-128"/>
-              </a:rPr>
-              <a:t>残された時間は短いですので、毎日を大切に過ごしましょう。</a:t>
+              <a:t>明日の予定は以下の通りです。</a:t>
+            </a:r>
+            <a:endParaRPr lang="en-US" altLang="ja-JP" sz="2400" dirty="0">
+              <a:latin typeface="HGS創英角ｺﾞｼｯｸUB" panose="020B0900000000000000" pitchFamily="50" charset="-128"/>
+              <a:ea typeface="HGS創英角ｺﾞｼｯｸUB" panose="020B0900000000000000" pitchFamily="50" charset="-128"/>
+            </a:endParaRPr>
+          </a:p>
+          <a:p>
+            <a:endParaRPr lang="en-US" altLang="ja-JP" sz="2400" dirty="0">
+              <a:latin typeface="HGS創英角ｺﾞｼｯｸUB" panose="020B0900000000000000" pitchFamily="50" charset="-128"/>
+              <a:ea typeface="HGS創英角ｺﾞｼｯｸUB" panose="020B0900000000000000" pitchFamily="50" charset="-128"/>
+            </a:endParaRPr>
+          </a:p>
+          <a:p>
+            <a:r>
+              <a:rPr lang="ja-JP" altLang="en-US" sz="2400" dirty="0">
+                <a:latin typeface="HGS創英角ｺﾞｼｯｸUB" panose="020B0900000000000000" pitchFamily="50" charset="-128"/>
+                <a:ea typeface="HGS創英角ｺﾞｼｯｸUB" panose="020B0900000000000000" pitchFamily="50" charset="-128"/>
+              </a:rPr>
+              <a:t>１限目</a:t>
+            </a:r>
+            <a:endParaRPr lang="en-US" altLang="ja-JP" sz="2400" dirty="0">
+              <a:latin typeface="HGS創英角ｺﾞｼｯｸUB" panose="020B0900000000000000" pitchFamily="50" charset="-128"/>
+              <a:ea typeface="HGS創英角ｺﾞｼｯｸUB" panose="020B0900000000000000" pitchFamily="50" charset="-128"/>
+            </a:endParaRPr>
+          </a:p>
+          <a:p>
+            <a:r>
+              <a:rPr lang="ja-JP" altLang="en-US" sz="2400" dirty="0">
+                <a:latin typeface="HGS創英角ｺﾞｼｯｸUB" panose="020B0900000000000000" pitchFamily="50" charset="-128"/>
+                <a:ea typeface="HGS創英角ｺﾞｼｯｸUB" panose="020B0900000000000000" pitchFamily="50" charset="-128"/>
+              </a:rPr>
+              <a:t>　楽しい感じでグループワーク</a:t>
+            </a:r>
+            <a:endParaRPr lang="en-US" altLang="ja-JP" sz="2400" dirty="0">
+              <a:latin typeface="HGS創英角ｺﾞｼｯｸUB" panose="020B0900000000000000" pitchFamily="50" charset="-128"/>
+              <a:ea typeface="HGS創英角ｺﾞｼｯｸUB" panose="020B0900000000000000" pitchFamily="50" charset="-128"/>
+            </a:endParaRPr>
+          </a:p>
+          <a:p>
+            <a:r>
+              <a:rPr lang="ja-JP" altLang="en-US" sz="2400" dirty="0">
+                <a:latin typeface="HGS創英角ｺﾞｼｯｸUB" panose="020B0900000000000000" pitchFamily="50" charset="-128"/>
+                <a:ea typeface="HGS創英角ｺﾞｼｯｸUB" panose="020B0900000000000000" pitchFamily="50" charset="-128"/>
+              </a:rPr>
+              <a:t>　みんなで１つのテーマについて議論しよう</a:t>
+            </a:r>
+            <a:endParaRPr lang="en-US" altLang="ja-JP" sz="2400" dirty="0">
+              <a:latin typeface="HGS創英角ｺﾞｼｯｸUB" panose="020B0900000000000000" pitchFamily="50" charset="-128"/>
+              <a:ea typeface="HGS創英角ｺﾞｼｯｸUB" panose="020B0900000000000000" pitchFamily="50" charset="-128"/>
+            </a:endParaRPr>
+          </a:p>
+          <a:p>
+            <a:r>
+              <a:rPr lang="ja-JP" altLang="en-US" sz="2400" dirty="0">
+                <a:latin typeface="HGS創英角ｺﾞｼｯｸUB" panose="020B0900000000000000" pitchFamily="50" charset="-128"/>
+                <a:ea typeface="HGS創英角ｺﾞｼｯｸUB" panose="020B0900000000000000" pitchFamily="50" charset="-128"/>
+              </a:rPr>
+              <a:t>　</a:t>
+            </a:r>
+            <a:endParaRPr lang="en-US" altLang="ja-JP" sz="2400" dirty="0">
+              <a:latin typeface="HGS創英角ｺﾞｼｯｸUB" panose="020B0900000000000000" pitchFamily="50" charset="-128"/>
+              <a:ea typeface="HGS創英角ｺﾞｼｯｸUB" panose="020B0900000000000000" pitchFamily="50" charset="-128"/>
+            </a:endParaRPr>
+          </a:p>
+          <a:p>
+            <a:r>
+              <a:rPr lang="ja-JP" altLang="en-US" sz="2400" dirty="0">
+                <a:latin typeface="HGS創英角ｺﾞｼｯｸUB" panose="020B0900000000000000" pitchFamily="50" charset="-128"/>
+                <a:ea typeface="HGS創英角ｺﾞｼｯｸUB" panose="020B0900000000000000" pitchFamily="50" charset="-128"/>
+              </a:rPr>
+              <a:t>２限目</a:t>
+            </a:r>
+            <a:endParaRPr lang="en-US" altLang="ja-JP" sz="2400" dirty="0">
+              <a:latin typeface="HGS創英角ｺﾞｼｯｸUB" panose="020B0900000000000000" pitchFamily="50" charset="-128"/>
+              <a:ea typeface="HGS創英角ｺﾞｼｯｸUB" panose="020B0900000000000000" pitchFamily="50" charset="-128"/>
+            </a:endParaRPr>
+          </a:p>
+          <a:p>
+            <a:r>
+              <a:rPr lang="ja-JP" altLang="en-US" sz="2400" dirty="0">
+                <a:latin typeface="HGS創英角ｺﾞｼｯｸUB" panose="020B0900000000000000" pitchFamily="50" charset="-128"/>
+                <a:ea typeface="HGS創英角ｺﾞｼｯｸUB" panose="020B0900000000000000" pitchFamily="50" charset="-128"/>
+              </a:rPr>
+              <a:t>　大好きなものプレゼン選手権　資料作成</a:t>
+            </a:r>
+            <a:endParaRPr lang="en-US" altLang="ja-JP" sz="2400" dirty="0">
+              <a:latin typeface="HGS創英角ｺﾞｼｯｸUB" panose="020B0900000000000000" pitchFamily="50" charset="-128"/>
+              <a:ea typeface="HGS創英角ｺﾞｼｯｸUB" panose="020B0900000000000000" pitchFamily="50" charset="-128"/>
+            </a:endParaRPr>
+          </a:p>
+          <a:p>
+            <a:endParaRPr lang="en-US" altLang="ja-JP" sz="2400" dirty="0">
+              <a:latin typeface="HGS創英角ｺﾞｼｯｸUB" panose="020B0900000000000000" pitchFamily="50" charset="-128"/>
+              <a:ea typeface="HGS創英角ｺﾞｼｯｸUB" panose="020B0900000000000000" pitchFamily="50" charset="-128"/>
+            </a:endParaRPr>
+          </a:p>
+          <a:p>
+            <a:r>
+              <a:rPr lang="ja-JP" altLang="en-US" sz="2400" dirty="0">
+                <a:latin typeface="HGS創英角ｺﾞｼｯｸUB" panose="020B0900000000000000" pitchFamily="50" charset="-128"/>
+                <a:ea typeface="HGS創英角ｺﾞｼｯｸUB" panose="020B0900000000000000" pitchFamily="50" charset="-128"/>
+              </a:rPr>
+              <a:t>３限目</a:t>
+            </a:r>
+            <a:endParaRPr lang="en-US" altLang="ja-JP" sz="2400" dirty="0">
+              <a:latin typeface="HGS創英角ｺﾞｼｯｸUB" panose="020B0900000000000000" pitchFamily="50" charset="-128"/>
+              <a:ea typeface="HGS創英角ｺﾞｼｯｸUB" panose="020B0900000000000000" pitchFamily="50" charset="-128"/>
+            </a:endParaRPr>
+          </a:p>
+          <a:p>
+            <a:r>
+              <a:rPr lang="ja-JP" altLang="en-US" sz="2400" dirty="0">
+                <a:latin typeface="HGS創英角ｺﾞｼｯｸUB" panose="020B0900000000000000" pitchFamily="50" charset="-128"/>
+                <a:ea typeface="HGS創英角ｺﾞｼｯｸUB" panose="020B0900000000000000" pitchFamily="50" charset="-128"/>
+              </a:rPr>
+              <a:t>　大好きなものプレゼン選手権　発表会</a:t>
+            </a:r>
+            <a:endParaRPr lang="en-US" altLang="ja-JP" sz="2400" dirty="0">
+              <a:latin typeface="HGS創英角ｺﾞｼｯｸUB" panose="020B0900000000000000" pitchFamily="50" charset="-128"/>
+              <a:ea typeface="HGS創英角ｺﾞｼｯｸUB" panose="020B0900000000000000" pitchFamily="50" charset="-128"/>
+            </a:endParaRPr>
+          </a:p>
+          <a:p>
+            <a:endParaRPr lang="en-US" altLang="ja-JP" sz="2400" dirty="0">
+              <a:latin typeface="HGS創英角ｺﾞｼｯｸUB" panose="020B0900000000000000" pitchFamily="50" charset="-128"/>
+              <a:ea typeface="HGS創英角ｺﾞｼｯｸUB" panose="020B0900000000000000" pitchFamily="50" charset="-128"/>
+            </a:endParaRPr>
+          </a:p>
+          <a:p>
+            <a:r>
+              <a:rPr lang="ja-JP" altLang="en-US" sz="2400" dirty="0">
+                <a:latin typeface="HGS創英角ｺﾞｼｯｸUB" panose="020B0900000000000000" pitchFamily="50" charset="-128"/>
+                <a:ea typeface="HGS創英角ｺﾞｼｯｸUB" panose="020B0900000000000000" pitchFamily="50" charset="-128"/>
+              </a:rPr>
+              <a:t>４限目</a:t>
+            </a:r>
+            <a:endParaRPr lang="en-US" altLang="ja-JP" sz="2400" dirty="0">
+              <a:latin typeface="HGS創英角ｺﾞｼｯｸUB" panose="020B0900000000000000" pitchFamily="50" charset="-128"/>
+              <a:ea typeface="HGS創英角ｺﾞｼｯｸUB" panose="020B0900000000000000" pitchFamily="50" charset="-128"/>
+            </a:endParaRPr>
+          </a:p>
+          <a:p>
+            <a:r>
+              <a:rPr lang="ja-JP" altLang="en-US" sz="2400" dirty="0">
+                <a:latin typeface="HGS創英角ｺﾞｼｯｸUB" panose="020B0900000000000000" pitchFamily="50" charset="-128"/>
+                <a:ea typeface="HGS創英角ｺﾞｼｯｸUB" panose="020B0900000000000000" pitchFamily="50" charset="-128"/>
+              </a:rPr>
+              <a:t>　企業講演　㈱サイバーコネクトツー</a:t>
             </a:r>
             <a:endParaRPr lang="en-US" altLang="ja-JP" sz="2400" dirty="0">
               <a:latin typeface="HGS創英角ｺﾞｼｯｸUB" panose="020B0900000000000000" pitchFamily="50" charset="-128"/>
@@ -9521,7 +9609,7 @@
     </p:spTree>
     <p:extLst>
       <p:ext uri="{BB962C8B-B14F-4D97-AF65-F5344CB8AC3E}">
-        <p14:creationId xmlns:p14="http://schemas.microsoft.com/office/powerpoint/2010/main" val="1746151252"/>
+        <p14:creationId xmlns:p14="http://schemas.microsoft.com/office/powerpoint/2010/main" val="3144968622"/>
       </p:ext>
     </p:extLst>
   </p:cSld>
@@ -9605,7 +9693,7 @@
         <p:spPr>
           <a:xfrm>
             <a:off x="567542" y="1216429"/>
-            <a:ext cx="6340197" cy="5262979"/>
+            <a:ext cx="11264622" cy="2677656"/>
           </a:xfrm>
           <a:prstGeom prst="rect">
             <a:avLst/>
@@ -9623,155 +9711,106 @@
                 <a:latin typeface="HGS創英角ｺﾞｼｯｸUB" panose="020B0900000000000000" pitchFamily="50" charset="-128"/>
                 <a:ea typeface="HGS創英角ｺﾞｼｯｸUB" panose="020B0900000000000000" pitchFamily="50" charset="-128"/>
               </a:rPr>
-              <a:t>明日の予定は以下の通りです。</a:t>
-            </a:r>
-            <a:endParaRPr lang="en-US" altLang="ja-JP" sz="2400" dirty="0">
-              <a:latin typeface="HGS創英角ｺﾞｼｯｸUB" panose="020B0900000000000000" pitchFamily="50" charset="-128"/>
-              <a:ea typeface="HGS創英角ｺﾞｼｯｸUB" panose="020B0900000000000000" pitchFamily="50" charset="-128"/>
-            </a:endParaRPr>
-          </a:p>
-          <a:p>
-            <a:endParaRPr lang="en-US" altLang="ja-JP" sz="2400" dirty="0">
-              <a:latin typeface="HGS創英角ｺﾞｼｯｸUB" panose="020B0900000000000000" pitchFamily="50" charset="-128"/>
-              <a:ea typeface="HGS創英角ｺﾞｼｯｸUB" panose="020B0900000000000000" pitchFamily="50" charset="-128"/>
-            </a:endParaRPr>
-          </a:p>
-          <a:p>
-            <a:r>
-              <a:rPr lang="ja-JP" altLang="en-US" sz="2400" dirty="0">
-                <a:latin typeface="HGS創英角ｺﾞｼｯｸUB" panose="020B0900000000000000" pitchFamily="50" charset="-128"/>
-                <a:ea typeface="HGS創英角ｺﾞｼｯｸUB" panose="020B0900000000000000" pitchFamily="50" charset="-128"/>
-              </a:rPr>
-              <a:t>１限目</a:t>
-            </a:r>
-            <a:endParaRPr lang="en-US" altLang="ja-JP" sz="2400" dirty="0">
-              <a:latin typeface="HGS創英角ｺﾞｼｯｸUB" panose="020B0900000000000000" pitchFamily="50" charset="-128"/>
-              <a:ea typeface="HGS創英角ｺﾞｼｯｸUB" panose="020B0900000000000000" pitchFamily="50" charset="-128"/>
-            </a:endParaRPr>
-          </a:p>
-          <a:p>
-            <a:r>
-              <a:rPr lang="ja-JP" altLang="en-US" sz="2400" dirty="0">
-                <a:latin typeface="HGS創英角ｺﾞｼｯｸUB" panose="020B0900000000000000" pitchFamily="50" charset="-128"/>
-                <a:ea typeface="HGS創英角ｺﾞｼｯｸUB" panose="020B0900000000000000" pitchFamily="50" charset="-128"/>
-              </a:rPr>
-              <a:t>　楽しい感じでグループワーク</a:t>
-            </a:r>
-            <a:endParaRPr lang="en-US" altLang="ja-JP" sz="2400" dirty="0">
-              <a:latin typeface="HGS創英角ｺﾞｼｯｸUB" panose="020B0900000000000000" pitchFamily="50" charset="-128"/>
-              <a:ea typeface="HGS創英角ｺﾞｼｯｸUB" panose="020B0900000000000000" pitchFamily="50" charset="-128"/>
-            </a:endParaRPr>
-          </a:p>
-          <a:p>
-            <a:r>
-              <a:rPr lang="ja-JP" altLang="en-US" sz="2400" dirty="0">
-                <a:latin typeface="HGS創英角ｺﾞｼｯｸUB" panose="020B0900000000000000" pitchFamily="50" charset="-128"/>
-                <a:ea typeface="HGS創英角ｺﾞｼｯｸUB" panose="020B0900000000000000" pitchFamily="50" charset="-128"/>
-              </a:rPr>
-              <a:t>　みんなで１つのテーマについて議論しよう</a:t>
-            </a:r>
-            <a:endParaRPr lang="en-US" altLang="ja-JP" sz="2400" dirty="0">
-              <a:latin typeface="HGS創英角ｺﾞｼｯｸUB" panose="020B0900000000000000" pitchFamily="50" charset="-128"/>
-              <a:ea typeface="HGS創英角ｺﾞｼｯｸUB" panose="020B0900000000000000" pitchFamily="50" charset="-128"/>
-            </a:endParaRPr>
-          </a:p>
-          <a:p>
-            <a:r>
-              <a:rPr lang="ja-JP" altLang="en-US" sz="2400" dirty="0">
-                <a:latin typeface="HGS創英角ｺﾞｼｯｸUB" panose="020B0900000000000000" pitchFamily="50" charset="-128"/>
-                <a:ea typeface="HGS創英角ｺﾞｼｯｸUB" panose="020B0900000000000000" pitchFamily="50" charset="-128"/>
-              </a:rPr>
-              <a:t>　</a:t>
-            </a:r>
-            <a:endParaRPr lang="en-US" altLang="ja-JP" sz="2400" dirty="0">
-              <a:latin typeface="HGS創英角ｺﾞｼｯｸUB" panose="020B0900000000000000" pitchFamily="50" charset="-128"/>
-              <a:ea typeface="HGS創英角ｺﾞｼｯｸUB" panose="020B0900000000000000" pitchFamily="50" charset="-128"/>
-            </a:endParaRPr>
-          </a:p>
-          <a:p>
-            <a:r>
-              <a:rPr lang="ja-JP" altLang="en-US" sz="2400" dirty="0">
-                <a:latin typeface="HGS創英角ｺﾞｼｯｸUB" panose="020B0900000000000000" pitchFamily="50" charset="-128"/>
-                <a:ea typeface="HGS創英角ｺﾞｼｯｸUB" panose="020B0900000000000000" pitchFamily="50" charset="-128"/>
-              </a:rPr>
-              <a:t>２限目</a:t>
-            </a:r>
-            <a:endParaRPr lang="en-US" altLang="ja-JP" sz="2400" dirty="0">
-              <a:latin typeface="HGS創英角ｺﾞｼｯｸUB" panose="020B0900000000000000" pitchFamily="50" charset="-128"/>
-              <a:ea typeface="HGS創英角ｺﾞｼｯｸUB" panose="020B0900000000000000" pitchFamily="50" charset="-128"/>
-            </a:endParaRPr>
-          </a:p>
-          <a:p>
-            <a:r>
-              <a:rPr lang="ja-JP" altLang="en-US" sz="2400" dirty="0">
-                <a:latin typeface="HGS創英角ｺﾞｼｯｸUB" panose="020B0900000000000000" pitchFamily="50" charset="-128"/>
-                <a:ea typeface="HGS創英角ｺﾞｼｯｸUB" panose="020B0900000000000000" pitchFamily="50" charset="-128"/>
-              </a:rPr>
-              <a:t>　大好きなものプレゼン選手権　資料作成</a:t>
-            </a:r>
-            <a:endParaRPr lang="en-US" altLang="ja-JP" sz="2400" dirty="0">
-              <a:latin typeface="HGS創英角ｺﾞｼｯｸUB" panose="020B0900000000000000" pitchFamily="50" charset="-128"/>
-              <a:ea typeface="HGS創英角ｺﾞｼｯｸUB" panose="020B0900000000000000" pitchFamily="50" charset="-128"/>
-            </a:endParaRPr>
-          </a:p>
-          <a:p>
-            <a:endParaRPr lang="en-US" altLang="ja-JP" sz="2400" dirty="0">
-              <a:latin typeface="HGS創英角ｺﾞｼｯｸUB" panose="020B0900000000000000" pitchFamily="50" charset="-128"/>
-              <a:ea typeface="HGS創英角ｺﾞｼｯｸUB" panose="020B0900000000000000" pitchFamily="50" charset="-128"/>
-            </a:endParaRPr>
-          </a:p>
-          <a:p>
-            <a:r>
-              <a:rPr lang="ja-JP" altLang="en-US" sz="2400" dirty="0">
-                <a:latin typeface="HGS創英角ｺﾞｼｯｸUB" panose="020B0900000000000000" pitchFamily="50" charset="-128"/>
-                <a:ea typeface="HGS創英角ｺﾞｼｯｸUB" panose="020B0900000000000000" pitchFamily="50" charset="-128"/>
-              </a:rPr>
-              <a:t>３限目</a:t>
-            </a:r>
-            <a:endParaRPr lang="en-US" altLang="ja-JP" sz="2400" dirty="0">
-              <a:latin typeface="HGS創英角ｺﾞｼｯｸUB" panose="020B0900000000000000" pitchFamily="50" charset="-128"/>
-              <a:ea typeface="HGS創英角ｺﾞｼｯｸUB" panose="020B0900000000000000" pitchFamily="50" charset="-128"/>
-            </a:endParaRPr>
-          </a:p>
-          <a:p>
-            <a:r>
-              <a:rPr lang="ja-JP" altLang="en-US" sz="2400" dirty="0">
-                <a:latin typeface="HGS創英角ｺﾞｼｯｸUB" panose="020B0900000000000000" pitchFamily="50" charset="-128"/>
-                <a:ea typeface="HGS創英角ｺﾞｼｯｸUB" panose="020B0900000000000000" pitchFamily="50" charset="-128"/>
-              </a:rPr>
-              <a:t>　大好きなものプレゼン選手権　発表会</a:t>
-            </a:r>
-            <a:endParaRPr lang="en-US" altLang="ja-JP" sz="2400" dirty="0">
-              <a:latin typeface="HGS創英角ｺﾞｼｯｸUB" panose="020B0900000000000000" pitchFamily="50" charset="-128"/>
-              <a:ea typeface="HGS創英角ｺﾞｼｯｸUB" panose="020B0900000000000000" pitchFamily="50" charset="-128"/>
-            </a:endParaRPr>
-          </a:p>
-          <a:p>
-            <a:endParaRPr lang="en-US" altLang="ja-JP" sz="2400" dirty="0">
-              <a:latin typeface="HGS創英角ｺﾞｼｯｸUB" panose="020B0900000000000000" pitchFamily="50" charset="-128"/>
-              <a:ea typeface="HGS創英角ｺﾞｼｯｸUB" panose="020B0900000000000000" pitchFamily="50" charset="-128"/>
-            </a:endParaRPr>
-          </a:p>
-          <a:p>
-            <a:r>
-              <a:rPr lang="ja-JP" altLang="en-US" sz="2400" dirty="0">
-                <a:latin typeface="HGS創英角ｺﾞｼｯｸUB" panose="020B0900000000000000" pitchFamily="50" charset="-128"/>
-                <a:ea typeface="HGS創英角ｺﾞｼｯｸUB" panose="020B0900000000000000" pitchFamily="50" charset="-128"/>
-              </a:rPr>
-              <a:t>４限目</a:t>
-            </a:r>
-            <a:endParaRPr lang="en-US" altLang="ja-JP" sz="2400" dirty="0">
-              <a:latin typeface="HGS創英角ｺﾞｼｯｸUB" panose="020B0900000000000000" pitchFamily="50" charset="-128"/>
-              <a:ea typeface="HGS創英角ｺﾞｼｯｸUB" panose="020B0900000000000000" pitchFamily="50" charset="-128"/>
-            </a:endParaRPr>
-          </a:p>
-          <a:p>
-            <a:r>
-              <a:rPr lang="ja-JP" altLang="en-US" sz="2400" dirty="0">
-                <a:latin typeface="HGS創英角ｺﾞｼｯｸUB" panose="020B0900000000000000" pitchFamily="50" charset="-128"/>
-                <a:ea typeface="HGS創英角ｺﾞｼｯｸUB" panose="020B0900000000000000" pitchFamily="50" charset="-128"/>
-              </a:rPr>
-              <a:t>　企業講演　㈱サイバーコネクトツー</a:t>
+              <a:t>明日の</a:t>
+            </a:r>
+            <a:r>
+              <a:rPr lang="en-US" altLang="ja-JP" sz="2400" dirty="0">
+                <a:latin typeface="HGS創英角ｺﾞｼｯｸUB" panose="020B0900000000000000" pitchFamily="50" charset="-128"/>
+                <a:ea typeface="HGS創英角ｺﾞｼｯｸUB" panose="020B0900000000000000" pitchFamily="50" charset="-128"/>
+              </a:rPr>
+              <a:t>15</a:t>
+            </a:r>
+            <a:r>
+              <a:rPr lang="ja-JP" altLang="en-US" sz="2400" dirty="0">
+                <a:latin typeface="HGS創英角ｺﾞｼｯｸUB" panose="020B0900000000000000" pitchFamily="50" charset="-128"/>
+                <a:ea typeface="HGS創英角ｺﾞｼｯｸUB" panose="020B0900000000000000" pitchFamily="50" charset="-128"/>
+              </a:rPr>
+              <a:t>：</a:t>
+            </a:r>
+            <a:r>
+              <a:rPr lang="en-US" altLang="ja-JP" sz="2400" dirty="0">
+                <a:latin typeface="HGS創英角ｺﾞｼｯｸUB" panose="020B0900000000000000" pitchFamily="50" charset="-128"/>
+                <a:ea typeface="HGS創英角ｺﾞｼｯｸUB" panose="020B0900000000000000" pitchFamily="50" charset="-128"/>
+              </a:rPr>
+              <a:t>30</a:t>
+            </a:r>
+            <a:r>
+              <a:rPr lang="ja-JP" altLang="en-US" sz="2400" dirty="0">
+                <a:latin typeface="HGS創英角ｺﾞｼｯｸUB" panose="020B0900000000000000" pitchFamily="50" charset="-128"/>
+                <a:ea typeface="HGS創英角ｺﾞｼｯｸUB" panose="020B0900000000000000" pitchFamily="50" charset="-128"/>
+              </a:rPr>
+              <a:t>より、</a:t>
+            </a:r>
+            <a:endParaRPr lang="en-US" altLang="ja-JP" sz="2400" dirty="0">
+              <a:latin typeface="HGS創英角ｺﾞｼｯｸUB" panose="020B0900000000000000" pitchFamily="50" charset="-128"/>
+              <a:ea typeface="HGS創英角ｺﾞｼｯｸUB" panose="020B0900000000000000" pitchFamily="50" charset="-128"/>
+            </a:endParaRPr>
+          </a:p>
+          <a:p>
+            <a:r>
+              <a:rPr lang="ja-JP" altLang="en-US" sz="2400" dirty="0">
+                <a:latin typeface="HGS創英角ｺﾞｼｯｸUB" panose="020B0900000000000000" pitchFamily="50" charset="-128"/>
+                <a:ea typeface="HGS創英角ｺﾞｼｯｸUB" panose="020B0900000000000000" pitchFamily="50" charset="-128"/>
+              </a:rPr>
+              <a:t>福岡のゲーム会社である㈱サイバーコネクトツー様の企業講演があります。</a:t>
+            </a:r>
+            <a:endParaRPr lang="en-US" altLang="ja-JP" sz="2400" dirty="0">
+              <a:latin typeface="HGS創英角ｺﾞｼｯｸUB" panose="020B0900000000000000" pitchFamily="50" charset="-128"/>
+              <a:ea typeface="HGS創英角ｺﾞｼｯｸUB" panose="020B0900000000000000" pitchFamily="50" charset="-128"/>
+            </a:endParaRPr>
+          </a:p>
+          <a:p>
+            <a:r>
+              <a:rPr lang="ja-JP" altLang="en-US" sz="2400" dirty="0">
+                <a:latin typeface="HGS創英角ｺﾞｼｯｸUB" panose="020B0900000000000000" pitchFamily="50" charset="-128"/>
+                <a:ea typeface="HGS創英角ｺﾞｼｯｸUB" panose="020B0900000000000000" pitchFamily="50" charset="-128"/>
+              </a:rPr>
+              <a:t>このように企業から直接講演をすることが今後も多くありますので、</a:t>
+            </a:r>
+            <a:endParaRPr lang="en-US" altLang="ja-JP" sz="2400" dirty="0">
+              <a:latin typeface="HGS創英角ｺﾞｼｯｸUB" panose="020B0900000000000000" pitchFamily="50" charset="-128"/>
+              <a:ea typeface="HGS創英角ｺﾞｼｯｸUB" panose="020B0900000000000000" pitchFamily="50" charset="-128"/>
+            </a:endParaRPr>
+          </a:p>
+          <a:p>
+            <a:r>
+              <a:rPr lang="ja-JP" altLang="en-US" sz="2400" dirty="0">
+                <a:latin typeface="HGS創英角ｺﾞｼｯｸUB" panose="020B0900000000000000" pitchFamily="50" charset="-128"/>
+                <a:ea typeface="HGS創英角ｺﾞｼｯｸUB" panose="020B0900000000000000" pitchFamily="50" charset="-128"/>
+              </a:rPr>
+              <a:t>積極的に参加し、モチベーションとしましょう。</a:t>
+            </a:r>
+            <a:endParaRPr lang="en-US" altLang="ja-JP" sz="2400" dirty="0">
+              <a:latin typeface="HGS創英角ｺﾞｼｯｸUB" panose="020B0900000000000000" pitchFamily="50" charset="-128"/>
+              <a:ea typeface="HGS創英角ｺﾞｼｯｸUB" panose="020B0900000000000000" pitchFamily="50" charset="-128"/>
+            </a:endParaRPr>
+          </a:p>
+          <a:p>
+            <a:endParaRPr lang="en-US" altLang="ja-JP" sz="2400" dirty="0">
+              <a:latin typeface="HGS創英角ｺﾞｼｯｸUB" panose="020B0900000000000000" pitchFamily="50" charset="-128"/>
+              <a:ea typeface="HGS創英角ｺﾞｼｯｸUB" panose="020B0900000000000000" pitchFamily="50" charset="-128"/>
+            </a:endParaRPr>
+          </a:p>
+          <a:p>
+            <a:r>
+              <a:rPr lang="ja-JP" altLang="en-US" sz="2400" dirty="0">
+                <a:latin typeface="HGS創英角ｺﾞｼｯｸUB" panose="020B0900000000000000" pitchFamily="50" charset="-128"/>
+                <a:ea typeface="HGS創英角ｺﾞｼｯｸUB" panose="020B0900000000000000" pitchFamily="50" charset="-128"/>
+              </a:rPr>
+              <a:t>また、企業講演に参加する前日には、</a:t>
+            </a:r>
+            <a:endParaRPr lang="en-US" altLang="ja-JP" sz="2400" dirty="0">
+              <a:latin typeface="HGS創英角ｺﾞｼｯｸUB" panose="020B0900000000000000" pitchFamily="50" charset="-128"/>
+              <a:ea typeface="HGS創英角ｺﾞｼｯｸUB" panose="020B0900000000000000" pitchFamily="50" charset="-128"/>
+            </a:endParaRPr>
+          </a:p>
+          <a:p>
+            <a:r>
+              <a:rPr lang="ja-JP" altLang="en-US" sz="2400" dirty="0">
+                <a:latin typeface="HGS創英角ｺﾞｼｯｸUB" panose="020B0900000000000000" pitchFamily="50" charset="-128"/>
+                <a:ea typeface="HGS創英角ｺﾞｼｯｸUB" panose="020B0900000000000000" pitchFamily="50" charset="-128"/>
+              </a:rPr>
+              <a:t>企業のホームページなどで、どのような企業なのかを、必ず下調べしましょう。</a:t>
             </a:r>
             <a:endParaRPr lang="en-US" altLang="ja-JP" sz="2400" dirty="0">
               <a:latin typeface="HGS創英角ｺﾞｼｯｸUB" panose="020B0900000000000000" pitchFamily="50" charset="-128"/>
@@ -9783,7 +9822,7 @@
     </p:spTree>
     <p:extLst>
       <p:ext uri="{BB962C8B-B14F-4D97-AF65-F5344CB8AC3E}">
-        <p14:creationId xmlns:p14="http://schemas.microsoft.com/office/powerpoint/2010/main" val="3144968622"/>
+        <p14:creationId xmlns:p14="http://schemas.microsoft.com/office/powerpoint/2010/main" val="3042183115"/>
       </p:ext>
     </p:extLst>
   </p:cSld>
@@ -9825,7 +9864,7 @@
         <p:spPr>
           <a:xfrm>
             <a:off x="567542" y="491954"/>
-            <a:ext cx="1832553" cy="584775"/>
+            <a:ext cx="3068469" cy="584775"/>
           </a:xfrm>
           <a:prstGeom prst="rect">
             <a:avLst/>
@@ -9843,7 +9882,7 @@
                 <a:latin typeface="HGS創英角ｺﾞｼｯｸUB" panose="020B0900000000000000" pitchFamily="50" charset="-128"/>
                 <a:ea typeface="HGS創英角ｺﾞｼｯｸUB" panose="020B0900000000000000" pitchFamily="50" charset="-128"/>
               </a:rPr>
-              <a:t>さいごに</a:t>
+              <a:t>タイピング練習</a:t>
             </a:r>
             <a:endParaRPr kumimoji="1" lang="en-US" altLang="ja-JP" sz="3200" b="1" u="sng" dirty="0">
               <a:latin typeface="HGS創英角ｺﾞｼｯｸUB" panose="020B0900000000000000" pitchFamily="50" charset="-128"/>
@@ -9867,7 +9906,7 @@
         <p:spPr>
           <a:xfrm>
             <a:off x="567542" y="1216429"/>
-            <a:ext cx="11264622" cy="2677656"/>
+            <a:ext cx="9417963" cy="2308324"/>
           </a:xfrm>
           <a:prstGeom prst="rect">
             <a:avLst/>
@@ -9885,118 +9924,79 @@
                 <a:latin typeface="HGS創英角ｺﾞｼｯｸUB" panose="020B0900000000000000" pitchFamily="50" charset="-128"/>
                 <a:ea typeface="HGS創英角ｺﾞｼｯｸUB" panose="020B0900000000000000" pitchFamily="50" charset="-128"/>
               </a:rPr>
-              <a:t>明日の</a:t>
-            </a:r>
+              <a:t>それでは残った時間はタイピング練習をしましょう。</a:t>
+            </a:r>
+            <a:endParaRPr lang="en-US" altLang="ja-JP" sz="2400" dirty="0">
+              <a:latin typeface="HGS創英角ｺﾞｼｯｸUB" panose="020B0900000000000000" pitchFamily="50" charset="-128"/>
+              <a:ea typeface="HGS創英角ｺﾞｼｯｸUB" panose="020B0900000000000000" pitchFamily="50" charset="-128"/>
+            </a:endParaRPr>
+          </a:p>
+          <a:p>
+            <a:r>
+              <a:rPr lang="ja-JP" altLang="en-US" sz="2400" dirty="0">
+                <a:latin typeface="HGS創英角ｺﾞｼｯｸUB" panose="020B0900000000000000" pitchFamily="50" charset="-128"/>
+                <a:ea typeface="HGS創英角ｺﾞｼｯｸUB" panose="020B0900000000000000" pitchFamily="50" charset="-128"/>
+              </a:rPr>
+              <a:t>タイピングが速いほど授業に余裕が生まれ、習熟度も上がります。</a:t>
+            </a:r>
+            <a:endParaRPr lang="en-US" altLang="ja-JP" sz="2400" dirty="0">
+              <a:latin typeface="HGS創英角ｺﾞｼｯｸUB" panose="020B0900000000000000" pitchFamily="50" charset="-128"/>
+              <a:ea typeface="HGS創英角ｺﾞｼｯｸUB" panose="020B0900000000000000" pitchFamily="50" charset="-128"/>
+            </a:endParaRPr>
+          </a:p>
+          <a:p>
+            <a:r>
+              <a:rPr lang="ja-JP" altLang="en-US" sz="2400" dirty="0">
+                <a:latin typeface="HGS創英角ｺﾞｼｯｸUB" panose="020B0900000000000000" pitchFamily="50" charset="-128"/>
+                <a:ea typeface="HGS創英角ｺﾞｼｯｸUB" panose="020B0900000000000000" pitchFamily="50" charset="-128"/>
+              </a:rPr>
+              <a:t>ぜひ、お家でも練習してください。</a:t>
+            </a:r>
+            <a:endParaRPr lang="en-US" altLang="ja-JP" sz="2400" dirty="0">
+              <a:latin typeface="HGS創英角ｺﾞｼｯｸUB" panose="020B0900000000000000" pitchFamily="50" charset="-128"/>
+              <a:ea typeface="HGS創英角ｺﾞｼｯｸUB" panose="020B0900000000000000" pitchFamily="50" charset="-128"/>
+            </a:endParaRPr>
+          </a:p>
+          <a:p>
+            <a:endParaRPr lang="en-US" altLang="ja-JP" sz="2400" dirty="0">
+              <a:latin typeface="HGS創英角ｺﾞｼｯｸUB" panose="020B0900000000000000" pitchFamily="50" charset="-128"/>
+              <a:ea typeface="HGS創英角ｺﾞｼｯｸUB" panose="020B0900000000000000" pitchFamily="50" charset="-128"/>
+            </a:endParaRPr>
+          </a:p>
+          <a:p>
+            <a:r>
+              <a:rPr lang="ja-JP" altLang="en-US" sz="2400" dirty="0">
+                <a:solidFill>
+                  <a:srgbClr val="FF0000"/>
+                </a:solidFill>
+                <a:latin typeface="HGS創英角ｺﾞｼｯｸUB" panose="020B0900000000000000" pitchFamily="50" charset="-128"/>
+                <a:ea typeface="HGS創英角ｺﾞｼｯｸUB" panose="020B0900000000000000" pitchFamily="50" charset="-128"/>
+              </a:rPr>
+              <a:t>■タイピング練習ゲーム寿司打</a:t>
+            </a:r>
+            <a:endParaRPr lang="en-US" altLang="ja-JP" sz="2400" dirty="0">
+              <a:solidFill>
+                <a:srgbClr val="FF0000"/>
+              </a:solidFill>
+              <a:latin typeface="HGS創英角ｺﾞｼｯｸUB" panose="020B0900000000000000" pitchFamily="50" charset="-128"/>
+              <a:ea typeface="HGS創英角ｺﾞｼｯｸUB" panose="020B0900000000000000" pitchFamily="50" charset="-128"/>
+            </a:endParaRPr>
+          </a:p>
+          <a:p>
             <a:r>
               <a:rPr lang="en-US" altLang="ja-JP" sz="2400" dirty="0">
                 <a:latin typeface="HGS創英角ｺﾞｼｯｸUB" panose="020B0900000000000000" pitchFamily="50" charset="-128"/>
                 <a:ea typeface="HGS創英角ｺﾞｼｯｸUB" panose="020B0900000000000000" pitchFamily="50" charset="-128"/>
               </a:rPr>
-              <a:t>15</a:t>
-            </a:r>
-            <a:r>
-              <a:rPr lang="ja-JP" altLang="en-US" sz="2400" dirty="0">
-                <a:latin typeface="HGS創英角ｺﾞｼｯｸUB" panose="020B0900000000000000" pitchFamily="50" charset="-128"/>
-                <a:ea typeface="HGS創英角ｺﾞｼｯｸUB" panose="020B0900000000000000" pitchFamily="50" charset="-128"/>
-              </a:rPr>
-              <a:t>：</a:t>
-            </a:r>
-            <a:r>
-              <a:rPr lang="en-US" altLang="ja-JP" sz="2400" dirty="0">
-                <a:latin typeface="HGS創英角ｺﾞｼｯｸUB" panose="020B0900000000000000" pitchFamily="50" charset="-128"/>
-                <a:ea typeface="HGS創英角ｺﾞｼｯｸUB" panose="020B0900000000000000" pitchFamily="50" charset="-128"/>
-              </a:rPr>
-              <a:t>30</a:t>
-            </a:r>
-            <a:r>
-              <a:rPr lang="ja-JP" altLang="en-US" sz="2400" dirty="0">
-                <a:latin typeface="HGS創英角ｺﾞｼｯｸUB" panose="020B0900000000000000" pitchFamily="50" charset="-128"/>
-                <a:ea typeface="HGS創英角ｺﾞｼｯｸUB" panose="020B0900000000000000" pitchFamily="50" charset="-128"/>
-              </a:rPr>
-              <a:t>より、</a:t>
-            </a:r>
-            <a:endParaRPr lang="en-US" altLang="ja-JP" sz="2400" dirty="0">
-              <a:latin typeface="HGS創英角ｺﾞｼｯｸUB" panose="020B0900000000000000" pitchFamily="50" charset="-128"/>
-              <a:ea typeface="HGS創英角ｺﾞｼｯｸUB" panose="020B0900000000000000" pitchFamily="50" charset="-128"/>
-            </a:endParaRPr>
-          </a:p>
-          <a:p>
-            <a:r>
-              <a:rPr lang="ja-JP" altLang="en-US" sz="2400" dirty="0">
-                <a:latin typeface="HGS創英角ｺﾞｼｯｸUB" panose="020B0900000000000000" pitchFamily="50" charset="-128"/>
-                <a:ea typeface="HGS創英角ｺﾞｼｯｸUB" panose="020B0900000000000000" pitchFamily="50" charset="-128"/>
-              </a:rPr>
-              <a:t>福岡のゲーム会社である㈱サイバーコネクトツー様の企業講演があります。</a:t>
-            </a:r>
-            <a:endParaRPr lang="en-US" altLang="ja-JP" sz="2400" dirty="0">
-              <a:latin typeface="HGS創英角ｺﾞｼｯｸUB" panose="020B0900000000000000" pitchFamily="50" charset="-128"/>
-              <a:ea typeface="HGS創英角ｺﾞｼｯｸUB" panose="020B0900000000000000" pitchFamily="50" charset="-128"/>
-            </a:endParaRPr>
-          </a:p>
-          <a:p>
-            <a:r>
-              <a:rPr lang="ja-JP" altLang="en-US" sz="2400" dirty="0">
-                <a:latin typeface="HGS創英角ｺﾞｼｯｸUB" panose="020B0900000000000000" pitchFamily="50" charset="-128"/>
-                <a:ea typeface="HGS創英角ｺﾞｼｯｸUB" panose="020B0900000000000000" pitchFamily="50" charset="-128"/>
-              </a:rPr>
-              <a:t>このように企業から直接講演をすることが今後も多くありますので、</a:t>
-            </a:r>
-            <a:endParaRPr lang="en-US" altLang="ja-JP" sz="2400" dirty="0">
-              <a:latin typeface="HGS創英角ｺﾞｼｯｸUB" panose="020B0900000000000000" pitchFamily="50" charset="-128"/>
-              <a:ea typeface="HGS創英角ｺﾞｼｯｸUB" panose="020B0900000000000000" pitchFamily="50" charset="-128"/>
-            </a:endParaRPr>
-          </a:p>
-          <a:p>
-            <a:r>
-              <a:rPr lang="ja-JP" altLang="en-US" sz="2400" dirty="0">
-                <a:latin typeface="HGS創英角ｺﾞｼｯｸUB" panose="020B0900000000000000" pitchFamily="50" charset="-128"/>
-                <a:ea typeface="HGS創英角ｺﾞｼｯｸUB" panose="020B0900000000000000" pitchFamily="50" charset="-128"/>
-              </a:rPr>
-              <a:t>積極的に参加し、モチベーションとしましょう。</a:t>
-            </a:r>
-            <a:endParaRPr lang="en-US" altLang="ja-JP" sz="2400" dirty="0">
-              <a:latin typeface="HGS創英角ｺﾞｼｯｸUB" panose="020B0900000000000000" pitchFamily="50" charset="-128"/>
-              <a:ea typeface="HGS創英角ｺﾞｼｯｸUB" panose="020B0900000000000000" pitchFamily="50" charset="-128"/>
-            </a:endParaRPr>
-          </a:p>
-          <a:p>
-            <a:endParaRPr lang="en-US" altLang="ja-JP" sz="2400" dirty="0">
-              <a:latin typeface="HGS創英角ｺﾞｼｯｸUB" panose="020B0900000000000000" pitchFamily="50" charset="-128"/>
-              <a:ea typeface="HGS創英角ｺﾞｼｯｸUB" panose="020B0900000000000000" pitchFamily="50" charset="-128"/>
-            </a:endParaRPr>
-          </a:p>
-          <a:p>
-            <a:r>
-              <a:rPr lang="ja-JP" altLang="en-US" sz="2400" dirty="0">
-                <a:latin typeface="HGS創英角ｺﾞｼｯｸUB" panose="020B0900000000000000" pitchFamily="50" charset="-128"/>
-                <a:ea typeface="HGS創英角ｺﾞｼｯｸUB" panose="020B0900000000000000" pitchFamily="50" charset="-128"/>
-              </a:rPr>
-              <a:t>また、企業講演に参加する前日には、</a:t>
-            </a:r>
-            <a:endParaRPr lang="en-US" altLang="ja-JP" sz="2400" dirty="0">
-              <a:latin typeface="HGS創英角ｺﾞｼｯｸUB" panose="020B0900000000000000" pitchFamily="50" charset="-128"/>
-              <a:ea typeface="HGS創英角ｺﾞｼｯｸUB" panose="020B0900000000000000" pitchFamily="50" charset="-128"/>
-            </a:endParaRPr>
-          </a:p>
-          <a:p>
-            <a:r>
-              <a:rPr lang="ja-JP" altLang="en-US" sz="2400" dirty="0">
-                <a:latin typeface="HGS創英角ｺﾞｼｯｸUB" panose="020B0900000000000000" pitchFamily="50" charset="-128"/>
-                <a:ea typeface="HGS創英角ｺﾞｼｯｸUB" panose="020B0900000000000000" pitchFamily="50" charset="-128"/>
-              </a:rPr>
-              <a:t>企業のホームページなどで、どのような企業なのかを、必ず下調べしましょう。</a:t>
-            </a:r>
-            <a:endParaRPr lang="en-US" altLang="ja-JP" sz="2400" dirty="0">
-              <a:latin typeface="HGS創英角ｺﾞｼｯｸUB" panose="020B0900000000000000" pitchFamily="50" charset="-128"/>
-              <a:ea typeface="HGS創英角ｺﾞｼｯｸUB" panose="020B0900000000000000" pitchFamily="50" charset="-128"/>
-            </a:endParaRPr>
+              <a:t>https://sushida.net/</a:t>
+            </a:r>
           </a:p>
         </p:txBody>
       </p:sp>
     </p:spTree>
     <p:extLst>
       <p:ext uri="{BB962C8B-B14F-4D97-AF65-F5344CB8AC3E}">
-        <p14:creationId xmlns:p14="http://schemas.microsoft.com/office/powerpoint/2010/main" val="3042183115"/>
+        <p14:creationId xmlns:p14="http://schemas.microsoft.com/office/powerpoint/2010/main" val="2792684129"/>
       </p:ext>
     </p:extLst>
   </p:cSld>
@@ -10843,7 +10843,7 @@
         <p:spPr>
           <a:xfrm>
             <a:off x="3708675" y="3235317"/>
-            <a:ext cx="6647974" cy="1938992"/>
+            <a:ext cx="6647974" cy="2308324"/>
           </a:xfrm>
           <a:prstGeom prst="rect">
             <a:avLst/>
@@ -10952,6 +10952,43 @@
                 <a:ea typeface="HGS創英角ｺﾞｼｯｸUB" panose="020B0900000000000000" pitchFamily="50" charset="-128"/>
               </a:rPr>
               <a:t>すでに持っている場合はそれでも大丈夫です</a:t>
+            </a:r>
+            <a:endParaRPr lang="en-US" altLang="ja-JP" sz="2400" dirty="0">
+              <a:latin typeface="HGS創英角ｺﾞｼｯｸUB" panose="020B0900000000000000" pitchFamily="50" charset="-128"/>
+              <a:ea typeface="HGS創英角ｺﾞｼｯｸUB" panose="020B0900000000000000" pitchFamily="50" charset="-128"/>
+            </a:endParaRPr>
+          </a:p>
+          <a:p>
+            <a:r>
+              <a:rPr lang="en-US" altLang="ja-JP" sz="2400" dirty="0">
+                <a:latin typeface="HGS創英角ｺﾞｼｯｸUB" panose="020B0900000000000000" pitchFamily="50" charset="-128"/>
+                <a:ea typeface="HGS創英角ｺﾞｼｯｸUB" panose="020B0900000000000000" pitchFamily="50" charset="-128"/>
+              </a:rPr>
+              <a:t>※</a:t>
+            </a:r>
+            <a:r>
+              <a:rPr lang="ja-JP" altLang="en-US" sz="2400" dirty="0">
+                <a:latin typeface="HGS創英角ｺﾞｼｯｸUB" panose="020B0900000000000000" pitchFamily="50" charset="-128"/>
+                <a:ea typeface="HGS創英角ｺﾞｼｯｸUB" panose="020B0900000000000000" pitchFamily="50" charset="-128"/>
+              </a:rPr>
+              <a:t>学校メールは</a:t>
+            </a:r>
+            <a:r>
+              <a:rPr lang="ja-JP" altLang="en-US" sz="2400" dirty="0">
+                <a:solidFill>
+                  <a:srgbClr val="FF0000"/>
+                </a:solidFill>
+                <a:latin typeface="HGS創英角ｺﾞｼｯｸUB" panose="020B0900000000000000" pitchFamily="50" charset="-128"/>
+                <a:ea typeface="HGS創英角ｺﾞｼｯｸUB" panose="020B0900000000000000" pitchFamily="50" charset="-128"/>
+              </a:rPr>
+              <a:t>卒業後削除</a:t>
+            </a:r>
+            <a:r>
+              <a:rPr lang="ja-JP" altLang="en-US" sz="2400" dirty="0">
+                <a:latin typeface="HGS創英角ｺﾞｼｯｸUB" panose="020B0900000000000000" pitchFamily="50" charset="-128"/>
+                <a:ea typeface="HGS創英角ｺﾞｼｯｸUB" panose="020B0900000000000000" pitchFamily="50" charset="-128"/>
+              </a:rPr>
+              <a:t>されます</a:t>
             </a:r>
             <a:endParaRPr lang="en-US" altLang="ja-JP" sz="2400" dirty="0">
               <a:latin typeface="HGS創英角ｺﾞｼｯｸUB" panose="020B0900000000000000" pitchFamily="50" charset="-128"/>

--- a/その他/新入生ガイダンス/00_はじめに.pptx
+++ b/その他/新入生ガイダンス/00_はじめに.pptx
@@ -290,7 +290,7 @@
           <a:p>
             <a:fld id="{E9CC885B-4903-4D54-9A93-00025F12DED9}" type="datetimeFigureOut">
               <a:rPr kumimoji="1" lang="ja-JP" altLang="en-US" smtClean="0"/>
-              <a:t>2026/3/25</a:t>
+              <a:t>2026/3/31</a:t>
             </a:fld>
             <a:endParaRPr kumimoji="1" lang="ja-JP" altLang="en-US"/>
           </a:p>
@@ -520,7 +520,7 @@
           <a:p>
             <a:fld id="{E9CC885B-4903-4D54-9A93-00025F12DED9}" type="datetimeFigureOut">
               <a:rPr kumimoji="1" lang="ja-JP" altLang="en-US" smtClean="0"/>
-              <a:t>2026/3/25</a:t>
+              <a:t>2026/3/31</a:t>
             </a:fld>
             <a:endParaRPr kumimoji="1" lang="ja-JP" altLang="en-US"/>
           </a:p>
@@ -760,7 +760,7 @@
           <a:p>
             <a:fld id="{E9CC885B-4903-4D54-9A93-00025F12DED9}" type="datetimeFigureOut">
               <a:rPr kumimoji="1" lang="ja-JP" altLang="en-US" smtClean="0"/>
-              <a:t>2026/3/25</a:t>
+              <a:t>2026/3/31</a:t>
             </a:fld>
             <a:endParaRPr kumimoji="1" lang="ja-JP" altLang="en-US"/>
           </a:p>
@@ -990,7 +990,7 @@
           <a:p>
             <a:fld id="{E9CC885B-4903-4D54-9A93-00025F12DED9}" type="datetimeFigureOut">
               <a:rPr kumimoji="1" lang="ja-JP" altLang="en-US" smtClean="0"/>
-              <a:t>2026/3/25</a:t>
+              <a:t>2026/3/31</a:t>
             </a:fld>
             <a:endParaRPr kumimoji="1" lang="ja-JP" altLang="en-US"/>
           </a:p>
@@ -1265,7 +1265,7 @@
           <a:p>
             <a:fld id="{E9CC885B-4903-4D54-9A93-00025F12DED9}" type="datetimeFigureOut">
               <a:rPr kumimoji="1" lang="ja-JP" altLang="en-US" smtClean="0"/>
-              <a:t>2026/3/25</a:t>
+              <a:t>2026/3/31</a:t>
             </a:fld>
             <a:endParaRPr kumimoji="1" lang="ja-JP" altLang="en-US"/>
           </a:p>
@@ -1594,7 +1594,7 @@
           <a:p>
             <a:fld id="{E9CC885B-4903-4D54-9A93-00025F12DED9}" type="datetimeFigureOut">
               <a:rPr kumimoji="1" lang="ja-JP" altLang="en-US" smtClean="0"/>
-              <a:t>2026/3/25</a:t>
+              <a:t>2026/3/31</a:t>
             </a:fld>
             <a:endParaRPr kumimoji="1" lang="ja-JP" altLang="en-US"/>
           </a:p>
@@ -2070,7 +2070,7 @@
           <a:p>
             <a:fld id="{E9CC885B-4903-4D54-9A93-00025F12DED9}" type="datetimeFigureOut">
               <a:rPr kumimoji="1" lang="ja-JP" altLang="en-US" smtClean="0"/>
-              <a:t>2026/3/25</a:t>
+              <a:t>2026/3/31</a:t>
             </a:fld>
             <a:endParaRPr kumimoji="1" lang="ja-JP" altLang="en-US"/>
           </a:p>
@@ -2211,7 +2211,7 @@
           <a:p>
             <a:fld id="{E9CC885B-4903-4D54-9A93-00025F12DED9}" type="datetimeFigureOut">
               <a:rPr kumimoji="1" lang="ja-JP" altLang="en-US" smtClean="0"/>
-              <a:t>2026/3/25</a:t>
+              <a:t>2026/3/31</a:t>
             </a:fld>
             <a:endParaRPr kumimoji="1" lang="ja-JP" altLang="en-US"/>
           </a:p>
@@ -2324,7 +2324,7 @@
           <a:p>
             <a:fld id="{E9CC885B-4903-4D54-9A93-00025F12DED9}" type="datetimeFigureOut">
               <a:rPr kumimoji="1" lang="ja-JP" altLang="en-US" smtClean="0"/>
-              <a:t>2026/3/25</a:t>
+              <a:t>2026/3/31</a:t>
             </a:fld>
             <a:endParaRPr kumimoji="1" lang="ja-JP" altLang="en-US"/>
           </a:p>
@@ -2667,7 +2667,7 @@
           <a:p>
             <a:fld id="{E9CC885B-4903-4D54-9A93-00025F12DED9}" type="datetimeFigureOut">
               <a:rPr kumimoji="1" lang="ja-JP" altLang="en-US" smtClean="0"/>
-              <a:t>2026/3/25</a:t>
+              <a:t>2026/3/31</a:t>
             </a:fld>
             <a:endParaRPr kumimoji="1" lang="ja-JP" altLang="en-US"/>
           </a:p>
@@ -2955,7 +2955,7 @@
           <a:p>
             <a:fld id="{E9CC885B-4903-4D54-9A93-00025F12DED9}" type="datetimeFigureOut">
               <a:rPr kumimoji="1" lang="ja-JP" altLang="en-US" smtClean="0"/>
-              <a:t>2026/3/25</a:t>
+              <a:t>2026/3/31</a:t>
             </a:fld>
             <a:endParaRPr kumimoji="1" lang="ja-JP" altLang="en-US"/>
           </a:p>
@@ -3228,7 +3228,7 @@
           <a:p>
             <a:fld id="{E9CC885B-4903-4D54-9A93-00025F12DED9}" type="datetimeFigureOut">
               <a:rPr kumimoji="1" lang="ja-JP" altLang="en-US" smtClean="0"/>
-              <a:t>2026/3/25</a:t>
+              <a:t>2026/3/31</a:t>
             </a:fld>
             <a:endParaRPr kumimoji="1" lang="ja-JP" altLang="en-US"/>
           </a:p>
@@ -3900,20 +3900,20 @@
                 <a:latin typeface="HGS創英角ｺﾞｼｯｸUB" panose="020B0900000000000000" pitchFamily="50" charset="-128"/>
                 <a:ea typeface="HGS創英角ｺﾞｼｯｸUB" panose="020B0900000000000000" pitchFamily="50" charset="-128"/>
               </a:rPr>
+              <a:t>・さいごに</a:t>
+            </a:r>
+            <a:endParaRPr lang="en-US" altLang="ja-JP" sz="2400" dirty="0">
+              <a:latin typeface="HGS創英角ｺﾞｼｯｸUB" panose="020B0900000000000000" pitchFamily="50" charset="-128"/>
+              <a:ea typeface="HGS創英角ｺﾞｼｯｸUB" panose="020B0900000000000000" pitchFamily="50" charset="-128"/>
+            </a:endParaRPr>
+          </a:p>
+          <a:p>
+            <a:r>
+              <a:rPr lang="ja-JP" altLang="en-US" sz="2400" dirty="0">
+                <a:latin typeface="HGS創英角ｺﾞｼｯｸUB" panose="020B0900000000000000" pitchFamily="50" charset="-128"/>
+                <a:ea typeface="HGS創英角ｺﾞｼｯｸUB" panose="020B0900000000000000" pitchFamily="50" charset="-128"/>
+              </a:rPr>
               <a:t>・タイピング練習</a:t>
-            </a:r>
-            <a:endParaRPr lang="en-US" altLang="ja-JP" sz="2400" dirty="0">
-              <a:latin typeface="HGS創英角ｺﾞｼｯｸUB" panose="020B0900000000000000" pitchFamily="50" charset="-128"/>
-              <a:ea typeface="HGS創英角ｺﾞｼｯｸUB" panose="020B0900000000000000" pitchFamily="50" charset="-128"/>
-            </a:endParaRPr>
-          </a:p>
-          <a:p>
-            <a:r>
-              <a:rPr lang="ja-JP" altLang="en-US" sz="2400" dirty="0">
-                <a:latin typeface="HGS創英角ｺﾞｼｯｸUB" panose="020B0900000000000000" pitchFamily="50" charset="-128"/>
-                <a:ea typeface="HGS創英角ｺﾞｼｯｸUB" panose="020B0900000000000000" pitchFamily="50" charset="-128"/>
-              </a:rPr>
-              <a:t>・さいごに</a:t>
             </a:r>
             <a:endParaRPr lang="en-US" altLang="ja-JP" sz="2400" dirty="0">
               <a:latin typeface="HGS創英角ｺﾞｼｯｸUB" panose="020B0900000000000000" pitchFamily="50" charset="-128"/>
